--- a/handover/03-presentation.pptx
+++ b/handover/03-presentation.pptx
@@ -12,9 +12,10 @@
     <p:sldId id="260" r:id="rId6"/>
     <p:sldId id="261" r:id="rId7"/>
     <p:sldId id="262" r:id="rId8"/>
+    <p:sldId id="263" r:id="rId9"/>
   </p:sldIdLst>
   <p:notesMasterIdLst>
-    <p:notesMasterId r:id="rId9"/>
+    <p:notesMasterId r:id="rId10"/>
   </p:notesMasterIdLst>
   <p:sldSz cx="18288000" cy="10287000"/>
   <p:notesSz cx="10287000" cy="18288000"/>
@@ -772,7 +773,7 @@
           <a:p>
             <a:r>
               <a:rPr lang="en-US" dirty="0"/>
-              <a:t>Every prompt has four parts: context calling, the goal and metric contract, tool calls the agent must run, and repo-specific snippets. Paste them in that order.</a:t>
+              <a:t>Power BI is the authoritative report; NetSuite is the upstream ledger; the workbook holds contract expectations. The native finance cards are still a 4 August snapshot.</a:t>
             </a:r>
             <a:endParaRPr lang="en-US" dirty="0"/>
           </a:p>
@@ -860,7 +861,7 @@
           <a:p>
             <a:r>
               <a:rPr lang="en-US" dirty="0"/>
-              <a:t>app.css for the existing product, executive-bi.css for anything new. Tokens over components; page order is fixed.</a:t>
+              <a:t>Every prompt has four parts: context calling, the goal and metric contract, tool calls the agent must run, and repo-specific snippets. Paste them in that order.</a:t>
             </a:r>
             <a:endParaRPr lang="en-US" dirty="0"/>
           </a:p>
@@ -948,7 +949,7 @@
           <a:p>
             <a:r>
               <a:rPr lang="en-US" dirty="0"/>
-              <a:t>Scope: an intake form and an export. Three stages, each with an acceptance test. Everything stays on ArcGIS.</a:t>
+              <a:t>app.css for the existing product, executive-bi.css for anything new. Tokens over components; page order is fixed.</a:t>
             </a:r>
             <a:endParaRPr lang="en-US" dirty="0"/>
           </a:p>
@@ -1036,7 +1037,7 @@
           <a:p>
             <a:r>
               <a:rPr lang="en-US" dirty="0"/>
-              <a:t>Daily check, safe change path, drift guards, and the five open decisions.</a:t>
+              <a:t>Scope: an intake form and an export. Three stages, each with an acceptance test. Everything stays on ArcGIS.</a:t>
             </a:r>
             <a:endParaRPr lang="en-US" dirty="0"/>
           </a:p>
@@ -1060,6 +1061,94 @@
             <a:fld id="{F7021451-1387-4CA6-816F-3879F97B5CBC}" type="slidenum">
               <a:rPr lang="en-US"/>
               <a:t>7</a:t>
+            </a:fld>
+            <a:endParaRPr lang="en-US"/>
+          </a:p>
+        </p:txBody>
+      </p:sp>
+    </p:spTree>
+    <p:extLst>
+      <p:ext uri="{BB962C8B-B14F-4D97-AF65-F5344CB8AC3E}">
+        <p14:creationId xmlns:p14="http://schemas.microsoft.com/office/powerpoint/2010/main" val="1024086991"/>
+      </p:ext>
+    </p:extLst>
+  </p:cSld>
+  <p:clrMapOvr>
+    <a:masterClrMapping/>
+  </p:clrMapOvr>
+</p:notes>
+</file>
+
+<file path=ppt/notesSlides/notesSlide8.xml><?xml version="1.0" encoding="utf-8"?>
+<p:notes xmlns:a="http://schemas.openxmlformats.org/drawingml/2006/main" xmlns:r="http://schemas.openxmlformats.org/officeDocument/2006/relationships" xmlns:p="http://schemas.openxmlformats.org/presentationml/2006/main">
+  <p:cSld>
+    <p:spTree>
+      <p:nvGrpSpPr>
+        <p:cNvPr id="1" name=""/>
+        <p:cNvGrpSpPr/>
+        <p:nvPr/>
+      </p:nvGrpSpPr>
+      <p:grpSpPr>
+        <a:xfrm>
+          <a:off x="0" y="0"/>
+          <a:ext cx="0" cy="0"/>
+          <a:chOff x="0" y="0"/>
+          <a:chExt cx="0" cy="0"/>
+        </a:xfrm>
+      </p:grpSpPr>
+      <p:sp>
+        <p:nvSpPr>
+          <p:cNvPr id="2" name="Slide Image Placeholder 1"/>
+          <p:cNvSpPr>
+            <a:spLocks noGrp="1" noRot="1" noChangeAspect="1"/>
+          </p:cNvSpPr>
+          <p:nvPr>
+            <p:ph type="sldImg"/>
+          </p:nvPr>
+        </p:nvSpPr>
+        <p:spPr/>
+      </p:sp>
+      <p:sp>
+        <p:nvSpPr>
+          <p:cNvPr id="3" name="Notes Placeholder 2"/>
+          <p:cNvSpPr>
+            <a:spLocks noGrp="1"/>
+          </p:cNvSpPr>
+          <p:nvPr>
+            <p:ph type="body" idx="1"/>
+          </p:nvPr>
+        </p:nvSpPr>
+        <p:spPr/>
+        <p:txBody>
+          <a:bodyPr/>
+          <a:lstStyle/>
+          <a:p>
+            <a:r>
+              <a:rPr lang="en-US" dirty="0"/>
+              <a:t>Daily check, safe change path, drift guards, and the five open decisions.</a:t>
+            </a:r>
+            <a:endParaRPr lang="en-US" dirty="0"/>
+          </a:p>
+        </p:txBody>
+      </p:sp>
+      <p:sp>
+        <p:nvSpPr>
+          <p:cNvPr id="4" name="Slide Number Placeholder 3"/>
+          <p:cNvSpPr>
+            <a:spLocks noGrp="1"/>
+          </p:cNvSpPr>
+          <p:nvPr>
+            <p:ph type="sldNum" sz="quarter" idx="10"/>
+          </p:nvPr>
+        </p:nvSpPr>
+        <p:spPr/>
+        <p:txBody>
+          <a:bodyPr/>
+          <a:lstStyle/>
+          <a:p>
+            <a:fld id="{F7021451-1387-4CA6-816F-3879F97B5CBC}" type="slidenum">
+              <a:rPr lang="en-US"/>
+              <a:t>8</a:t>
             </a:fld>
             <a:endParaRPr lang="en-US"/>
           </a:p>
@@ -1487,8 +1576,8 @@
         </p:nvSpPr>
         <p:spPr>
           <a:xfrm>
-            <a:off x="1847850" y="1050131"/>
-            <a:ext cx="8520090" cy="376238"/>
+            <a:off x="1847850" y="1076325"/>
+            <a:ext cx="8782191" cy="323850"/>
           </a:xfrm>
           <a:prstGeom prst="rect">
             <a:avLst/>
@@ -1512,9 +1601,9 @@
                     <a:alpha val="85000"/>
                   </a:srgbClr>
                 </a:solidFill>
-                <a:latin typeface="Manrope" pitchFamily="34" charset="0"/>
-                <a:ea typeface="Manrope" pitchFamily="34" charset="-122"/>
-                <a:cs typeface="Manrope" pitchFamily="34" charset="-120"/>
+                <a:latin typeface="Arial" pitchFamily="34" charset="0"/>
+                <a:ea typeface="Arial" pitchFamily="34" charset="-122"/>
+                <a:cs typeface="Arial" pitchFamily="34" charset="-120"/>
               </a:rPr>
               <a:t>URBAN REDEVELOPMENT AUTHORITY OF PITTSBURGH</a:t>
             </a:r>
@@ -1530,8 +1619,8 @@
         </p:nvSpPr>
         <p:spPr>
           <a:xfrm>
-            <a:off x="1047750" y="3708350"/>
-            <a:ext cx="17811750" cy="347663"/>
+            <a:off x="1047750" y="3758357"/>
+            <a:ext cx="17811750" cy="300038"/>
           </a:xfrm>
           <a:prstGeom prst="rect">
             <a:avLst/>
@@ -1553,9 +1642,9 @@
                 <a:solidFill>
                   <a:srgbClr val="9FE0F6"/>
                 </a:solidFill>
-                <a:latin typeface="Manrope" pitchFamily="34" charset="0"/>
-                <a:ea typeface="Manrope" pitchFamily="34" charset="-122"/>
-                <a:cs typeface="Manrope" pitchFamily="34" charset="-120"/>
+                <a:latin typeface="Arial" pitchFamily="34" charset="0"/>
+                <a:ea typeface="Arial" pitchFamily="34" charset="-122"/>
+                <a:cs typeface="Arial" pitchFamily="34" charset="-120"/>
               </a:rPr>
               <a:t>INTERN PROJECT HANDOVER</a:t>
             </a:r>
@@ -1571,7 +1660,7 @@
         </p:nvSpPr>
         <p:spPr>
           <a:xfrm>
-            <a:off x="1047750" y="4284613"/>
+            <a:off x="1047750" y="4286994"/>
             <a:ext cx="17811750" cy="1083543"/>
           </a:xfrm>
           <a:prstGeom prst="rect">
@@ -1588,7 +1677,7 @@
           <a:p>
             <a:pPr algn="l" indent="0" marL="0">
               <a:lnSpc>
-                <a:spcPct val="71739"/>
+                <a:spcPct val="85416"/>
               </a:lnSpc>
               <a:buNone/>
             </a:pPr>
@@ -1597,9 +1686,9 @@
                 <a:solidFill>
                   <a:srgbClr val="FFFFFF"/>
                 </a:solidFill>
-                <a:latin typeface="Manrope" pitchFamily="34" charset="0"/>
-                <a:ea typeface="Manrope" pitchFamily="34" charset="-122"/>
-                <a:cs typeface="Manrope" pitchFamily="34" charset="-120"/>
+                <a:latin typeface="Arial" pitchFamily="34" charset="0"/>
+                <a:ea typeface="Arial" pitchFamily="34" charset="-122"/>
+                <a:cs typeface="Arial" pitchFamily="34" charset="-120"/>
               </a:rPr>
               <a:t>LandCare Assurance</a:t>
             </a:r>
@@ -1615,7 +1704,7 @@
         </p:nvSpPr>
         <p:spPr>
           <a:xfrm>
-            <a:off x="1047750" y="5596756"/>
+            <a:off x="1047750" y="5599137"/>
             <a:ext cx="11772900" cy="1015305"/>
           </a:xfrm>
           <a:prstGeom prst="rect">
@@ -1632,7 +1721,7 @@
           <a:p>
             <a:pPr algn="l" indent="0" marL="0">
               <a:lnSpc>
-                <a:spcPct val="98654"/>
+                <a:spcPct val="117931"/>
               </a:lnSpc>
               <a:buNone/>
             </a:pPr>
@@ -1641,9 +1730,9 @@
                 <a:solidFill>
                   <a:srgbClr val="E3F4FB"/>
                 </a:solidFill>
-                <a:latin typeface="Manrope" pitchFamily="34" charset="0"/>
-                <a:ea typeface="Manrope" pitchFamily="34" charset="-122"/>
-                <a:cs typeface="Manrope" pitchFamily="34" charset="-120"/>
+                <a:latin typeface="Arial" pitchFamily="34" charset="0"/>
+                <a:ea typeface="Arial" pitchFamily="34" charset="-122"/>
+                <a:cs typeface="Arial" pitchFamily="34" charset="-120"/>
               </a:rPr>
               <a:t>For this service period, which assigned parcels were serviced, by whom, and with what evidence.</a:t>
             </a:r>
@@ -1659,7 +1748,7 @@
         </p:nvSpPr>
         <p:spPr>
           <a:xfrm>
-            <a:off x="1047750" y="8758238"/>
+            <a:off x="1047750" y="8810625"/>
             <a:ext cx="16192500" cy="9525"/>
           </a:xfrm>
           <a:prstGeom prst="rect">
@@ -1681,8 +1770,8 @@
         </p:nvSpPr>
         <p:spPr>
           <a:xfrm>
-            <a:off x="1047750" y="9034463"/>
-            <a:ext cx="3860631" cy="376238"/>
+            <a:off x="1047750" y="9086850"/>
+            <a:ext cx="3467316" cy="323850"/>
           </a:xfrm>
           <a:prstGeom prst="rect">
             <a:avLst/>
@@ -1704,9 +1793,9 @@
                 <a:solidFill>
                   <a:srgbClr val="CFEEFB"/>
                 </a:solidFill>
-                <a:latin typeface="Manrope" pitchFamily="34" charset="0"/>
-                <a:ea typeface="Manrope" pitchFamily="34" charset="-122"/>
-                <a:cs typeface="Manrope" pitchFamily="34" charset="-120"/>
+                <a:latin typeface="Arial" pitchFamily="34" charset="0"/>
+                <a:ea typeface="Arial" pitchFamily="34" charset="-122"/>
+                <a:cs typeface="Arial" pitchFamily="34" charset="-120"/>
               </a:rPr>
               <a:t>ura-gis/land-care-assurance</a:t>
             </a:r>
@@ -1722,8 +1811,8 @@
         </p:nvSpPr>
         <p:spPr>
           <a:xfrm>
-            <a:off x="5167015" y="9034463"/>
-            <a:ext cx="4315911" cy="376238"/>
+            <a:off x="4809455" y="9086850"/>
+            <a:ext cx="3769690" cy="323850"/>
           </a:xfrm>
           <a:prstGeom prst="rect">
             <a:avLst/>
@@ -1745,9 +1834,9 @@
                 <a:solidFill>
                   <a:srgbClr val="CFEEFB"/>
                 </a:solidFill>
-                <a:latin typeface="Manrope" pitchFamily="34" charset="0"/>
-                <a:ea typeface="Manrope" pitchFamily="34" charset="-122"/>
-                <a:cs typeface="Manrope" pitchFamily="34" charset="-120"/>
+                <a:latin typeface="Arial" pitchFamily="34" charset="0"/>
+                <a:ea typeface="Arial" pitchFamily="34" charset="-122"/>
+                <a:cs typeface="Arial" pitchFamily="34" charset="-120"/>
               </a:rPr>
               <a:t>/monitoring/ · /kpi/ · /contractor/</a:t>
             </a:r>
@@ -1763,8 +1852,8 @@
         </p:nvSpPr>
         <p:spPr>
           <a:xfrm>
-            <a:off x="9700171" y="9034463"/>
-            <a:ext cx="4350946" cy="376238"/>
+            <a:off x="8846046" y="9086850"/>
+            <a:ext cx="4015911" cy="323850"/>
           </a:xfrm>
           <a:prstGeom prst="rect">
             <a:avLst/>
@@ -1786,9 +1875,9 @@
                 <a:solidFill>
                   <a:srgbClr val="CFEEFB"/>
                 </a:solidFill>
-                <a:latin typeface="Manrope" pitchFamily="34" charset="0"/>
-                <a:ea typeface="Manrope" pitchFamily="34" charset="-122"/>
-                <a:cs typeface="Manrope" pitchFamily="34" charset="-120"/>
+                <a:latin typeface="Arial" pitchFamily="34" charset="0"/>
+                <a:ea typeface="Arial" pitchFamily="34" charset="-122"/>
+                <a:cs typeface="Arial" pitchFamily="34" charset="-120"/>
               </a:rPr>
               <a:t>rutomo@ura.org (Rizaldy Utomo)</a:t>
             </a:r>
@@ -1837,7 +1926,7 @@
         <p:spPr>
           <a:xfrm>
             <a:off x="857250" y="590550"/>
-            <a:ext cx="18230850" cy="323850"/>
+            <a:ext cx="18230850" cy="276225"/>
           </a:xfrm>
           <a:prstGeom prst="rect">
             <a:avLst/>
@@ -1859,9 +1948,9 @@
                 <a:solidFill>
                   <a:srgbClr val="006C9F"/>
                 </a:solidFill>
-                <a:latin typeface="Manrope" pitchFamily="34" charset="0"/>
-                <a:ea typeface="Manrope" pitchFamily="34" charset="-122"/>
-                <a:cs typeface="Manrope" pitchFamily="34" charset="-120"/>
+                <a:latin typeface="Arial" pitchFamily="34" charset="0"/>
+                <a:ea typeface="Arial" pitchFamily="34" charset="-122"/>
+                <a:cs typeface="Arial" pitchFamily="34" charset="-120"/>
               </a:rPr>
               <a:t>01 · PROBLEM CONTEXT</a:t>
             </a:r>
@@ -1877,7 +1966,7 @@
         </p:nvSpPr>
         <p:spPr>
           <a:xfrm>
-            <a:off x="857250" y="971550"/>
+            <a:off x="857250" y="923925"/>
             <a:ext cx="18230850" cy="601563"/>
           </a:xfrm>
           <a:prstGeom prst="rect">
@@ -1894,7 +1983,7 @@
           <a:p>
             <a:pPr algn="l" indent="0" marL="0">
               <a:lnSpc>
-                <a:spcPct val="74415"/>
+                <a:spcPct val="88299"/>
               </a:lnSpc>
               <a:buNone/>
             </a:pPr>
@@ -1903,9 +1992,9 @@
                 <a:solidFill>
                   <a:srgbClr val="00334F"/>
                 </a:solidFill>
-                <a:latin typeface="Manrope" pitchFamily="34" charset="0"/>
-                <a:ea typeface="Manrope" pitchFamily="34" charset="-122"/>
-                <a:cs typeface="Manrope" pitchFamily="34" charset="-120"/>
+                <a:latin typeface="Arial" pitchFamily="34" charset="0"/>
+                <a:ea typeface="Arial" pitchFamily="34" charset="-122"/>
+                <a:cs typeface="Arial" pitchFamily="34" charset="-120"/>
               </a:rPr>
               <a:t>Contractor Compliance and Monitoring was lagging</a:t>
             </a:r>
@@ -1921,12 +2010,12 @@
         </p:nvSpPr>
         <p:spPr>
           <a:xfrm>
-            <a:off x="857250" y="1763613"/>
-            <a:ext cx="5397475" cy="2474268"/>
+            <a:off x="857250" y="1715988"/>
+            <a:ext cx="5397475" cy="2326630"/>
           </a:xfrm>
           <a:prstGeom prst="roundRect">
             <a:avLst>
-              <a:gd name="adj" fmla="val 6929"/>
+              <a:gd name="adj" fmla="val 7369"/>
             </a:avLst>
           </a:prstGeom>
           <a:solidFill>
@@ -1948,8 +2037,8 @@
         </p:nvSpPr>
         <p:spPr>
           <a:xfrm>
-            <a:off x="1095375" y="1982688"/>
-            <a:ext cx="5413348" cy="300038"/>
+            <a:off x="1095375" y="1935063"/>
+            <a:ext cx="5413348" cy="252413"/>
           </a:xfrm>
           <a:prstGeom prst="rect">
             <a:avLst/>
@@ -1971,9 +2060,9 @@
                 <a:solidFill>
                   <a:srgbClr val="C2410C"/>
                 </a:solidFill>
-                <a:latin typeface="Manrope" pitchFamily="34" charset="0"/>
-                <a:ea typeface="Manrope" pitchFamily="34" charset="-122"/>
-                <a:cs typeface="Manrope" pitchFamily="34" charset="-120"/>
+                <a:latin typeface="Arial" pitchFamily="34" charset="0"/>
+                <a:ea typeface="Arial" pitchFamily="34" charset="-122"/>
+                <a:cs typeface="Arial" pitchFamily="34" charset="-120"/>
               </a:rPr>
               <a:t>THE TRIGGER</a:t>
             </a:r>
@@ -1989,12 +2078,12 @@
         </p:nvSpPr>
         <p:spPr>
           <a:xfrm>
-            <a:off x="1095375" y="2358926"/>
-            <a:ext cx="4921225" cy="923925"/>
+            <a:off x="1095375" y="2263676"/>
+            <a:ext cx="4921225" cy="823913"/>
           </a:xfrm>
           <a:prstGeom prst="roundRect">
             <a:avLst>
-              <a:gd name="adj" fmla="val 12371"/>
+              <a:gd name="adj" fmla="val 13873"/>
             </a:avLst>
           </a:prstGeom>
           <a:solidFill>
@@ -2016,8 +2105,8 @@
         </p:nvSpPr>
         <p:spPr>
           <a:xfrm>
-            <a:off x="1295400" y="2773263"/>
-            <a:ext cx="1253951" cy="314325"/>
+            <a:off x="1295400" y="2644676"/>
+            <a:ext cx="1359374" cy="266700"/>
           </a:xfrm>
           <a:prstGeom prst="rect">
             <a:avLst/>
@@ -2039,9 +2128,9 @@
                 <a:solidFill>
                   <a:srgbClr val="8A4A2A"/>
                 </a:solidFill>
-                <a:latin typeface="Manrope" pitchFamily="34" charset="0"/>
-                <a:ea typeface="Manrope" pitchFamily="34" charset="-122"/>
-                <a:cs typeface="Manrope" pitchFamily="34" charset="-120"/>
+                <a:latin typeface="Arial" pitchFamily="34" charset="0"/>
+                <a:ea typeface="Arial" pitchFamily="34" charset="-122"/>
+                <a:cs typeface="Arial" pitchFamily="34" charset="-120"/>
               </a:rPr>
               <a:t>REPORTED</a:t>
             </a:r>
@@ -2057,8 +2146,8 @@
         </p:nvSpPr>
         <p:spPr>
           <a:xfrm>
-            <a:off x="4420567" y="2520851"/>
-            <a:ext cx="1535609" cy="638175"/>
+            <a:off x="4429720" y="2425601"/>
+            <a:ext cx="1525540" cy="538163"/>
           </a:xfrm>
           <a:prstGeom prst="rect">
             <a:avLst/>
@@ -2080,9 +2169,9 @@
                 <a:solidFill>
                   <a:srgbClr val="C2410C"/>
                 </a:solidFill>
-                <a:latin typeface="Manrope" pitchFamily="34" charset="0"/>
-                <a:ea typeface="Manrope" pitchFamily="34" charset="-122"/>
-                <a:cs typeface="Manrope" pitchFamily="34" charset="-120"/>
+                <a:latin typeface="Arial" pitchFamily="34" charset="0"/>
+                <a:ea typeface="Arial" pitchFamily="34" charset="-122"/>
+                <a:cs typeface="Arial" pitchFamily="34" charset="-120"/>
               </a:rPr>
               <a:t>~11.7%</a:t>
             </a:r>
@@ -2098,7 +2187,7 @@
         </p:nvSpPr>
         <p:spPr>
           <a:xfrm>
-            <a:off x="1095375" y="3397151"/>
+            <a:off x="1095375" y="3201888"/>
             <a:ext cx="5068862" cy="659755"/>
           </a:xfrm>
           <a:prstGeom prst="rect">
@@ -2115,7 +2204,7 @@
           <a:p>
             <a:pPr algn="l" indent="0" marL="0">
               <a:lnSpc>
-                <a:spcPct val="100431"/>
+                <a:spcPct val="118691"/>
               </a:lnSpc>
               <a:buNone/>
             </a:pPr>
@@ -2124,15 +2213,15 @@
                 <a:solidFill>
                   <a:srgbClr val="00334F"/>
                 </a:solidFill>
-                <a:latin typeface="Manrope" pitchFamily="34" charset="0"/>
-                <a:ea typeface="Manrope" pitchFamily="34" charset="-122"/>
-                <a:cs typeface="Manrope" pitchFamily="34" charset="-120"/>
+                <a:latin typeface="Arial" pitchFamily="34" charset="0"/>
+                <a:ea typeface="Arial" pitchFamily="34" charset="-122"/>
+                <a:cs typeface="Arial" pitchFamily="34" charset="-120"/>
               </a:rPr>
               <a:t>Blends Active and Request Only </a:t>
             </a:r>
             <a:pPr algn="l" indent="0" marL="0">
               <a:lnSpc>
-                <a:spcPct val="100431"/>
+                <a:spcPct val="118691"/>
               </a:lnSpc>
               <a:buNone/>
             </a:pPr>
@@ -2141,9 +2230,9 @@
                 <a:solidFill>
                   <a:srgbClr val="00334F"/>
                 </a:solidFill>
-                <a:latin typeface="Manrope" pitchFamily="34" charset="0"/>
-                <a:ea typeface="Manrope" pitchFamily="34" charset="-122"/>
-                <a:cs typeface="Manrope" pitchFamily="34" charset="-120"/>
+                <a:latin typeface="Arial" pitchFamily="34" charset="0"/>
+                <a:ea typeface="Arial" pitchFamily="34" charset="-122"/>
+                <a:cs typeface="Arial" pitchFamily="34" charset="-120"/>
               </a:rPr>
               <a:t>parcels, with no stated definition.</a:t>
             </a:r>
@@ -2159,12 +2248,12 @@
         </p:nvSpPr>
         <p:spPr>
           <a:xfrm>
-            <a:off x="6445225" y="1763613"/>
-            <a:ext cx="5397475" cy="2474268"/>
+            <a:off x="6445225" y="1715988"/>
+            <a:ext cx="5397475" cy="2326630"/>
           </a:xfrm>
           <a:prstGeom prst="roundRect">
             <a:avLst>
-              <a:gd name="adj" fmla="val 6929"/>
+              <a:gd name="adj" fmla="val 7369"/>
             </a:avLst>
           </a:prstGeom>
           <a:solidFill>
@@ -2186,8 +2275,8 @@
         </p:nvSpPr>
         <p:spPr>
           <a:xfrm>
-            <a:off x="6683350" y="1982688"/>
-            <a:ext cx="5413348" cy="300038"/>
+            <a:off x="6683350" y="1935063"/>
+            <a:ext cx="5413348" cy="252413"/>
           </a:xfrm>
           <a:prstGeom prst="rect">
             <a:avLst/>
@@ -2209,9 +2298,9 @@
                 <a:solidFill>
                   <a:srgbClr val="006C9F"/>
                 </a:solidFill>
-                <a:latin typeface="Manrope" pitchFamily="34" charset="0"/>
-                <a:ea typeface="Manrope" pitchFamily="34" charset="-122"/>
-                <a:cs typeface="Manrope" pitchFamily="34" charset="-120"/>
+                <a:latin typeface="Arial" pitchFamily="34" charset="0"/>
+                <a:ea typeface="Arial" pitchFamily="34" charset="-122"/>
+                <a:cs typeface="Arial" pitchFamily="34" charset="-120"/>
               </a:rPr>
               <a:t>THE UNIVERSE</a:t>
             </a:r>
@@ -2227,12 +2316,12 @@
         </p:nvSpPr>
         <p:spPr>
           <a:xfrm>
-            <a:off x="6683350" y="2358926"/>
-            <a:ext cx="4921225" cy="923925"/>
+            <a:off x="6683350" y="2263676"/>
+            <a:ext cx="4921225" cy="823913"/>
           </a:xfrm>
           <a:prstGeom prst="roundRect">
             <a:avLst>
-              <a:gd name="adj" fmla="val 12371"/>
+              <a:gd name="adj" fmla="val 13873"/>
             </a:avLst>
           </a:prstGeom>
           <a:gradFill rotWithShape="1">
@@ -2268,8 +2357,8 @@
         </p:nvSpPr>
         <p:spPr>
           <a:xfrm>
-            <a:off x="6883375" y="2773263"/>
-            <a:ext cx="1221581" cy="314325"/>
+            <a:off x="6883375" y="2644676"/>
+            <a:ext cx="1237952" cy="266700"/>
           </a:xfrm>
           <a:prstGeom prst="rect">
             <a:avLst/>
@@ -2291,9 +2380,9 @@
                 <a:solidFill>
                   <a:srgbClr val="FFFFFF"/>
                 </a:solidFill>
-                <a:latin typeface="Manrope" pitchFamily="34" charset="0"/>
-                <a:ea typeface="Manrope" pitchFamily="34" charset="-122"/>
-                <a:cs typeface="Manrope" pitchFamily="34" charset="-120"/>
+                <a:latin typeface="Arial" pitchFamily="34" charset="0"/>
+                <a:ea typeface="Arial" pitchFamily="34" charset="-122"/>
+                <a:cs typeface="Arial" pitchFamily="34" charset="-120"/>
               </a:rPr>
               <a:t>ASSIGNED</a:t>
             </a:r>
@@ -2309,8 +2398,8 @@
         </p:nvSpPr>
         <p:spPr>
           <a:xfrm>
-            <a:off x="10501015" y="2520851"/>
-            <a:ext cx="979736" cy="638175"/>
+            <a:off x="10373767" y="2425601"/>
+            <a:ext cx="1106984" cy="538163"/>
           </a:xfrm>
           <a:prstGeom prst="rect">
             <a:avLst/>
@@ -2332,9 +2421,9 @@
                 <a:solidFill>
                   <a:srgbClr val="FFFFFF"/>
                 </a:solidFill>
-                <a:latin typeface="Manrope" pitchFamily="34" charset="0"/>
-                <a:ea typeface="Manrope" pitchFamily="34" charset="-122"/>
-                <a:cs typeface="Manrope" pitchFamily="34" charset="-120"/>
+                <a:latin typeface="Arial" pitchFamily="34" charset="0"/>
+                <a:ea typeface="Arial" pitchFamily="34" charset="-122"/>
+                <a:cs typeface="Arial" pitchFamily="34" charset="-120"/>
               </a:rPr>
               <a:t>1,127</a:t>
             </a:r>
@@ -2350,7 +2439,7 @@
         </p:nvSpPr>
         <p:spPr>
           <a:xfrm>
-            <a:off x="6683350" y="3397151"/>
+            <a:off x="6683350" y="3201888"/>
             <a:ext cx="5068862" cy="659755"/>
           </a:xfrm>
           <a:prstGeom prst="rect">
@@ -2367,7 +2456,7 @@
           <a:p>
             <a:pPr algn="l" indent="0" marL="0">
               <a:lnSpc>
-                <a:spcPct val="100431"/>
+                <a:spcPct val="118691"/>
               </a:lnSpc>
               <a:buNone/>
             </a:pPr>
@@ -2376,15 +2465,15 @@
                 <a:solidFill>
                   <a:srgbClr val="00334F"/>
                 </a:solidFill>
-                <a:latin typeface="Manrope" pitchFamily="34" charset="0"/>
-                <a:ea typeface="Manrope" pitchFamily="34" charset="-122"/>
-                <a:cs typeface="Manrope" pitchFamily="34" charset="-120"/>
+                <a:latin typeface="Arial" pitchFamily="34" charset="0"/>
+                <a:ea typeface="Arial" pitchFamily="34" charset="-122"/>
+                <a:cs typeface="Arial" pitchFamily="34" charset="-120"/>
               </a:rPr>
               <a:t>From a tag filter with </a:t>
             </a:r>
             <a:pPr algn="l" indent="0" marL="0">
               <a:lnSpc>
-                <a:spcPct val="100431"/>
+                <a:spcPct val="118691"/>
               </a:lnSpc>
               <a:buNone/>
             </a:pPr>
@@ -2393,15 +2482,15 @@
                 <a:solidFill>
                   <a:srgbClr val="00334F"/>
                 </a:solidFill>
-                <a:latin typeface="Manrope" pitchFamily="34" charset="0"/>
-                <a:ea typeface="Manrope" pitchFamily="34" charset="-122"/>
-                <a:cs typeface="Manrope" pitchFamily="34" charset="-120"/>
+                <a:latin typeface="Arial" pitchFamily="34" charset="0"/>
+                <a:ea typeface="Arial" pitchFamily="34" charset="-122"/>
+                <a:cs typeface="Arial" pitchFamily="34" charset="-120"/>
               </a:rPr>
               <a:t>no ownership check </a:t>
             </a:r>
             <a:pPr algn="l" indent="0" marL="0">
               <a:lnSpc>
-                <a:spcPct val="100431"/>
+                <a:spcPct val="118691"/>
               </a:lnSpc>
               <a:buNone/>
             </a:pPr>
@@ -2410,9 +2499,9 @@
                 <a:solidFill>
                   <a:srgbClr val="00334F"/>
                 </a:solidFill>
-                <a:latin typeface="Manrope" pitchFamily="34" charset="0"/>
-                <a:ea typeface="Manrope" pitchFamily="34" charset="-122"/>
-                <a:cs typeface="Manrope" pitchFamily="34" charset="-120"/>
+                <a:latin typeface="Arial" pitchFamily="34" charset="0"/>
+                <a:ea typeface="Arial" pitchFamily="34" charset="-122"/>
+                <a:cs typeface="Arial" pitchFamily="34" charset="-120"/>
               </a:rPr>
               <a:t>— sold parcels stayed in the denominator.</a:t>
             </a:r>
@@ -2428,12 +2517,12 @@
         </p:nvSpPr>
         <p:spPr>
           <a:xfrm>
-            <a:off x="12033200" y="1763613"/>
-            <a:ext cx="5397550" cy="2474268"/>
+            <a:off x="12033200" y="1715988"/>
+            <a:ext cx="5397550" cy="2326630"/>
           </a:xfrm>
           <a:prstGeom prst="roundRect">
             <a:avLst>
-              <a:gd name="adj" fmla="val 6929"/>
+              <a:gd name="adj" fmla="val 7369"/>
             </a:avLst>
           </a:prstGeom>
           <a:solidFill>
@@ -2455,8 +2544,8 @@
         </p:nvSpPr>
         <p:spPr>
           <a:xfrm>
-            <a:off x="12271325" y="1982688"/>
-            <a:ext cx="5413430" cy="300038"/>
+            <a:off x="12271325" y="1935063"/>
+            <a:ext cx="5413430" cy="252413"/>
           </a:xfrm>
           <a:prstGeom prst="rect">
             <a:avLst/>
@@ -2478,9 +2567,9 @@
                 <a:solidFill>
                   <a:srgbClr val="2E7D32"/>
                 </a:solidFill>
-                <a:latin typeface="Manrope" pitchFamily="34" charset="0"/>
-                <a:ea typeface="Manrope" pitchFamily="34" charset="-122"/>
-                <a:cs typeface="Manrope" pitchFamily="34" charset="-120"/>
+                <a:latin typeface="Arial" pitchFamily="34" charset="0"/>
+                <a:ea typeface="Arial" pitchFamily="34" charset="-122"/>
+                <a:cs typeface="Arial" pitchFamily="34" charset="-120"/>
               </a:rPr>
               <a:t>AT STAKE</a:t>
             </a:r>
@@ -2496,12 +2585,12 @@
         </p:nvSpPr>
         <p:spPr>
           <a:xfrm>
-            <a:off x="12271325" y="2358926"/>
-            <a:ext cx="4921300" cy="923925"/>
+            <a:off x="12271325" y="2263676"/>
+            <a:ext cx="4921300" cy="823913"/>
           </a:xfrm>
           <a:prstGeom prst="roundRect">
             <a:avLst>
-              <a:gd name="adj" fmla="val 12371"/>
+              <a:gd name="adj" fmla="val 13873"/>
             </a:avLst>
           </a:prstGeom>
           <a:solidFill>
@@ -2523,8 +2612,8 @@
         </p:nvSpPr>
         <p:spPr>
           <a:xfrm>
-            <a:off x="12471350" y="2773263"/>
-            <a:ext cx="1874900" cy="314325"/>
+            <a:off x="12471350" y="2644676"/>
+            <a:ext cx="1914845" cy="266700"/>
           </a:xfrm>
           <a:prstGeom prst="rect">
             <a:avLst/>
@@ -2546,9 +2635,9 @@
                 <a:solidFill>
                   <a:srgbClr val="2E7D32"/>
                 </a:solidFill>
-                <a:latin typeface="Manrope" pitchFamily="34" charset="0"/>
-                <a:ea typeface="Manrope" pitchFamily="34" charset="-122"/>
-                <a:cs typeface="Manrope" pitchFamily="34" charset="-120"/>
+                <a:latin typeface="Arial" pitchFamily="34" charset="0"/>
+                <a:ea typeface="Arial" pitchFamily="34" charset="-122"/>
+                <a:cs typeface="Arial" pitchFamily="34" charset="-120"/>
               </a:rPr>
               <a:t>ANNUAL SPEND</a:t>
             </a:r>
@@ -2564,8 +2653,8 @@
         </p:nvSpPr>
         <p:spPr>
           <a:xfrm>
-            <a:off x="15800784" y="2520851"/>
-            <a:ext cx="1268016" cy="638175"/>
+            <a:off x="15864483" y="2425601"/>
+            <a:ext cx="1204317" cy="538163"/>
           </a:xfrm>
           <a:prstGeom prst="rect">
             <a:avLst/>
@@ -2587,9 +2676,9 @@
                 <a:solidFill>
                   <a:srgbClr val="2E7D32"/>
                 </a:solidFill>
-                <a:latin typeface="Manrope" pitchFamily="34" charset="0"/>
-                <a:ea typeface="Manrope" pitchFamily="34" charset="-122"/>
-                <a:cs typeface="Manrope" pitchFamily="34" charset="-120"/>
+                <a:latin typeface="Arial" pitchFamily="34" charset="0"/>
+                <a:ea typeface="Arial" pitchFamily="34" charset="-122"/>
+                <a:cs typeface="Arial" pitchFamily="34" charset="-120"/>
               </a:rPr>
               <a:t>$775k</a:t>
             </a:r>
@@ -2605,7 +2694,7 @@
         </p:nvSpPr>
         <p:spPr>
           <a:xfrm>
-            <a:off x="12271325" y="3397151"/>
+            <a:off x="12271325" y="3201888"/>
             <a:ext cx="5068939" cy="659755"/>
           </a:xfrm>
           <a:prstGeom prst="rect">
@@ -2622,7 +2711,7 @@
           <a:p>
             <a:pPr algn="l" indent="0" marL="0">
               <a:lnSpc>
-                <a:spcPct val="100431"/>
+                <a:spcPct val="118691"/>
               </a:lnSpc>
               <a:buNone/>
             </a:pPr>
@@ -2631,15 +2720,15 @@
                 <a:solidFill>
                   <a:srgbClr val="00334F"/>
                 </a:solidFill>
-                <a:latin typeface="Manrope" pitchFamily="34" charset="0"/>
-                <a:ea typeface="Manrope" pitchFamily="34" charset="-122"/>
-                <a:cs typeface="Manrope" pitchFamily="34" charset="-120"/>
+                <a:latin typeface="Arial" pitchFamily="34" charset="0"/>
+                <a:ea typeface="Arial" pitchFamily="34" charset="-122"/>
+                <a:cs typeface="Arial" pitchFamily="34" charset="-120"/>
               </a:rPr>
               <a:t>Spend judged against evidence that </a:t>
             </a:r>
             <a:pPr algn="l" indent="0" marL="0">
               <a:lnSpc>
-                <a:spcPct val="100431"/>
+                <a:spcPct val="118691"/>
               </a:lnSpc>
               <a:buNone/>
             </a:pPr>
@@ -2648,15 +2737,15 @@
                 <a:solidFill>
                   <a:srgbClr val="00334F"/>
                 </a:solidFill>
-                <a:latin typeface="Manrope" pitchFamily="34" charset="0"/>
-                <a:ea typeface="Manrope" pitchFamily="34" charset="-122"/>
-                <a:cs typeface="Manrope" pitchFamily="34" charset="-120"/>
+                <a:latin typeface="Arial" pitchFamily="34" charset="0"/>
+                <a:ea typeface="Arial" pitchFamily="34" charset="-122"/>
+                <a:cs typeface="Arial" pitchFamily="34" charset="-120"/>
               </a:rPr>
               <a:t>could not be traced to a parcel </a:t>
             </a:r>
             <a:pPr algn="l" indent="0" marL="0">
               <a:lnSpc>
-                <a:spcPct val="100431"/>
+                <a:spcPct val="118691"/>
               </a:lnSpc>
               <a:buNone/>
             </a:pPr>
@@ -2665,9 +2754,9 @@
                 <a:solidFill>
                   <a:srgbClr val="00334F"/>
                 </a:solidFill>
-                <a:latin typeface="Manrope" pitchFamily="34" charset="0"/>
-                <a:ea typeface="Manrope" pitchFamily="34" charset="-122"/>
-                <a:cs typeface="Manrope" pitchFamily="34" charset="-120"/>
+                <a:latin typeface="Arial" pitchFamily="34" charset="0"/>
+                <a:ea typeface="Arial" pitchFamily="34" charset="-122"/>
+                <a:cs typeface="Arial" pitchFamily="34" charset="-120"/>
               </a:rPr>
               <a:t>.</a:t>
             </a:r>
@@ -2683,12 +2772,12 @@
         </p:nvSpPr>
         <p:spPr>
           <a:xfrm>
-            <a:off x="857250" y="4466481"/>
-            <a:ext cx="8581504" cy="5229969"/>
+            <a:off x="857250" y="4271218"/>
+            <a:ext cx="8581504" cy="5425232"/>
           </a:xfrm>
           <a:prstGeom prst="roundRect">
             <a:avLst>
-              <a:gd name="adj" fmla="val 3278"/>
+              <a:gd name="adj" fmla="val 3160"/>
             </a:avLst>
           </a:prstGeom>
           <a:solidFill>
@@ -2725,7 +2814,7 @@
         </p:nvSpPr>
         <p:spPr>
           <a:xfrm>
-            <a:off x="857250" y="4466481"/>
+            <a:off x="857250" y="4271218"/>
             <a:ext cx="8581504" cy="9525"/>
           </a:xfrm>
           <a:prstGeom prst="rect">
@@ -2745,8 +2834,8 @@
         </p:nvSpPr>
         <p:spPr>
           <a:xfrm>
-            <a:off x="857250" y="4466481"/>
-            <a:ext cx="38100" cy="5229969"/>
+            <a:off x="857250" y="4271218"/>
+            <a:ext cx="38100" cy="5425232"/>
           </a:xfrm>
           <a:prstGeom prst="rect">
             <a:avLst/>
@@ -2765,8 +2854,8 @@
         </p:nvSpPr>
         <p:spPr>
           <a:xfrm>
-            <a:off x="9429229" y="4466481"/>
-            <a:ext cx="9525" cy="5229969"/>
+            <a:off x="9429229" y="4271218"/>
+            <a:ext cx="9525" cy="5425232"/>
           </a:xfrm>
           <a:prstGeom prst="rect">
             <a:avLst/>
@@ -2785,8 +2874,8 @@
         </p:nvSpPr>
         <p:spPr>
           <a:xfrm>
-            <a:off x="1181100" y="4723656"/>
-            <a:ext cx="8758617" cy="323850"/>
+            <a:off x="1181100" y="4528393"/>
+            <a:ext cx="8758617" cy="276225"/>
           </a:xfrm>
           <a:prstGeom prst="rect">
             <a:avLst/>
@@ -2808,9 +2897,9 @@
                 <a:solidFill>
                   <a:srgbClr val="006C9F"/>
                 </a:solidFill>
-                <a:latin typeface="Manrope" pitchFamily="34" charset="0"/>
-                <a:ea typeface="Manrope" pitchFamily="34" charset="-122"/>
-                <a:cs typeface="Manrope" pitchFamily="34" charset="-120"/>
+                <a:latin typeface="Arial" pitchFamily="34" charset="0"/>
+                <a:ea typeface="Arial" pitchFamily="34" charset="-122"/>
+                <a:cs typeface="Arial" pitchFamily="34" charset="-120"/>
               </a:rPr>
               <a:t>WHY I BUILT IT THIS WAY</a:t>
             </a:r>
@@ -2826,7 +2915,7 @@
         </p:nvSpPr>
         <p:spPr>
           <a:xfrm>
-            <a:off x="1181100" y="5142756"/>
+            <a:off x="1181100" y="4899868"/>
             <a:ext cx="8201250" cy="1371600"/>
           </a:xfrm>
           <a:prstGeom prst="rect">
@@ -2843,7 +2932,7 @@
           <a:p>
             <a:pPr algn="l" indent="0" marL="0">
               <a:lnSpc>
-                <a:spcPct val="102941"/>
+                <a:spcPct val="120690"/>
               </a:lnSpc>
               <a:buNone/>
             </a:pPr>
@@ -2852,15 +2941,15 @@
                 <a:solidFill>
                   <a:srgbClr val="00334F"/>
                 </a:solidFill>
-                <a:latin typeface="Manrope" pitchFamily="34" charset="0"/>
-                <a:ea typeface="Manrope" pitchFamily="34" charset="-122"/>
-                <a:cs typeface="Manrope" pitchFamily="34" charset="-120"/>
+                <a:latin typeface="Arial" pitchFamily="34" charset="0"/>
+                <a:ea typeface="Arial" pitchFamily="34" charset="-122"/>
+                <a:cs typeface="Arial" pitchFamily="34" charset="-120"/>
               </a:rPr>
               <a:t>Outside GIS control: </a:t>
             </a:r>
             <a:pPr algn="l" indent="0" marL="0">
               <a:lnSpc>
-                <a:spcPct val="102941"/>
+                <a:spcPct val="120690"/>
               </a:lnSpc>
               <a:buNone/>
             </a:pPr>
@@ -2869,15 +2958,15 @@
                 <a:solidFill>
                   <a:srgbClr val="00334F"/>
                 </a:solidFill>
-                <a:latin typeface="Manrope" pitchFamily="34" charset="0"/>
-                <a:ea typeface="Manrope" pitchFamily="34" charset="-122"/>
-                <a:cs typeface="Manrope" pitchFamily="34" charset="-120"/>
+                <a:latin typeface="Arial" pitchFamily="34" charset="0"/>
+                <a:ea typeface="Arial" pitchFamily="34" charset="-122"/>
+                <a:cs typeface="Arial" pitchFamily="34" charset="-120"/>
               </a:rPr>
               <a:t>contractor compliance, Regrid's interface, field capacity. </a:t>
             </a:r>
             <a:pPr algn="l" indent="0" marL="0">
               <a:lnSpc>
-                <a:spcPct val="102941"/>
+                <a:spcPct val="120690"/>
               </a:lnSpc>
               <a:buNone/>
             </a:pPr>
@@ -2886,15 +2975,15 @@
                 <a:solidFill>
                   <a:srgbClr val="00334F"/>
                 </a:solidFill>
-                <a:latin typeface="Manrope" pitchFamily="34" charset="0"/>
-                <a:ea typeface="Manrope" pitchFamily="34" charset="-122"/>
-                <a:cs typeface="Manrope" pitchFamily="34" charset="-120"/>
+                <a:latin typeface="Arial" pitchFamily="34" charset="0"/>
+                <a:ea typeface="Arial" pitchFamily="34" charset="-122"/>
+                <a:cs typeface="Arial" pitchFamily="34" charset="-120"/>
               </a:rPr>
               <a:t>Inside: </a:t>
             </a:r>
             <a:pPr algn="l" indent="0" marL="0">
               <a:lnSpc>
-                <a:spcPct val="102941"/>
+                <a:spcPct val="120690"/>
               </a:lnSpc>
               <a:buNone/>
             </a:pPr>
@@ -2903,9 +2992,9 @@
                 <a:solidFill>
                   <a:srgbClr val="00334F"/>
                 </a:solidFill>
-                <a:latin typeface="Manrope" pitchFamily="34" charset="0"/>
-                <a:ea typeface="Manrope" pitchFamily="34" charset="-122"/>
-                <a:cs typeface="Manrope" pitchFamily="34" charset="-120"/>
+                <a:latin typeface="Arial" pitchFamily="34" charset="0"/>
+                <a:ea typeface="Arial" pitchFamily="34" charset="-122"/>
+                <a:cs typeface="Arial" pitchFamily="34" charset="-120"/>
               </a:rPr>
               <a:t>the assignment query, the schemas, the metric definition, the published app.</a:t>
             </a:r>
@@ -2921,24 +3010,24 @@
         </p:nvSpPr>
         <p:spPr>
           <a:xfrm>
-            <a:off x="1181100" y="6609606"/>
-            <a:ext cx="8201250" cy="704850"/>
-          </a:xfrm>
-          <a:prstGeom prst="rect">
-            <a:avLst/>
-          </a:prstGeom>
-          <a:noFill/>
-          <a:ln/>
-        </p:spPr>
-        <p:txBody>
-          <a:bodyPr wrap="square" lIns="25400" tIns="25400" rIns="25400" bIns="25400" rtlCol="0" anchor="t">
-            <a:normAutofit/>
-          </a:bodyPr>
-          <a:lstStyle/>
-          <a:p>
-            <a:pPr algn="l" indent="0" marL="0">
-              <a:lnSpc>
-                <a:spcPct val="102941"/>
+            <a:off x="1181100" y="6366718"/>
+            <a:ext cx="8758617" cy="371475"/>
+          </a:xfrm>
+          <a:prstGeom prst="rect">
+            <a:avLst/>
+          </a:prstGeom>
+          <a:noFill/>
+          <a:ln/>
+        </p:spPr>
+        <p:txBody>
+          <a:bodyPr wrap="square" lIns="25400" tIns="25400" rIns="25400" bIns="25400" rtlCol="0" anchor="t">
+            <a:normAutofit/>
+          </a:bodyPr>
+          <a:lstStyle/>
+          <a:p>
+            <a:pPr algn="l" indent="0" marL="0">
+              <a:lnSpc>
+                <a:spcPct val="120690"/>
               </a:lnSpc>
               <a:buNone/>
             </a:pPr>
@@ -2947,15 +3036,15 @@
                 <a:solidFill>
                   <a:srgbClr val="00334F"/>
                 </a:solidFill>
-                <a:latin typeface="Manrope" pitchFamily="34" charset="0"/>
-                <a:ea typeface="Manrope" pitchFamily="34" charset="-122"/>
-                <a:cs typeface="Manrope" pitchFamily="34" charset="-120"/>
+                <a:latin typeface="Arial" pitchFamily="34" charset="0"/>
+                <a:ea typeface="Arial" pitchFamily="34" charset="-122"/>
+                <a:cs typeface="Arial" pitchFamily="34" charset="-120"/>
               </a:rPr>
               <a:t>A map gives leadership something to act on </a:t>
             </a:r>
             <a:pPr algn="l" indent="0" marL="0">
               <a:lnSpc>
-                <a:spcPct val="102941"/>
+                <a:spcPct val="120690"/>
               </a:lnSpc>
               <a:buNone/>
             </a:pPr>
@@ -2964,9 +3053,9 @@
                 <a:solidFill>
                   <a:srgbClr val="00334F"/>
                 </a:solidFill>
-                <a:latin typeface="Manrope" pitchFamily="34" charset="0"/>
-                <a:ea typeface="Manrope" pitchFamily="34" charset="-122"/>
-                <a:cs typeface="Manrope" pitchFamily="34" charset="-120"/>
+                <a:latin typeface="Arial" pitchFamily="34" charset="0"/>
+                <a:ea typeface="Arial" pitchFamily="34" charset="-122"/>
+                <a:cs typeface="Arial" pitchFamily="34" charset="-120"/>
               </a:rPr>
               <a:t>that a percentage cannot.</a:t>
             </a:r>
@@ -2982,12 +3071,12 @@
         </p:nvSpPr>
         <p:spPr>
           <a:xfrm>
-            <a:off x="9629254" y="4466481"/>
-            <a:ext cx="7801496" cy="5229969"/>
+            <a:off x="9629254" y="4271218"/>
+            <a:ext cx="7801496" cy="5425232"/>
           </a:xfrm>
           <a:prstGeom prst="roundRect">
             <a:avLst>
-              <a:gd name="adj" fmla="val 3278"/>
+              <a:gd name="adj" fmla="val 3160"/>
             </a:avLst>
           </a:prstGeom>
           <a:solidFill>
@@ -3009,8 +3098,8 @@
         </p:nvSpPr>
         <p:spPr>
           <a:xfrm>
-            <a:off x="9924529" y="4723656"/>
-            <a:ext cx="7932040" cy="323850"/>
+            <a:off x="9924529" y="4528393"/>
+            <a:ext cx="7932040" cy="276225"/>
           </a:xfrm>
           <a:prstGeom prst="rect">
             <a:avLst/>
@@ -3032,9 +3121,9 @@
                 <a:solidFill>
                   <a:srgbClr val="006C9F"/>
                 </a:solidFill>
-                <a:latin typeface="Manrope" pitchFamily="34" charset="0"/>
-                <a:ea typeface="Manrope" pitchFamily="34" charset="-122"/>
-                <a:cs typeface="Manrope" pitchFamily="34" charset="-120"/>
+                <a:latin typeface="Arial" pitchFamily="34" charset="0"/>
+                <a:ea typeface="Arial" pitchFamily="34" charset="-122"/>
+                <a:cs typeface="Arial" pitchFamily="34" charset="-120"/>
               </a:rPr>
               <a:t>WHAT V1.0 DELIVERS</a:t>
             </a:r>
@@ -3050,7 +3139,7 @@
         </p:nvSpPr>
         <p:spPr>
           <a:xfrm>
-            <a:off x="9924529" y="5228481"/>
+            <a:off x="9924529" y="4985593"/>
             <a:ext cx="123825" cy="123825"/>
           </a:xfrm>
           <a:prstGeom prst="ellipse">
@@ -3070,24 +3159,24 @@
         </p:nvSpPr>
         <p:spPr>
           <a:xfrm>
-            <a:off x="10181704" y="5142756"/>
-            <a:ext cx="7366828" cy="339849"/>
-          </a:xfrm>
-          <a:prstGeom prst="rect">
-            <a:avLst/>
-          </a:prstGeom>
-          <a:noFill/>
-          <a:ln/>
-        </p:spPr>
-        <p:txBody>
-          <a:bodyPr wrap="square" lIns="25400" tIns="25400" rIns="25400" bIns="25400" rtlCol="0" anchor="t">
-            <a:normAutofit/>
-          </a:bodyPr>
-          <a:lstStyle/>
-          <a:p>
-            <a:pPr algn="l" indent="0" marL="0">
-              <a:lnSpc>
-                <a:spcPct val="97477"/>
+            <a:off x="10181704" y="4899868"/>
+            <a:ext cx="6933076" cy="339849"/>
+          </a:xfrm>
+          <a:prstGeom prst="rect">
+            <a:avLst/>
+          </a:prstGeom>
+          <a:noFill/>
+          <a:ln/>
+        </p:spPr>
+        <p:txBody>
+          <a:bodyPr wrap="square" lIns="25400" tIns="25400" rIns="25400" bIns="25400" rtlCol="0" anchor="t">
+            <a:normAutofit/>
+          </a:bodyPr>
+          <a:lstStyle/>
+          <a:p>
+            <a:pPr algn="l" indent="0" marL="0">
+              <a:lnSpc>
+                <a:spcPct val="115200"/>
               </a:lnSpc>
               <a:buNone/>
             </a:pPr>
@@ -3096,9 +3185,9 @@
                 <a:solidFill>
                   <a:srgbClr val="00334F"/>
                 </a:solidFill>
-                <a:latin typeface="Manrope" pitchFamily="34" charset="0"/>
-                <a:ea typeface="Manrope" pitchFamily="34" charset="-122"/>
-                <a:cs typeface="Manrope" pitchFamily="34" charset="-120"/>
+                <a:latin typeface="Arial" pitchFamily="34" charset="0"/>
+                <a:ea typeface="Arial" pitchFamily="34" charset="-122"/>
+                <a:cs typeface="Arial" pitchFamily="34" charset="-120"/>
               </a:rPr>
               <a:t>Map Monitor — evidence displayed at the assignment polygon</a:t>
             </a:r>
@@ -3114,7 +3203,7 @@
         </p:nvSpPr>
         <p:spPr>
           <a:xfrm>
-            <a:off x="9924529" y="5644530"/>
+            <a:off x="9924529" y="5401642"/>
             <a:ext cx="123825" cy="123825"/>
           </a:xfrm>
           <a:prstGeom prst="ellipse">
@@ -3134,7 +3223,7 @@
         </p:nvSpPr>
         <p:spPr>
           <a:xfrm>
-            <a:off x="10181704" y="5558805"/>
+            <a:off x="10181704" y="5315917"/>
             <a:ext cx="7162384" cy="641598"/>
           </a:xfrm>
           <a:prstGeom prst="rect">
@@ -3151,7 +3240,7 @@
           <a:p>
             <a:pPr algn="l" indent="0" marL="0">
               <a:lnSpc>
-                <a:spcPct val="97477"/>
+                <a:spcPct val="115200"/>
               </a:lnSpc>
               <a:buNone/>
             </a:pPr>
@@ -3160,9 +3249,9 @@
                 <a:solidFill>
                   <a:srgbClr val="00334F"/>
                 </a:solidFill>
-                <a:latin typeface="Manrope" pitchFamily="34" charset="0"/>
-                <a:ea typeface="Manrope" pitchFamily="34" charset="-122"/>
-                <a:cs typeface="Manrope" pitchFamily="34" charset="-120"/>
+                <a:latin typeface="Arial" pitchFamily="34" charset="0"/>
+                <a:ea typeface="Arial" pitchFamily="34" charset="-122"/>
+                <a:cs typeface="Arial" pitchFamily="34" charset="-120"/>
               </a:rPr>
               <a:t>KPI Dashboard — completion, budget, contractor exposure by period</a:t>
             </a:r>
@@ -3178,7 +3267,7 @@
         </p:nvSpPr>
         <p:spPr>
           <a:xfrm>
-            <a:off x="9924529" y="6362328"/>
+            <a:off x="9924529" y="6119440"/>
             <a:ext cx="123825" cy="123825"/>
           </a:xfrm>
           <a:prstGeom prst="ellipse">
@@ -3198,7 +3287,7 @@
         </p:nvSpPr>
         <p:spPr>
           <a:xfrm>
-            <a:off x="10181704" y="6276603"/>
+            <a:off x="10181704" y="6033715"/>
             <a:ext cx="7162384" cy="641598"/>
           </a:xfrm>
           <a:prstGeom prst="rect">
@@ -3215,7 +3304,7 @@
           <a:p>
             <a:pPr algn="l" indent="0" marL="0">
               <a:lnSpc>
-                <a:spcPct val="97477"/>
+                <a:spcPct val="115200"/>
               </a:lnSpc>
               <a:buNone/>
             </a:pPr>
@@ -3224,9 +3313,9 @@
                 <a:solidFill>
                   <a:srgbClr val="00334F"/>
                 </a:solidFill>
-                <a:latin typeface="Manrope" pitchFamily="34" charset="0"/>
-                <a:ea typeface="Manrope" pitchFamily="34" charset="-122"/>
-                <a:cs typeface="Manrope" pitchFamily="34" charset="-120"/>
+                <a:latin typeface="Arial" pitchFamily="34" charset="0"/>
+                <a:ea typeface="Arial" pitchFamily="34" charset="-122"/>
+                <a:cs typeface="Arial" pitchFamily="34" charset="-120"/>
               </a:rPr>
               <a:t>Contractor portal — pick a parcel on the map or list, submit prefilled evidence</a:t>
             </a:r>
@@ -3242,7 +3331,7 @@
         </p:nvSpPr>
         <p:spPr>
           <a:xfrm>
-            <a:off x="9924529" y="7080126"/>
+            <a:off x="9924529" y="6837238"/>
             <a:ext cx="123825" cy="123825"/>
           </a:xfrm>
           <a:prstGeom prst="ellipse">
@@ -3262,7 +3351,7 @@
         </p:nvSpPr>
         <p:spPr>
           <a:xfrm>
-            <a:off x="10181704" y="6994401"/>
+            <a:off x="10181704" y="6751513"/>
             <a:ext cx="7162384" cy="641598"/>
           </a:xfrm>
           <a:prstGeom prst="rect">
@@ -3279,7 +3368,7 @@
           <a:p>
             <a:pPr algn="l" indent="0" marL="0">
               <a:lnSpc>
-                <a:spcPct val="97477"/>
+                <a:spcPct val="115200"/>
               </a:lnSpc>
               <a:buNone/>
             </a:pPr>
@@ -3288,9 +3377,9 @@
                 <a:solidFill>
                   <a:srgbClr val="00334F"/>
                 </a:solidFill>
-                <a:latin typeface="Manrope" pitchFamily="34" charset="0"/>
-                <a:ea typeface="Manrope" pitchFamily="34" charset="-122"/>
-                <a:cs typeface="Manrope" pitchFamily="34" charset="-120"/>
+                <a:latin typeface="Arial" pitchFamily="34" charset="0"/>
+                <a:ea typeface="Arial" pitchFamily="34" charset="-122"/>
+                <a:cs typeface="Arial" pitchFamily="34" charset="-120"/>
               </a:rPr>
               <a:t>A stated metric — period, denominator, source, and freshness on every number</a:t>
             </a:r>
@@ -3339,7 +3428,7 @@
         <p:spPr>
           <a:xfrm>
             <a:off x="762000" y="628650"/>
-            <a:ext cx="11388879" cy="323850"/>
+            <a:ext cx="11742904" cy="276225"/>
           </a:xfrm>
           <a:prstGeom prst="rect">
             <a:avLst/>
@@ -3361,9 +3450,9 @@
                 <a:solidFill>
                   <a:srgbClr val="006C9F"/>
                 </a:solidFill>
-                <a:latin typeface="Manrope" pitchFamily="34" charset="0"/>
-                <a:ea typeface="Manrope" pitchFamily="34" charset="-122"/>
-                <a:cs typeface="Manrope" pitchFamily="34" charset="-120"/>
+                <a:latin typeface="Arial" pitchFamily="34" charset="0"/>
+                <a:ea typeface="Arial" pitchFamily="34" charset="-122"/>
+                <a:cs typeface="Arial" pitchFamily="34" charset="-120"/>
               </a:rPr>
               <a:t>02 · SYSTEM ARCHITECTURE AND DATA FLOW</a:t>
             </a:r>
@@ -3379,39 +3468,39 @@
         </p:nvSpPr>
         <p:spPr>
           <a:xfrm>
-            <a:off x="762000" y="990600"/>
-            <a:ext cx="11388879" cy="601563"/>
-          </a:xfrm>
-          <a:prstGeom prst="rect">
-            <a:avLst/>
-          </a:prstGeom>
-          <a:noFill/>
-          <a:ln/>
-        </p:spPr>
-        <p:txBody>
-          <a:bodyPr wrap="square" lIns="25400" tIns="25400" rIns="25400" bIns="25400" rtlCol="0" anchor="t">
-            <a:normAutofit/>
-          </a:bodyPr>
-          <a:lstStyle/>
-          <a:p>
-            <a:pPr algn="l" indent="0" marL="0">
-              <a:lnSpc>
-                <a:spcPct val="74415"/>
-              </a:lnSpc>
-              <a:buNone/>
-            </a:pPr>
-            <a:r>
-              <a:rPr lang="en-US" sz="4350" b="1" spc="-130" kern="0" dirty="0">
+            <a:off x="762000" y="942975"/>
+            <a:ext cx="11742904" cy="582141"/>
+          </a:xfrm>
+          <a:prstGeom prst="rect">
+            <a:avLst/>
+          </a:prstGeom>
+          <a:noFill/>
+          <a:ln/>
+        </p:spPr>
+        <p:txBody>
+          <a:bodyPr wrap="square" lIns="25400" tIns="25400" rIns="25400" bIns="25400" rtlCol="0" anchor="t">
+            <a:normAutofit/>
+          </a:bodyPr>
+          <a:lstStyle/>
+          <a:p>
+            <a:pPr algn="l" indent="0" marL="0">
+              <a:lnSpc>
+                <a:spcPct val="88558"/>
+              </a:lnSpc>
+              <a:buNone/>
+            </a:pPr>
+            <a:r>
+              <a:rPr lang="en-US" sz="4200" b="1" spc="-126" kern="0" dirty="0">
                 <a:solidFill>
                   <a:srgbClr val="00334F"/>
                 </a:solidFill>
-                <a:latin typeface="Manrope" pitchFamily="34" charset="0"/>
-                <a:ea typeface="Manrope" pitchFamily="34" charset="-122"/>
-                <a:cs typeface="Manrope" pitchFamily="34" charset="-120"/>
-              </a:rPr>
-              <a:t>Nightly ingestion, live query at page load</a:t>
-            </a:r>
-            <a:endParaRPr lang="en-US" sz="4350" dirty="0"/>
+                <a:latin typeface="Arial" pitchFamily="34" charset="0"/>
+                <a:ea typeface="Arial" pitchFamily="34" charset="-122"/>
+                <a:cs typeface="Arial" pitchFamily="34" charset="-120"/>
+              </a:rPr>
+              <a:t>One nightly job, everything else live at page load</a:t>
+            </a:r>
+            <a:endParaRPr lang="en-US" sz="4200" dirty="0"/>
           </a:p>
         </p:txBody>
       </p:sp>
@@ -3423,8 +3512,8 @@
         </p:nvSpPr>
         <p:spPr>
           <a:xfrm>
-            <a:off x="14168347" y="936873"/>
-            <a:ext cx="3357653" cy="655290"/>
+            <a:off x="14423657" y="869826"/>
+            <a:ext cx="3102343" cy="655290"/>
           </a:xfrm>
           <a:prstGeom prst="rect">
             <a:avLst/>
@@ -3440,7 +3529,7 @@
           <a:p>
             <a:pPr algn="r" indent="0" marL="0">
               <a:lnSpc>
-                <a:spcPct val="99692"/>
+                <a:spcPct val="117818"/>
               </a:lnSpc>
               <a:buNone/>
             </a:pPr>
@@ -3449,9 +3538,9 @@
                 <a:solidFill>
                   <a:srgbClr val="5B7386"/>
                 </a:solidFill>
-                <a:latin typeface="Manrope" pitchFamily="34" charset="0"/>
-                <a:ea typeface="Manrope" pitchFamily="34" charset="-122"/>
-                <a:cs typeface="Manrope" pitchFamily="34" charset="-120"/>
+                <a:latin typeface="Arial" pitchFamily="34" charset="0"/>
+                <a:ea typeface="Arial" pitchFamily="34" charset="-122"/>
+                <a:cs typeface="Arial" pitchFamily="34" charset="-120"/>
               </a:rPr>
               <a:t>Period: the 15th of one month through the 14th of the next</a:t>
             </a:r>
@@ -3467,12 +3556,12 @@
         </p:nvSpPr>
         <p:spPr>
           <a:xfrm>
-            <a:off x="762000" y="1801713"/>
-            <a:ext cx="16764000" cy="6013847"/>
+            <a:off x="762000" y="1734666"/>
+            <a:ext cx="16764000" cy="6123756"/>
           </a:xfrm>
           <a:prstGeom prst="roundRect">
             <a:avLst>
-              <a:gd name="adj" fmla="val 2851"/>
+              <a:gd name="adj" fmla="val 2800"/>
             </a:avLst>
           </a:prstGeom>
           <a:solidFill>
@@ -3496,13 +3585,13 @@
         </p:nvPicPr>
         <p:blipFill>
           <a:blip r:embed="rId1"/>
-          <a:srcRect l="-30951" r="-30951" t="0" b="0"/>
+          <a:srcRect l="-29733" r="-29733" t="0" b="0"/>
           <a:stretch/>
         </p:blipFill>
         <p:spPr>
           <a:xfrm>
-            <a:off x="904875" y="1944588"/>
-            <a:ext cx="16478250" cy="5728097"/>
+            <a:off x="981075" y="1915641"/>
+            <a:ext cx="16325850" cy="5761806"/>
           </a:xfrm>
           <a:prstGeom prst="rect">
             <a:avLst/>
@@ -3517,12 +3606,12 @@
         </p:nvSpPr>
         <p:spPr>
           <a:xfrm>
-            <a:off x="762000" y="8063210"/>
-            <a:ext cx="5460950" cy="1595140"/>
+            <a:off x="762000" y="8106073"/>
+            <a:ext cx="5460950" cy="1552277"/>
           </a:xfrm>
           <a:prstGeom prst="roundRect">
             <a:avLst>
-              <a:gd name="adj" fmla="val 9554"/>
+              <a:gd name="adj" fmla="val 9818"/>
             </a:avLst>
           </a:prstGeom>
           <a:solidFill>
@@ -3544,8 +3633,8 @@
         </p:nvSpPr>
         <p:spPr>
           <a:xfrm>
-            <a:off x="1000125" y="8244185"/>
-            <a:ext cx="5483170" cy="285750"/>
+            <a:off x="1000125" y="8287048"/>
+            <a:ext cx="5483170" cy="242888"/>
           </a:xfrm>
           <a:prstGeom prst="rect">
             <a:avLst/>
@@ -3567,9 +3656,9 @@
                 <a:solidFill>
                   <a:srgbClr val="006C9F"/>
                 </a:solidFill>
-                <a:latin typeface="Manrope" pitchFamily="34" charset="0"/>
-                <a:ea typeface="Manrope" pitchFamily="34" charset="-122"/>
-                <a:cs typeface="Manrope" pitchFamily="34" charset="-120"/>
+                <a:latin typeface="Arial" pitchFamily="34" charset="0"/>
+                <a:ea typeface="Arial" pitchFamily="34" charset="-122"/>
+                <a:cs typeface="Arial" pitchFamily="34" charset="-120"/>
               </a:rPr>
               <a:t>OWNERSHIP SPLIT</a:t>
             </a:r>
@@ -3602,7 +3691,7 @@
           <a:p>
             <a:pPr algn="l" indent="0" marL="0">
               <a:lnSpc>
-                <a:spcPct val="98954"/>
+                <a:spcPct val="116945"/>
               </a:lnSpc>
               <a:buNone/>
             </a:pPr>
@@ -3611,15 +3700,15 @@
                 <a:solidFill>
                   <a:srgbClr val="00334F"/>
                 </a:solidFill>
-                <a:latin typeface="Manrope" pitchFamily="34" charset="0"/>
-                <a:ea typeface="Manrope" pitchFamily="34" charset="-122"/>
-                <a:cs typeface="Manrope" pitchFamily="34" charset="-120"/>
+                <a:latin typeface="Arial" pitchFamily="34" charset="0"/>
+                <a:ea typeface="Arial" pitchFamily="34" charset="-122"/>
+                <a:cs typeface="Arial" pitchFamily="34" charset="-120"/>
               </a:rPr>
               <a:t>GIS and data operations </a:t>
             </a:r>
             <a:pPr algn="l" indent="0" marL="0">
               <a:lnSpc>
-                <a:spcPct val="98954"/>
+                <a:spcPct val="116945"/>
               </a:lnSpc>
               <a:buNone/>
             </a:pPr>
@@ -3628,15 +3717,15 @@
                 <a:solidFill>
                   <a:srgbClr val="00334F"/>
                 </a:solidFill>
-                <a:latin typeface="Manrope" pitchFamily="34" charset="0"/>
-                <a:ea typeface="Manrope" pitchFamily="34" charset="-122"/>
-                <a:cs typeface="Manrope" pitchFamily="34" charset="-120"/>
+                <a:latin typeface="Arial" pitchFamily="34" charset="0"/>
+                <a:ea typeface="Arial" pitchFamily="34" charset="-122"/>
+                <a:cs typeface="Arial" pitchFamily="34" charset="-120"/>
               </a:rPr>
               <a:t>own ingestion and store. </a:t>
             </a:r>
             <a:pPr algn="l" indent="0" marL="0">
               <a:lnSpc>
-                <a:spcPct val="98954"/>
+                <a:spcPct val="116945"/>
               </a:lnSpc>
               <a:buNone/>
             </a:pPr>
@@ -3645,15 +3734,15 @@
                 <a:solidFill>
                   <a:srgbClr val="00334F"/>
                 </a:solidFill>
-                <a:latin typeface="Manrope" pitchFamily="34" charset="0"/>
-                <a:ea typeface="Manrope" pitchFamily="34" charset="-122"/>
-                <a:cs typeface="Manrope" pitchFamily="34" charset="-120"/>
+                <a:latin typeface="Arial" pitchFamily="34" charset="0"/>
+                <a:ea typeface="Arial" pitchFamily="34" charset="-122"/>
+                <a:cs typeface="Arial" pitchFamily="34" charset="-120"/>
               </a:rPr>
               <a:t>Web and dashboard owner </a:t>
             </a:r>
             <a:pPr algn="l" indent="0" marL="0">
               <a:lnSpc>
-                <a:spcPct val="98954"/>
+                <a:spcPct val="116945"/>
               </a:lnSpc>
               <a:buNone/>
             </a:pPr>
@@ -3662,9 +3751,9 @@
                 <a:solidFill>
                   <a:srgbClr val="00334F"/>
                 </a:solidFill>
-                <a:latin typeface="Manrope" pitchFamily="34" charset="0"/>
-                <a:ea typeface="Manrope" pitchFamily="34" charset="-122"/>
-                <a:cs typeface="Manrope" pitchFamily="34" charset="-120"/>
+                <a:latin typeface="Arial" pitchFamily="34" charset="0"/>
+                <a:ea typeface="Arial" pitchFamily="34" charset="-122"/>
+                <a:cs typeface="Arial" pitchFamily="34" charset="-120"/>
               </a:rPr>
               <a:t>owns publish and application.</a:t>
             </a:r>
@@ -3680,12 +3769,12 @@
         </p:nvSpPr>
         <p:spPr>
           <a:xfrm>
-            <a:off x="6413450" y="8063210"/>
-            <a:ext cx="5461025" cy="1595140"/>
+            <a:off x="6413450" y="8106073"/>
+            <a:ext cx="5461025" cy="1552277"/>
           </a:xfrm>
           <a:prstGeom prst="roundRect">
             <a:avLst>
-              <a:gd name="adj" fmla="val 9554"/>
+              <a:gd name="adj" fmla="val 9818"/>
             </a:avLst>
           </a:prstGeom>
           <a:solidFill>
@@ -3707,8 +3796,8 @@
         </p:nvSpPr>
         <p:spPr>
           <a:xfrm>
-            <a:off x="6651575" y="8244185"/>
-            <a:ext cx="5483252" cy="285750"/>
+            <a:off x="6651575" y="8287048"/>
+            <a:ext cx="5483252" cy="242888"/>
           </a:xfrm>
           <a:prstGeom prst="rect">
             <a:avLst/>
@@ -3730,9 +3819,9 @@
                 <a:solidFill>
                   <a:srgbClr val="00334F"/>
                 </a:solidFill>
-                <a:latin typeface="Manrope" pitchFamily="34" charset="0"/>
-                <a:ea typeface="Manrope" pitchFamily="34" charset="-122"/>
-                <a:cs typeface="Manrope" pitchFamily="34" charset="-120"/>
+                <a:latin typeface="Arial" pitchFamily="34" charset="0"/>
+                <a:ea typeface="Arial" pitchFamily="34" charset="-122"/>
+                <a:cs typeface="Arial" pitchFamily="34" charset="-120"/>
               </a:rPr>
               <a:t>ADAPTER BOUNDARY</a:t>
             </a:r>
@@ -3765,7 +3854,7 @@
           <a:p>
             <a:pPr algn="l" indent="0" marL="0">
               <a:lnSpc>
-                <a:spcPct val="98954"/>
+                <a:spcPct val="116945"/>
               </a:lnSpc>
               <a:buNone/>
             </a:pPr>
@@ -3774,15 +3863,15 @@
                 <a:solidFill>
                   <a:srgbClr val="00334F"/>
                 </a:solidFill>
-                <a:latin typeface="Manrope" pitchFamily="34" charset="0"/>
-                <a:ea typeface="Manrope" pitchFamily="34" charset="-122"/>
-                <a:cs typeface="Manrope" pitchFamily="34" charset="-120"/>
+                <a:latin typeface="Arial" pitchFamily="34" charset="0"/>
+                <a:ea typeface="Arial" pitchFamily="34" charset="-122"/>
+                <a:cs typeface="Arial" pitchFamily="34" charset="-120"/>
               </a:rPr>
               <a:t>survey-layer.js </a:t>
             </a:r>
             <a:pPr algn="l" indent="0" marL="0">
               <a:lnSpc>
-                <a:spcPct val="98954"/>
+                <a:spcPct val="116945"/>
               </a:lnSpc>
               <a:buNone/>
             </a:pPr>
@@ -3791,15 +3880,15 @@
                 <a:solidFill>
                   <a:srgbClr val="00334F"/>
                 </a:solidFill>
-                <a:latin typeface="Manrope" pitchFamily="34" charset="0"/>
-                <a:ea typeface="Manrope" pitchFamily="34" charset="-122"/>
-                <a:cs typeface="Manrope" pitchFamily="34" charset="-120"/>
+                <a:latin typeface="Arial" pitchFamily="34" charset="0"/>
+                <a:ea typeface="Arial" pitchFamily="34" charset="-122"/>
+                <a:cs typeface="Arial" pitchFamily="34" charset="-120"/>
               </a:rPr>
               <a:t>and </a:t>
             </a:r>
             <a:pPr algn="l" indent="0" marL="0">
               <a:lnSpc>
-                <a:spcPct val="98954"/>
+                <a:spcPct val="116945"/>
               </a:lnSpc>
               <a:buNone/>
             </a:pPr>
@@ -3808,15 +3897,15 @@
                 <a:solidFill>
                   <a:srgbClr val="00334F"/>
                 </a:solidFill>
-                <a:latin typeface="Manrope" pitchFamily="34" charset="0"/>
-                <a:ea typeface="Manrope" pitchFamily="34" charset="-122"/>
-                <a:cs typeface="Manrope" pitchFamily="34" charset="-120"/>
+                <a:latin typeface="Arial" pitchFamily="34" charset="0"/>
+                <a:ea typeface="Arial" pitchFamily="34" charset="-122"/>
+                <a:cs typeface="Arial" pitchFamily="34" charset="-120"/>
               </a:rPr>
               <a:t>assignment-layer.js </a:t>
             </a:r>
             <a:pPr algn="l" indent="0" marL="0">
               <a:lnSpc>
-                <a:spcPct val="98954"/>
+                <a:spcPct val="116945"/>
               </a:lnSpc>
               <a:buNone/>
             </a:pPr>
@@ -3825,15 +3914,15 @@
                 <a:solidFill>
                   <a:srgbClr val="00334F"/>
                 </a:solidFill>
-                <a:latin typeface="Manrope" pitchFamily="34" charset="0"/>
-                <a:ea typeface="Manrope" pitchFamily="34" charset="-122"/>
-                <a:cs typeface="Manrope" pitchFamily="34" charset="-120"/>
+                <a:latin typeface="Arial" pitchFamily="34" charset="0"/>
+                <a:ea typeface="Arial" pitchFamily="34" charset="-122"/>
+                <a:cs typeface="Arial" pitchFamily="34" charset="-120"/>
               </a:rPr>
               <a:t>absorb every ArcGIS field rename. </a:t>
             </a:r>
             <a:pPr algn="l" indent="0" marL="0">
               <a:lnSpc>
-                <a:spcPct val="98954"/>
+                <a:spcPct val="116945"/>
               </a:lnSpc>
               <a:buNone/>
             </a:pPr>
@@ -3842,9 +3931,9 @@
                 <a:solidFill>
                   <a:srgbClr val="00334F"/>
                 </a:solidFill>
-                <a:latin typeface="Manrope" pitchFamily="34" charset="0"/>
-                <a:ea typeface="Manrope" pitchFamily="34" charset="-122"/>
-                <a:cs typeface="Manrope" pitchFamily="34" charset="-120"/>
+                <a:latin typeface="Arial" pitchFamily="34" charset="0"/>
+                <a:ea typeface="Arial" pitchFamily="34" charset="-122"/>
+                <a:cs typeface="Arial" pitchFamily="34" charset="-120"/>
               </a:rPr>
               <a:t>Endpoints live nowhere else.</a:t>
             </a:r>
@@ -3860,12 +3949,12 @@
         </p:nvSpPr>
         <p:spPr>
           <a:xfrm>
-            <a:off x="12064975" y="8063210"/>
-            <a:ext cx="5460950" cy="1595140"/>
+            <a:off x="12064975" y="8106073"/>
+            <a:ext cx="5460950" cy="1552277"/>
           </a:xfrm>
           <a:prstGeom prst="roundRect">
             <a:avLst>
-              <a:gd name="adj" fmla="val 9554"/>
+              <a:gd name="adj" fmla="val 9818"/>
             </a:avLst>
           </a:prstGeom>
           <a:solidFill>
@@ -3887,8 +3976,8 @@
         </p:nvSpPr>
         <p:spPr>
           <a:xfrm>
-            <a:off x="12303100" y="8244185"/>
-            <a:ext cx="5483170" cy="285750"/>
+            <a:off x="12303100" y="8287048"/>
+            <a:ext cx="5483170" cy="242888"/>
           </a:xfrm>
           <a:prstGeom prst="rect">
             <a:avLst/>
@@ -3910,9 +3999,9 @@
                 <a:solidFill>
                   <a:srgbClr val="C2410C"/>
                 </a:solidFill>
-                <a:latin typeface="Manrope" pitchFamily="34" charset="0"/>
-                <a:ea typeface="Manrope" pitchFamily="34" charset="-122"/>
-                <a:cs typeface="Manrope" pitchFamily="34" charset="-120"/>
+                <a:latin typeface="Arial" pitchFamily="34" charset="0"/>
+                <a:ea typeface="Arial" pitchFamily="34" charset="-122"/>
+                <a:cs typeface="Arial" pitchFamily="34" charset="-120"/>
               </a:rPr>
               <a:t>DAILY CHECK</a:t>
             </a:r>
@@ -3945,7 +4034,24 @@
           <a:p>
             <a:pPr algn="l" indent="0" marL="0">
               <a:lnSpc>
-                <a:spcPct val="98954"/>
+                <a:spcPct val="116945"/>
+              </a:lnSpc>
+              <a:buNone/>
+            </a:pPr>
+            <a:r>
+              <a:rPr lang="en-US" sz="1800" b="1" dirty="0">
+                <a:solidFill>
+                  <a:srgbClr val="00334F"/>
+                </a:solidFill>
+                <a:latin typeface="Arial" pitchFamily="34" charset="0"/>
+                <a:ea typeface="Arial" pitchFamily="34" charset="-122"/>
+                <a:cs typeface="Arial" pitchFamily="34" charset="-120"/>
+              </a:rPr>
+              <a:t>4:00 AM upstream ran </a:t>
+            </a:r>
+            <a:pPr algn="l" indent="0" marL="0">
+              <a:lnSpc>
+                <a:spcPct val="116945"/>
               </a:lnSpc>
               <a:buNone/>
             </a:pPr>
@@ -3954,62 +4060,11 @@
                 <a:solidFill>
                   <a:srgbClr val="00334F"/>
                 </a:solidFill>
-                <a:latin typeface="Manrope" pitchFamily="34" charset="0"/>
-                <a:ea typeface="Manrope" pitchFamily="34" charset="-122"/>
-                <a:cs typeface="Manrope" pitchFamily="34" charset="-120"/>
-              </a:rPr>
-              <a:t>4:00 AM upstream ran · 7:00 AM status </a:t>
-            </a:r>
-            <a:pPr algn="l" indent="0" marL="0">
-              <a:lnSpc>
-                <a:spcPct val="98954"/>
-              </a:lnSpc>
-              <a:buNone/>
-            </a:pPr>
-            <a:r>
-              <a:rPr lang="en-US" sz="1800" b="1" dirty="0">
-                <a:solidFill>
-                  <a:srgbClr val="00334F"/>
-                </a:solidFill>
-                <a:latin typeface="Manrope" pitchFamily="34" charset="0"/>
-                <a:ea typeface="Manrope" pitchFamily="34" charset="-122"/>
-                <a:cs typeface="Manrope" pitchFamily="34" charset="-120"/>
-              </a:rPr>
-              <a:t>success </a:t>
-            </a:r>
-            <a:pPr algn="l" indent="0" marL="0">
-              <a:lnSpc>
-                <a:spcPct val="98954"/>
-              </a:lnSpc>
-              <a:buNone/>
-            </a:pPr>
-            <a:r>
-              <a:rPr lang="en-US" sz="1800" dirty="0">
-                <a:solidFill>
-                  <a:srgbClr val="00334F"/>
-                </a:solidFill>
-                <a:latin typeface="Manrope" pitchFamily="34" charset="0"/>
-                <a:ea typeface="Manrope" pitchFamily="34" charset="-122"/>
-                <a:cs typeface="Manrope" pitchFamily="34" charset="-120"/>
-              </a:rPr>
-              <a:t>· Pages workflow green. </a:t>
-            </a:r>
-            <a:pPr algn="l" indent="0" marL="0">
-              <a:lnSpc>
-                <a:spcPct val="98954"/>
-              </a:lnSpc>
-              <a:buNone/>
-            </a:pPr>
-            <a:r>
-              <a:rPr lang="en-US" sz="1800" b="1" dirty="0">
-                <a:solidFill>
-                  <a:srgbClr val="00334F"/>
-                </a:solidFill>
-                <a:latin typeface="Manrope" pitchFamily="34" charset="0"/>
-                <a:ea typeface="Manrope" pitchFamily="34" charset="-122"/>
-                <a:cs typeface="Manrope" pitchFamily="34" charset="-120"/>
-              </a:rPr>
-              <a:t>A red workflow is a data-contract failure.</a:t>
+                <a:latin typeface="Arial" pitchFamily="34" charset="0"/>
+                <a:ea typeface="Arial" pitchFamily="34" charset="-122"/>
+                <a:cs typeface="Arial" pitchFamily="34" charset="-120"/>
+              </a:rPr>
+              <a:t>· Map and KPI agree on the period count · Power BI embed loads · Pages green after code changes.</a:t>
             </a:r>
             <a:endParaRPr lang="en-US" sz="1800" dirty="0"/>
           </a:p>
@@ -4026,6 +4081,1657 @@
 <file path=ppt/slides/slide4.xml><?xml version="1.0" encoding="utf-8"?>
 <p:sld xmlns:a="http://schemas.openxmlformats.org/drawingml/2006/main" xmlns:r="http://schemas.openxmlformats.org/officeDocument/2006/relationships" xmlns:p="http://schemas.openxmlformats.org/presentationml/2006/main">
   <p:cSld name="Slide 4">
+    <p:bg>
+      <p:bgPr>
+        <a:solidFill>
+          <a:srgbClr val="FFFFFF"/>
+        </a:solidFill>
+      </p:bgPr>
+    </p:bg>
+    <p:spTree>
+      <p:nvGrpSpPr>
+        <p:cNvPr id="1" name=""/>
+        <p:cNvGrpSpPr/>
+        <p:nvPr/>
+      </p:nvGrpSpPr>
+      <p:grpSpPr>
+        <a:xfrm>
+          <a:off x="0" y="0"/>
+          <a:ext cx="0" cy="0"/>
+          <a:chOff x="0" y="0"/>
+          <a:chExt cx="0" cy="0"/>
+        </a:xfrm>
+      </p:grpSpPr>
+      <p:sp>
+        <p:nvSpPr>
+          <p:cNvPr id="2" name="Text 0"/>
+          <p:cNvSpPr/>
+          <p:nvPr/>
+        </p:nvSpPr>
+        <p:spPr>
+          <a:xfrm>
+            <a:off x="762000" y="590550"/>
+            <a:ext cx="9274225" cy="276225"/>
+          </a:xfrm>
+          <a:prstGeom prst="rect">
+            <a:avLst/>
+          </a:prstGeom>
+          <a:noFill/>
+          <a:ln/>
+        </p:spPr>
+        <p:txBody>
+          <a:bodyPr wrap="square" lIns="25400" tIns="25400" rIns="25400" bIns="25400" rtlCol="0" anchor="t">
+            <a:normAutofit/>
+          </a:bodyPr>
+          <a:lstStyle/>
+          <a:p>
+            <a:pPr algn="l" indent="0" marL="0">
+              <a:buNone/>
+            </a:pPr>
+            <a:r>
+              <a:rPr lang="en-US" sz="1650" b="1" spc="198" kern="0" dirty="0">
+                <a:solidFill>
+                  <a:srgbClr val="006C9F"/>
+                </a:solidFill>
+                <a:latin typeface="Arial" pitchFamily="34" charset="0"/>
+                <a:ea typeface="Arial" pitchFamily="34" charset="-122"/>
+                <a:cs typeface="Arial" pitchFamily="34" charset="-120"/>
+              </a:rPr>
+              <a:t>03 · FINANCE GOVERNANCE</a:t>
+            </a:r>
+            <a:endParaRPr lang="en-US" sz="1650" dirty="0"/>
+          </a:p>
+        </p:txBody>
+      </p:sp>
+      <p:sp>
+        <p:nvSpPr>
+          <p:cNvPr id="3" name="Text 1"/>
+          <p:cNvSpPr/>
+          <p:nvPr/>
+        </p:nvSpPr>
+        <p:spPr>
+          <a:xfrm>
+            <a:off x="762000" y="904875"/>
+            <a:ext cx="9274225" cy="582141"/>
+          </a:xfrm>
+          <a:prstGeom prst="rect">
+            <a:avLst/>
+          </a:prstGeom>
+          <a:noFill/>
+          <a:ln/>
+        </p:spPr>
+        <p:txBody>
+          <a:bodyPr wrap="square" lIns="25400" tIns="25400" rIns="25400" bIns="25400" rtlCol="0" anchor="t">
+            <a:normAutofit/>
+          </a:bodyPr>
+          <a:lstStyle/>
+          <a:p>
+            <a:pPr algn="l" indent="0" marL="0">
+              <a:lnSpc>
+                <a:spcPct val="88558"/>
+              </a:lnSpc>
+              <a:buNone/>
+            </a:pPr>
+            <a:r>
+              <a:rPr lang="en-US" sz="4200" b="1" spc="-126" kern="0" dirty="0">
+                <a:solidFill>
+                  <a:srgbClr val="00334F"/>
+                </a:solidFill>
+                <a:latin typeface="Arial" pitchFamily="34" charset="0"/>
+                <a:ea typeface="Arial" pitchFamily="34" charset="-122"/>
+                <a:cs typeface="Arial" pitchFamily="34" charset="-120"/>
+              </a:rPr>
+              <a:t>Power BI reports it, NetSuite records it</a:t>
+            </a:r>
+            <a:endParaRPr lang="en-US" sz="4200" dirty="0"/>
+          </a:p>
+        </p:txBody>
+      </p:sp>
+      <p:sp>
+        <p:nvSpPr>
+          <p:cNvPr id="4" name="Shape 2"/>
+          <p:cNvSpPr/>
+          <p:nvPr/>
+        </p:nvSpPr>
+        <p:spPr>
+          <a:xfrm>
+            <a:off x="13300100" y="593601"/>
+            <a:ext cx="4225900" cy="855315"/>
+          </a:xfrm>
+          <a:prstGeom prst="roundRect">
+            <a:avLst>
+              <a:gd name="adj" fmla="val 17818"/>
+            </a:avLst>
+          </a:prstGeom>
+          <a:solidFill>
+            <a:srgbClr val="FFFFFF"/>
+          </a:solidFill>
+          <a:ln w="9525">
+            <a:solidFill>
+              <a:srgbClr val="E2EAEF"/>
+            </a:solidFill>
+            <a:prstDash val="solid"/>
+          </a:ln>
+        </p:spPr>
+      </p:sp>
+      <p:sp>
+        <p:nvSpPr>
+          <p:cNvPr id="5" name="Text 3"/>
+          <p:cNvSpPr/>
+          <p:nvPr/>
+        </p:nvSpPr>
+        <p:spPr>
+          <a:xfrm>
+            <a:off x="13392398" y="736476"/>
+            <a:ext cx="3914527" cy="607665"/>
+          </a:xfrm>
+          <a:prstGeom prst="rect">
+            <a:avLst/>
+          </a:prstGeom>
+          <a:noFill/>
+          <a:ln/>
+        </p:spPr>
+        <p:txBody>
+          <a:bodyPr wrap="square" lIns="25400" tIns="25400" rIns="25400" bIns="25400" rtlCol="0" anchor="t">
+            <a:normAutofit/>
+          </a:bodyPr>
+          <a:lstStyle/>
+          <a:p>
+            <a:pPr algn="r" indent="0" marL="0">
+              <a:lnSpc>
+                <a:spcPct val="110741"/>
+              </a:lnSpc>
+              <a:buNone/>
+            </a:pPr>
+            <a:r>
+              <a:rPr lang="en-US" sz="1725" b="1" dirty="0">
+                <a:solidFill>
+                  <a:srgbClr val="35566B"/>
+                </a:solidFill>
+                <a:highlight>
+                  <a:srgbClr val="FFFFFF"/>
+                </a:highlight>
+                <a:latin typeface="Arial" pitchFamily="34" charset="0"/>
+                <a:ea typeface="Arial" pitchFamily="34" charset="-122"/>
+                <a:cs typeface="Arial" pitchFamily="34" charset="-120"/>
+              </a:rPr>
+              <a:t>KPI dashboard · Land Care Budget tab URA sign-in required</a:t>
+            </a:r>
+            <a:endParaRPr lang="en-US" sz="1725" dirty="0"/>
+          </a:p>
+        </p:txBody>
+      </p:sp>
+      <p:sp>
+        <p:nvSpPr>
+          <p:cNvPr id="6" name="Shape 4"/>
+          <p:cNvSpPr/>
+          <p:nvPr/>
+        </p:nvSpPr>
+        <p:spPr>
+          <a:xfrm>
+            <a:off x="762000" y="1658466"/>
+            <a:ext cx="5460950" cy="2794397"/>
+          </a:xfrm>
+          <a:prstGeom prst="roundRect">
+            <a:avLst>
+              <a:gd name="adj" fmla="val 6135"/>
+            </a:avLst>
+          </a:prstGeom>
+          <a:solidFill>
+            <a:srgbClr val="FFFFFF"/>
+          </a:solidFill>
+          <a:ln w="9525">
+            <a:solidFill>
+              <a:srgbClr val="E2EAEF"/>
+            </a:solidFill>
+            <a:prstDash val="solid"/>
+          </a:ln>
+        </p:spPr>
+      </p:sp>
+      <p:sp>
+        <p:nvSpPr>
+          <p:cNvPr id="7" name="Text 5"/>
+          <p:cNvSpPr/>
+          <p:nvPr/>
+        </p:nvSpPr>
+        <p:spPr>
+          <a:xfrm>
+            <a:off x="1000125" y="1858491"/>
+            <a:ext cx="5483170" cy="252413"/>
+          </a:xfrm>
+          <a:prstGeom prst="rect">
+            <a:avLst/>
+          </a:prstGeom>
+          <a:noFill/>
+          <a:ln/>
+        </p:spPr>
+        <p:txBody>
+          <a:bodyPr wrap="square" lIns="25400" tIns="25400" rIns="25400" bIns="25400" rtlCol="0" anchor="t">
+            <a:normAutofit/>
+          </a:bodyPr>
+          <a:lstStyle/>
+          <a:p>
+            <a:pPr algn="l" indent="0" marL="0">
+              <a:buNone/>
+            </a:pPr>
+            <a:r>
+              <a:rPr lang="en-US" sz="1500" b="1" spc="135" kern="0" dirty="0">
+                <a:solidFill>
+                  <a:srgbClr val="006C9F"/>
+                </a:solidFill>
+                <a:latin typeface="Arial" pitchFamily="34" charset="0"/>
+                <a:ea typeface="Arial" pitchFamily="34" charset="-122"/>
+                <a:cs typeface="Arial" pitchFamily="34" charset="-120"/>
+              </a:rPr>
+              <a:t>POWER BI</a:t>
+            </a:r>
+            <a:endParaRPr lang="en-US" sz="1500" dirty="0"/>
+          </a:p>
+        </p:txBody>
+      </p:sp>
+      <p:sp>
+        <p:nvSpPr>
+          <p:cNvPr id="8" name="Text 6"/>
+          <p:cNvSpPr/>
+          <p:nvPr/>
+        </p:nvSpPr>
+        <p:spPr>
+          <a:xfrm>
+            <a:off x="1000125" y="2168054"/>
+            <a:ext cx="5483170" cy="352425"/>
+          </a:xfrm>
+          <a:prstGeom prst="rect">
+            <a:avLst/>
+          </a:prstGeom>
+          <a:noFill/>
+          <a:ln/>
+        </p:spPr>
+        <p:txBody>
+          <a:bodyPr wrap="square" lIns="25400" tIns="25400" rIns="25400" bIns="25400" rtlCol="0" anchor="t">
+            <a:normAutofit/>
+          </a:bodyPr>
+          <a:lstStyle/>
+          <a:p>
+            <a:pPr algn="l" indent="0" marL="0">
+              <a:lnSpc>
+                <a:spcPct val="95652"/>
+              </a:lnSpc>
+              <a:buNone/>
+            </a:pPr>
+            <a:r>
+              <a:rPr lang="en-US" sz="2250" b="1" spc="-45" kern="0" dirty="0">
+                <a:solidFill>
+                  <a:srgbClr val="00334F"/>
+                </a:solidFill>
+                <a:latin typeface="Arial" pitchFamily="34" charset="0"/>
+                <a:ea typeface="Arial" pitchFamily="34" charset="-122"/>
+                <a:cs typeface="Arial" pitchFamily="34" charset="-120"/>
+              </a:rPr>
+              <a:t>Authoritative reporting</a:t>
+            </a:r>
+            <a:endParaRPr lang="en-US" sz="2250" dirty="0"/>
+          </a:p>
+        </p:txBody>
+      </p:sp>
+      <p:sp>
+        <p:nvSpPr>
+          <p:cNvPr id="9" name="Text 7"/>
+          <p:cNvSpPr/>
+          <p:nvPr/>
+        </p:nvSpPr>
+        <p:spPr>
+          <a:xfrm>
+            <a:off x="1000125" y="2577629"/>
+            <a:ext cx="5134241" cy="1263253"/>
+          </a:xfrm>
+          <a:prstGeom prst="rect">
+            <a:avLst/>
+          </a:prstGeom>
+          <a:noFill/>
+          <a:ln/>
+        </p:spPr>
+        <p:txBody>
+          <a:bodyPr wrap="square" lIns="25400" tIns="25400" rIns="25400" bIns="25400" rtlCol="0" anchor="t">
+            <a:normAutofit/>
+          </a:bodyPr>
+          <a:lstStyle/>
+          <a:p>
+            <a:pPr algn="l" indent="0" marL="0">
+              <a:lnSpc>
+                <a:spcPct val="116945"/>
+              </a:lnSpc>
+              <a:buNone/>
+            </a:pPr>
+            <a:r>
+              <a:rPr lang="en-US" sz="1800" dirty="0">
+                <a:solidFill>
+                  <a:srgbClr val="00334F"/>
+                </a:solidFill>
+                <a:latin typeface="Arial" pitchFamily="34" charset="0"/>
+                <a:ea typeface="Arial" pitchFamily="34" charset="-122"/>
+                <a:cs typeface="Arial" pitchFamily="34" charset="-120"/>
+              </a:rPr>
+              <a:t>Land Care Budget and Parcel Area are authenticated embeds, so </a:t>
+            </a:r>
+            <a:pPr algn="l" indent="0" marL="0">
+              <a:lnSpc>
+                <a:spcPct val="116945"/>
+              </a:lnSpc>
+              <a:buNone/>
+            </a:pPr>
+            <a:r>
+              <a:rPr lang="en-US" sz="1800" b="1" dirty="0">
+                <a:solidFill>
+                  <a:srgbClr val="00334F"/>
+                </a:solidFill>
+                <a:latin typeface="Arial" pitchFamily="34" charset="0"/>
+                <a:ea typeface="Arial" pitchFamily="34" charset="-122"/>
+                <a:cs typeface="Arial" pitchFamily="34" charset="-120"/>
+              </a:rPr>
+              <a:t>each viewer sees the report through their own permissions </a:t>
+            </a:r>
+            <a:pPr algn="l" indent="0" marL="0">
+              <a:lnSpc>
+                <a:spcPct val="116945"/>
+              </a:lnSpc>
+              <a:buNone/>
+            </a:pPr>
+            <a:r>
+              <a:rPr lang="en-US" sz="1800" dirty="0">
+                <a:solidFill>
+                  <a:srgbClr val="00334F"/>
+                </a:solidFill>
+                <a:latin typeface="Arial" pitchFamily="34" charset="0"/>
+                <a:ea typeface="Arial" pitchFamily="34" charset="-122"/>
+                <a:cs typeface="Arial" pitchFamily="34" charset="-120"/>
+              </a:rPr>
+              <a:t>and the numbers cannot drift from Finance.</a:t>
+            </a:r>
+            <a:endParaRPr lang="en-US" sz="1800" dirty="0"/>
+          </a:p>
+        </p:txBody>
+      </p:sp>
+      <p:sp>
+        <p:nvSpPr>
+          <p:cNvPr id="10" name="Shape 8"/>
+          <p:cNvSpPr/>
+          <p:nvPr/>
+        </p:nvSpPr>
+        <p:spPr>
+          <a:xfrm>
+            <a:off x="1000125" y="3898032"/>
+            <a:ext cx="4984700" cy="9525"/>
+          </a:xfrm>
+          <a:prstGeom prst="rect">
+            <a:avLst/>
+          </a:prstGeom>
+          <a:solidFill>
+            <a:srgbClr val="EEF2F5"/>
+          </a:solidFill>
+          <a:ln/>
+        </p:spPr>
+      </p:sp>
+      <p:sp>
+        <p:nvSpPr>
+          <p:cNvPr id="11" name="Text 9"/>
+          <p:cNvSpPr/>
+          <p:nvPr/>
+        </p:nvSpPr>
+        <p:spPr>
+          <a:xfrm>
+            <a:off x="1000125" y="4002807"/>
+            <a:ext cx="5134241" cy="288131"/>
+          </a:xfrm>
+          <a:prstGeom prst="rect">
+            <a:avLst/>
+          </a:prstGeom>
+          <a:noFill/>
+          <a:ln/>
+        </p:spPr>
+        <p:txBody>
+          <a:bodyPr wrap="square" lIns="25400" tIns="25400" rIns="25400" bIns="25400" rtlCol="0" anchor="t">
+            <a:normAutofit/>
+          </a:bodyPr>
+          <a:lstStyle/>
+          <a:p>
+            <a:pPr algn="l" indent="0" marL="0">
+              <a:lnSpc>
+                <a:spcPct val="109375"/>
+              </a:lnSpc>
+              <a:buNone/>
+            </a:pPr>
+            <a:r>
+              <a:rPr lang="en-US" sz="1575" b="1" dirty="0">
+                <a:solidFill>
+                  <a:srgbClr val="5B7386"/>
+                </a:solidFill>
+                <a:latin typeface="Arial" pitchFamily="34" charset="0"/>
+                <a:ea typeface="Arial" pitchFamily="34" charset="-122"/>
+                <a:cs typeface="Arial" pitchFamily="34" charset="-120"/>
+              </a:rPr>
+              <a:t>Land Care Budget report · URA Finance workspace</a:t>
+            </a:r>
+            <a:endParaRPr lang="en-US" sz="1575" dirty="0"/>
+          </a:p>
+        </p:txBody>
+      </p:sp>
+      <p:sp>
+        <p:nvSpPr>
+          <p:cNvPr id="12" name="Shape 10"/>
+          <p:cNvSpPr/>
+          <p:nvPr/>
+        </p:nvSpPr>
+        <p:spPr>
+          <a:xfrm>
+            <a:off x="6413450" y="1658466"/>
+            <a:ext cx="5461025" cy="2794397"/>
+          </a:xfrm>
+          <a:prstGeom prst="roundRect">
+            <a:avLst>
+              <a:gd name="adj" fmla="val 6135"/>
+            </a:avLst>
+          </a:prstGeom>
+          <a:solidFill>
+            <a:srgbClr val="FFFFFF"/>
+          </a:solidFill>
+          <a:ln w="9525">
+            <a:solidFill>
+              <a:srgbClr val="E2EAEF"/>
+            </a:solidFill>
+            <a:prstDash val="solid"/>
+          </a:ln>
+        </p:spPr>
+      </p:sp>
+      <p:sp>
+        <p:nvSpPr>
+          <p:cNvPr id="13" name="Text 11"/>
+          <p:cNvSpPr/>
+          <p:nvPr/>
+        </p:nvSpPr>
+        <p:spPr>
+          <a:xfrm>
+            <a:off x="6689675" y="1896591"/>
+            <a:ext cx="5399432" cy="252413"/>
+          </a:xfrm>
+          <a:prstGeom prst="rect">
+            <a:avLst/>
+          </a:prstGeom>
+          <a:noFill/>
+          <a:ln/>
+        </p:spPr>
+        <p:txBody>
+          <a:bodyPr wrap="square" lIns="25400" tIns="25400" rIns="25400" bIns="25400" rtlCol="0" anchor="t">
+            <a:normAutofit/>
+          </a:bodyPr>
+          <a:lstStyle/>
+          <a:p>
+            <a:pPr algn="l" indent="0" marL="0">
+              <a:buNone/>
+            </a:pPr>
+            <a:r>
+              <a:rPr lang="en-US" sz="1500" b="1" spc="135" kern="0" dirty="0">
+                <a:solidFill>
+                  <a:srgbClr val="00334F"/>
+                </a:solidFill>
+                <a:latin typeface="Arial" pitchFamily="34" charset="0"/>
+                <a:ea typeface="Arial" pitchFamily="34" charset="-122"/>
+                <a:cs typeface="Arial" pitchFamily="34" charset="-120"/>
+              </a:rPr>
+              <a:t>NETSUITE</a:t>
+            </a:r>
+            <a:endParaRPr lang="en-US" sz="1500" dirty="0"/>
+          </a:p>
+        </p:txBody>
+      </p:sp>
+      <p:sp>
+        <p:nvSpPr>
+          <p:cNvPr id="14" name="Text 12"/>
+          <p:cNvSpPr/>
+          <p:nvPr/>
+        </p:nvSpPr>
+        <p:spPr>
+          <a:xfrm>
+            <a:off x="6689675" y="2206154"/>
+            <a:ext cx="5399432" cy="352425"/>
+          </a:xfrm>
+          <a:prstGeom prst="rect">
+            <a:avLst/>
+          </a:prstGeom>
+          <a:noFill/>
+          <a:ln/>
+        </p:spPr>
+        <p:txBody>
+          <a:bodyPr wrap="square" lIns="25400" tIns="25400" rIns="25400" bIns="25400" rtlCol="0" anchor="t">
+            <a:normAutofit/>
+          </a:bodyPr>
+          <a:lstStyle/>
+          <a:p>
+            <a:pPr algn="l" indent="0" marL="0">
+              <a:lnSpc>
+                <a:spcPct val="95652"/>
+              </a:lnSpc>
+              <a:buNone/>
+            </a:pPr>
+            <a:r>
+              <a:rPr lang="en-US" sz="2250" b="1" spc="-45" kern="0" dirty="0">
+                <a:solidFill>
+                  <a:srgbClr val="00334F"/>
+                </a:solidFill>
+                <a:latin typeface="Arial" pitchFamily="34" charset="0"/>
+                <a:ea typeface="Arial" pitchFamily="34" charset="-122"/>
+                <a:cs typeface="Arial" pitchFamily="34" charset="-120"/>
+              </a:rPr>
+              <a:t>Upstream accounting</a:t>
+            </a:r>
+            <a:endParaRPr lang="en-US" sz="2250" dirty="0"/>
+          </a:p>
+        </p:txBody>
+      </p:sp>
+      <p:sp>
+        <p:nvSpPr>
+          <p:cNvPr id="15" name="Text 13"/>
+          <p:cNvSpPr/>
+          <p:nvPr/>
+        </p:nvSpPr>
+        <p:spPr>
+          <a:xfrm>
+            <a:off x="6689675" y="2615729"/>
+            <a:ext cx="5055832" cy="956965"/>
+          </a:xfrm>
+          <a:prstGeom prst="rect">
+            <a:avLst/>
+          </a:prstGeom>
+          <a:noFill/>
+          <a:ln/>
+        </p:spPr>
+        <p:txBody>
+          <a:bodyPr wrap="square" lIns="25400" tIns="25400" rIns="25400" bIns="25400" rtlCol="0" anchor="t">
+            <a:normAutofit/>
+          </a:bodyPr>
+          <a:lstStyle/>
+          <a:p>
+            <a:pPr algn="l" indent="0" marL="0">
+              <a:lnSpc>
+                <a:spcPct val="116945"/>
+              </a:lnSpc>
+              <a:buNone/>
+            </a:pPr>
+            <a:r>
+              <a:rPr lang="en-US" sz="1800" b="1" dirty="0">
+                <a:solidFill>
+                  <a:srgbClr val="00334F"/>
+                </a:solidFill>
+                <a:latin typeface="Arial" pitchFamily="34" charset="0"/>
+                <a:ea typeface="Arial" pitchFamily="34" charset="-122"/>
+                <a:cs typeface="Arial" pitchFamily="34" charset="-120"/>
+              </a:rPr>
+              <a:t>Saved search 1618 on account 66220 Lawn Maintenance. </a:t>
+            </a:r>
+            <a:pPr algn="l" indent="0" marL="0">
+              <a:lnSpc>
+                <a:spcPct val="116945"/>
+              </a:lnSpc>
+              <a:buNone/>
+            </a:pPr>
+            <a:r>
+              <a:rPr lang="en-US" sz="1800" dirty="0">
+                <a:solidFill>
+                  <a:srgbClr val="00334F"/>
+                </a:solidFill>
+                <a:latin typeface="Arial" pitchFamily="34" charset="0"/>
+                <a:ea typeface="Arial" pitchFamily="34" charset="-122"/>
+                <a:cs typeface="Arial" pitchFamily="34" charset="-120"/>
+              </a:rPr>
+              <a:t>The importer in the repo is supervised reconciliation, not a feed.</a:t>
+            </a:r>
+            <a:endParaRPr lang="en-US" sz="1800" dirty="0"/>
+          </a:p>
+        </p:txBody>
+      </p:sp>
+      <p:sp>
+        <p:nvSpPr>
+          <p:cNvPr id="16" name="Shape 14"/>
+          <p:cNvSpPr/>
+          <p:nvPr/>
+        </p:nvSpPr>
+        <p:spPr>
+          <a:xfrm>
+            <a:off x="6689675" y="3859932"/>
+            <a:ext cx="4908575" cy="9525"/>
+          </a:xfrm>
+          <a:prstGeom prst="rect">
+            <a:avLst/>
+          </a:prstGeom>
+          <a:solidFill>
+            <a:srgbClr val="EEF2F5"/>
+          </a:solidFill>
+          <a:ln/>
+        </p:spPr>
+      </p:sp>
+      <p:sp>
+        <p:nvSpPr>
+          <p:cNvPr id="17" name="Text 15"/>
+          <p:cNvSpPr/>
+          <p:nvPr/>
+        </p:nvSpPr>
+        <p:spPr>
+          <a:xfrm>
+            <a:off x="6689675" y="3964707"/>
+            <a:ext cx="5055832" cy="288131"/>
+          </a:xfrm>
+          <a:prstGeom prst="rect">
+            <a:avLst/>
+          </a:prstGeom>
+          <a:noFill/>
+          <a:ln/>
+        </p:spPr>
+        <p:txBody>
+          <a:bodyPr wrap="square" lIns="25400" tIns="25400" rIns="25400" bIns="25400" rtlCol="0" anchor="t">
+            <a:normAutofit/>
+          </a:bodyPr>
+          <a:lstStyle/>
+          <a:p>
+            <a:pPr algn="l" indent="0" marL="0">
+              <a:lnSpc>
+                <a:spcPct val="109375"/>
+              </a:lnSpc>
+              <a:buNone/>
+            </a:pPr>
+            <a:r>
+              <a:rPr lang="en-US" sz="1575" b="1" dirty="0">
+                <a:solidFill>
+                  <a:srgbClr val="5B7386"/>
+                </a:solidFill>
+                <a:latin typeface="Arial" pitchFamily="34" charset="0"/>
+                <a:ea typeface="Arial" pitchFamily="34" charset="-122"/>
+                <a:cs typeface="Arial" pitchFamily="34" charset="-120"/>
+              </a:rPr>
+              <a:t>Imported on request, reconciled by hand</a:t>
+            </a:r>
+            <a:endParaRPr lang="en-US" sz="1575" dirty="0"/>
+          </a:p>
+        </p:txBody>
+      </p:sp>
+      <p:sp>
+        <p:nvSpPr>
+          <p:cNvPr id="18" name="Shape 16"/>
+          <p:cNvSpPr/>
+          <p:nvPr/>
+        </p:nvSpPr>
+        <p:spPr>
+          <a:xfrm>
+            <a:off x="12064975" y="1658466"/>
+            <a:ext cx="5460950" cy="2794397"/>
+          </a:xfrm>
+          <a:prstGeom prst="roundRect">
+            <a:avLst>
+              <a:gd name="adj" fmla="val 6135"/>
+            </a:avLst>
+          </a:prstGeom>
+          <a:solidFill>
+            <a:srgbClr val="FFFFFF"/>
+          </a:solidFill>
+          <a:ln w="9525">
+            <a:solidFill>
+              <a:srgbClr val="E2EAEF"/>
+            </a:solidFill>
+            <a:prstDash val="solid"/>
+          </a:ln>
+        </p:spPr>
+      </p:sp>
+      <p:sp>
+        <p:nvSpPr>
+          <p:cNvPr id="19" name="Text 17"/>
+          <p:cNvSpPr/>
+          <p:nvPr/>
+        </p:nvSpPr>
+        <p:spPr>
+          <a:xfrm>
+            <a:off x="12341200" y="1896591"/>
+            <a:ext cx="5399350" cy="252413"/>
+          </a:xfrm>
+          <a:prstGeom prst="rect">
+            <a:avLst/>
+          </a:prstGeom>
+          <a:noFill/>
+          <a:ln/>
+        </p:spPr>
+        <p:txBody>
+          <a:bodyPr wrap="square" lIns="25400" tIns="25400" rIns="25400" bIns="25400" rtlCol="0" anchor="t">
+            <a:normAutofit/>
+          </a:bodyPr>
+          <a:lstStyle/>
+          <a:p>
+            <a:pPr algn="l" indent="0" marL="0">
+              <a:buNone/>
+            </a:pPr>
+            <a:r>
+              <a:rPr lang="en-US" sz="1500" b="1" spc="135" kern="0" dirty="0">
+                <a:solidFill>
+                  <a:srgbClr val="2E7D32"/>
+                </a:solidFill>
+                <a:latin typeface="Arial" pitchFamily="34" charset="0"/>
+                <a:ea typeface="Arial" pitchFamily="34" charset="-122"/>
+                <a:cs typeface="Arial" pitchFamily="34" charset="-120"/>
+              </a:rPr>
+              <a:t>WORKBOOK</a:t>
+            </a:r>
+            <a:endParaRPr lang="en-US" sz="1500" dirty="0"/>
+          </a:p>
+        </p:txBody>
+      </p:sp>
+      <p:sp>
+        <p:nvSpPr>
+          <p:cNvPr id="20" name="Text 18"/>
+          <p:cNvSpPr/>
+          <p:nvPr/>
+        </p:nvSpPr>
+        <p:spPr>
+          <a:xfrm>
+            <a:off x="12341200" y="2206154"/>
+            <a:ext cx="5399350" cy="352425"/>
+          </a:xfrm>
+          <a:prstGeom prst="rect">
+            <a:avLst/>
+          </a:prstGeom>
+          <a:noFill/>
+          <a:ln/>
+        </p:spPr>
+        <p:txBody>
+          <a:bodyPr wrap="square" lIns="25400" tIns="25400" rIns="25400" bIns="25400" rtlCol="0" anchor="t">
+            <a:normAutofit/>
+          </a:bodyPr>
+          <a:lstStyle/>
+          <a:p>
+            <a:pPr algn="l" indent="0" marL="0">
+              <a:lnSpc>
+                <a:spcPct val="95652"/>
+              </a:lnSpc>
+              <a:buNone/>
+            </a:pPr>
+            <a:r>
+              <a:rPr lang="en-US" sz="2250" b="1" spc="-45" kern="0" dirty="0">
+                <a:solidFill>
+                  <a:srgbClr val="00334F"/>
+                </a:solidFill>
+                <a:latin typeface="Arial" pitchFamily="34" charset="0"/>
+                <a:ea typeface="Arial" pitchFamily="34" charset="-122"/>
+                <a:cs typeface="Arial" pitchFamily="34" charset="-120"/>
+              </a:rPr>
+              <a:t>Contract expectations</a:t>
+            </a:r>
+            <a:endParaRPr lang="en-US" sz="2250" dirty="0"/>
+          </a:p>
+        </p:txBody>
+      </p:sp>
+      <p:sp>
+        <p:nvSpPr>
+          <p:cNvPr id="21" name="Text 19"/>
+          <p:cNvSpPr/>
+          <p:nvPr/>
+        </p:nvSpPr>
+        <p:spPr>
+          <a:xfrm>
+            <a:off x="12341200" y="2615729"/>
+            <a:ext cx="5055755" cy="650677"/>
+          </a:xfrm>
+          <a:prstGeom prst="rect">
+            <a:avLst/>
+          </a:prstGeom>
+          <a:noFill/>
+          <a:ln/>
+        </p:spPr>
+        <p:txBody>
+          <a:bodyPr wrap="square" lIns="25400" tIns="25400" rIns="25400" bIns="25400" rtlCol="0" anchor="t">
+            <a:normAutofit/>
+          </a:bodyPr>
+          <a:lstStyle/>
+          <a:p>
+            <a:pPr algn="l" indent="0" marL="0">
+              <a:lnSpc>
+                <a:spcPct val="116945"/>
+              </a:lnSpc>
+              <a:buNone/>
+            </a:pPr>
+            <a:r>
+              <a:rPr lang="en-US" sz="1800" b="1" dirty="0">
+                <a:solidFill>
+                  <a:srgbClr val="00334F"/>
+                </a:solidFill>
+                <a:latin typeface="Arial" pitchFamily="34" charset="0"/>
+                <a:ea typeface="Arial" pitchFamily="34" charset="-122"/>
+                <a:cs typeface="Arial" pitchFamily="34" charset="-120"/>
+              </a:rPr>
+              <a:t>Term, parcels, and forecast. </a:t>
+            </a:r>
+            <a:pPr algn="l" indent="0" marL="0">
+              <a:lnSpc>
+                <a:spcPct val="116945"/>
+              </a:lnSpc>
+              <a:buNone/>
+            </a:pPr>
+            <a:r>
+              <a:rPr lang="en-US" sz="1800" dirty="0">
+                <a:solidFill>
+                  <a:srgbClr val="00334F"/>
+                </a:solidFill>
+                <a:latin typeface="Arial" pitchFamily="34" charset="0"/>
+                <a:ea typeface="Arial" pitchFamily="34" charset="-122"/>
+                <a:cs typeface="Arial" pitchFamily="34" charset="-120"/>
+              </a:rPr>
+              <a:t>The contracted shape of the work, held outside both systems.</a:t>
+            </a:r>
+            <a:endParaRPr lang="en-US" sz="1800" dirty="0"/>
+          </a:p>
+        </p:txBody>
+      </p:sp>
+      <p:sp>
+        <p:nvSpPr>
+          <p:cNvPr id="22" name="Shape 20"/>
+          <p:cNvSpPr/>
+          <p:nvPr/>
+        </p:nvSpPr>
+        <p:spPr>
+          <a:xfrm>
+            <a:off x="12341200" y="3859932"/>
+            <a:ext cx="4908500" cy="9525"/>
+          </a:xfrm>
+          <a:prstGeom prst="rect">
+            <a:avLst/>
+          </a:prstGeom>
+          <a:solidFill>
+            <a:srgbClr val="EEF2F5"/>
+          </a:solidFill>
+          <a:ln/>
+        </p:spPr>
+      </p:sp>
+      <p:sp>
+        <p:nvSpPr>
+          <p:cNvPr id="23" name="Text 21"/>
+          <p:cNvSpPr/>
+          <p:nvPr/>
+        </p:nvSpPr>
+        <p:spPr>
+          <a:xfrm>
+            <a:off x="12341200" y="3964707"/>
+            <a:ext cx="5055755" cy="288131"/>
+          </a:xfrm>
+          <a:prstGeom prst="rect">
+            <a:avLst/>
+          </a:prstGeom>
+          <a:noFill/>
+          <a:ln/>
+        </p:spPr>
+        <p:txBody>
+          <a:bodyPr wrap="square" lIns="25400" tIns="25400" rIns="25400" bIns="25400" rtlCol="0" anchor="t">
+            <a:normAutofit/>
+          </a:bodyPr>
+          <a:lstStyle/>
+          <a:p>
+            <a:pPr algn="l" indent="0" marL="0">
+              <a:lnSpc>
+                <a:spcPct val="109375"/>
+              </a:lnSpc>
+              <a:buNone/>
+            </a:pPr>
+            <a:r>
+              <a:rPr lang="en-US" sz="1575" b="1" dirty="0">
+                <a:solidFill>
+                  <a:srgbClr val="5B7386"/>
+                </a:solidFill>
+                <a:latin typeface="Arial" pitchFamily="34" charset="0"/>
+                <a:ea typeface="Arial" pitchFamily="34" charset="-122"/>
+                <a:cs typeface="Arial" pitchFamily="34" charset="-120"/>
+              </a:rPr>
+              <a:t>Held by the contract manager, not in the repo</a:t>
+            </a:r>
+            <a:endParaRPr lang="en-US" sz="1575" dirty="0"/>
+          </a:p>
+        </p:txBody>
+      </p:sp>
+      <p:sp>
+        <p:nvSpPr>
+          <p:cNvPr id="24" name="Shape 22"/>
+          <p:cNvSpPr/>
+          <p:nvPr/>
+        </p:nvSpPr>
+        <p:spPr>
+          <a:xfrm>
+            <a:off x="762000" y="4662413"/>
+            <a:ext cx="9944100" cy="5034037"/>
+          </a:xfrm>
+          <a:prstGeom prst="roundRect">
+            <a:avLst>
+              <a:gd name="adj" fmla="val 3406"/>
+            </a:avLst>
+          </a:prstGeom>
+          <a:solidFill>
+            <a:srgbClr val="F7FAFC"/>
+          </a:solidFill>
+          <a:ln w="9525">
+            <a:solidFill>
+              <a:srgbClr val="E2EAEF"/>
+            </a:solidFill>
+            <a:prstDash val="solid"/>
+          </a:ln>
+        </p:spPr>
+      </p:sp>
+      <p:pic>
+        <p:nvPicPr>
+          <p:cNvPr id="25" name="Image 0" descr="preencoded.png">    </p:cNvPr>
+          <p:cNvPicPr>
+            <a:picLocks noChangeAspect="1"/>
+          </p:cNvPicPr>
+          <p:nvPr/>
+        </p:nvPicPr>
+        <p:blipFill>
+          <a:blip r:embed="rId1"/>
+          <a:srcRect l="-19310" r="-19310" t="0" b="0"/>
+          <a:stretch/>
+        </p:blipFill>
+        <p:spPr>
+          <a:xfrm>
+            <a:off x="866775" y="4767188"/>
+            <a:ext cx="9734550" cy="4824487"/>
+          </a:xfrm>
+          <a:prstGeom prst="rect">
+            <a:avLst/>
+          </a:prstGeom>
+        </p:spPr>
+      </p:pic>
+      <p:sp>
+        <p:nvSpPr>
+          <p:cNvPr id="26" name="Shape 23"/>
+          <p:cNvSpPr/>
+          <p:nvPr/>
+        </p:nvSpPr>
+        <p:spPr>
+          <a:xfrm>
+            <a:off x="10896600" y="4662413"/>
+            <a:ext cx="6629400" cy="1840409"/>
+          </a:xfrm>
+          <a:prstGeom prst="roundRect">
+            <a:avLst>
+              <a:gd name="adj" fmla="val 9316"/>
+            </a:avLst>
+          </a:prstGeom>
+          <a:solidFill>
+            <a:srgbClr val="FDF2EC"/>
+          </a:solidFill>
+          <a:ln/>
+        </p:spPr>
+      </p:sp>
+      <p:sp>
+        <p:nvSpPr>
+          <p:cNvPr id="27" name="Shape 24"/>
+          <p:cNvSpPr/>
+          <p:nvPr/>
+        </p:nvSpPr>
+        <p:spPr>
+          <a:xfrm>
+            <a:off x="10896600" y="6493297"/>
+            <a:ext cx="6629400" cy="9525"/>
+          </a:xfrm>
+          <a:prstGeom prst="rect">
+            <a:avLst/>
+          </a:prstGeom>
+          <a:solidFill>
+            <a:srgbClr val="F3D6C6"/>
+          </a:solidFill>
+          <a:ln/>
+        </p:spPr>
+      </p:sp>
+      <p:sp>
+        <p:nvSpPr>
+          <p:cNvPr id="28" name="Shape 25"/>
+          <p:cNvSpPr/>
+          <p:nvPr/>
+        </p:nvSpPr>
+        <p:spPr>
+          <a:xfrm>
+            <a:off x="10896600" y="4662413"/>
+            <a:ext cx="6629400" cy="9525"/>
+          </a:xfrm>
+          <a:prstGeom prst="rect">
+            <a:avLst/>
+          </a:prstGeom>
+          <a:solidFill>
+            <a:srgbClr val="F3D6C6"/>
+          </a:solidFill>
+          <a:ln/>
+        </p:spPr>
+      </p:sp>
+      <p:sp>
+        <p:nvSpPr>
+          <p:cNvPr id="29" name="Shape 26"/>
+          <p:cNvSpPr/>
+          <p:nvPr/>
+        </p:nvSpPr>
+        <p:spPr>
+          <a:xfrm>
+            <a:off x="10896600" y="4662413"/>
+            <a:ext cx="38100" cy="1840409"/>
+          </a:xfrm>
+          <a:prstGeom prst="rect">
+            <a:avLst/>
+          </a:prstGeom>
+          <a:solidFill>
+            <a:srgbClr val="C2410C"/>
+          </a:solidFill>
+          <a:ln/>
+        </p:spPr>
+      </p:sp>
+      <p:sp>
+        <p:nvSpPr>
+          <p:cNvPr id="30" name="Shape 27"/>
+          <p:cNvSpPr/>
+          <p:nvPr/>
+        </p:nvSpPr>
+        <p:spPr>
+          <a:xfrm>
+            <a:off x="17516475" y="4662413"/>
+            <a:ext cx="9525" cy="1840409"/>
+          </a:xfrm>
+          <a:prstGeom prst="rect">
+            <a:avLst/>
+          </a:prstGeom>
+          <a:solidFill>
+            <a:srgbClr val="F3D6C6"/>
+          </a:solidFill>
+          <a:ln/>
+        </p:spPr>
+      </p:sp>
+      <p:sp>
+        <p:nvSpPr>
+          <p:cNvPr id="31" name="Text 28"/>
+          <p:cNvSpPr/>
+          <p:nvPr/>
+        </p:nvSpPr>
+        <p:spPr>
+          <a:xfrm>
+            <a:off x="11163300" y="4843388"/>
+            <a:ext cx="6737033" cy="252413"/>
+          </a:xfrm>
+          <a:prstGeom prst="rect">
+            <a:avLst/>
+          </a:prstGeom>
+          <a:noFill/>
+          <a:ln/>
+        </p:spPr>
+        <p:txBody>
+          <a:bodyPr wrap="square" lIns="25400" tIns="25400" rIns="25400" bIns="25400" rtlCol="0" anchor="t">
+            <a:normAutofit/>
+          </a:bodyPr>
+          <a:lstStyle/>
+          <a:p>
+            <a:pPr algn="l" indent="0" marL="0">
+              <a:buNone/>
+            </a:pPr>
+            <a:r>
+              <a:rPr lang="en-US" sz="1500" b="1" spc="135" kern="0" dirty="0">
+                <a:solidFill>
+                  <a:srgbClr val="C2410C"/>
+                </a:solidFill>
+                <a:latin typeface="Arial" pitchFamily="34" charset="0"/>
+                <a:ea typeface="Arial" pitchFamily="34" charset="-122"/>
+                <a:cs typeface="Arial" pitchFamily="34" charset="-120"/>
+              </a:rPr>
+              <a:t>HOW THE EMBED WORKS</a:t>
+            </a:r>
+            <a:endParaRPr lang="en-US" sz="1500" dirty="0"/>
+          </a:p>
+        </p:txBody>
+      </p:sp>
+      <p:sp>
+        <p:nvSpPr>
+          <p:cNvPr id="32" name="Text 29"/>
+          <p:cNvSpPr/>
+          <p:nvPr/>
+        </p:nvSpPr>
+        <p:spPr>
+          <a:xfrm>
+            <a:off x="11163300" y="5114851"/>
+            <a:ext cx="6308312" cy="1245096"/>
+          </a:xfrm>
+          <a:prstGeom prst="rect">
+            <a:avLst/>
+          </a:prstGeom>
+          <a:noFill/>
+          <a:ln/>
+        </p:spPr>
+        <p:txBody>
+          <a:bodyPr wrap="square" lIns="25400" tIns="25400" rIns="25400" bIns="25400" rtlCol="0" anchor="t">
+            <a:normAutofit/>
+          </a:bodyPr>
+          <a:lstStyle/>
+          <a:p>
+            <a:pPr algn="l" indent="0" marL="0">
+              <a:lnSpc>
+                <a:spcPct val="115200"/>
+              </a:lnSpc>
+              <a:buNone/>
+            </a:pPr>
+            <a:r>
+              <a:rPr lang="en-US" sz="1800" b="1" dirty="0">
+                <a:solidFill>
+                  <a:srgbClr val="00334F"/>
+                </a:solidFill>
+                <a:latin typeface="Arial" pitchFamily="34" charset="0"/>
+                <a:ea typeface="Arial" pitchFamily="34" charset="-122"/>
+                <a:cs typeface="Arial" pitchFamily="34" charset="-120"/>
+              </a:rPr>
+              <a:t>Land Care Budget and Parcel Area are secure Power BI embeds, not native cards. </a:t>
+            </a:r>
+            <a:pPr algn="l" indent="0" marL="0">
+              <a:lnSpc>
+                <a:spcPct val="115200"/>
+              </a:lnSpc>
+              <a:buNone/>
+            </a:pPr>
+            <a:r>
+              <a:rPr lang="en-US" sz="1800" dirty="0">
+                <a:solidFill>
+                  <a:srgbClr val="00334F"/>
+                </a:solidFill>
+                <a:latin typeface="Arial" pitchFamily="34" charset="0"/>
+                <a:ea typeface="Arial" pitchFamily="34" charset="-122"/>
+                <a:cs typeface="Arial" pitchFamily="34" charset="-120"/>
+              </a:rPr>
+              <a:t>The page hosts the report; Microsoft authenticates each viewer, so the figures come straight from the Finance semantic model.</a:t>
+            </a:r>
+            <a:endParaRPr lang="en-US" sz="1800" dirty="0"/>
+          </a:p>
+        </p:txBody>
+      </p:sp>
+      <p:sp>
+        <p:nvSpPr>
+          <p:cNvPr id="33" name="Shape 30"/>
+          <p:cNvSpPr/>
+          <p:nvPr/>
+        </p:nvSpPr>
+        <p:spPr>
+          <a:xfrm>
+            <a:off x="10896600" y="6655222"/>
+            <a:ext cx="6629400" cy="3041228"/>
+          </a:xfrm>
+          <a:prstGeom prst="roundRect">
+            <a:avLst>
+              <a:gd name="adj" fmla="val 5638"/>
+            </a:avLst>
+          </a:prstGeom>
+          <a:solidFill>
+            <a:srgbClr val="FFFFFF"/>
+          </a:solidFill>
+          <a:ln w="9525">
+            <a:solidFill>
+              <a:srgbClr val="E2EAEF"/>
+            </a:solidFill>
+            <a:prstDash val="solid"/>
+          </a:ln>
+        </p:spPr>
+      </p:sp>
+      <p:sp>
+        <p:nvSpPr>
+          <p:cNvPr id="34" name="Text 31"/>
+          <p:cNvSpPr/>
+          <p:nvPr/>
+        </p:nvSpPr>
+        <p:spPr>
+          <a:xfrm>
+            <a:off x="11134725" y="7366174"/>
+            <a:ext cx="6768465" cy="252413"/>
+          </a:xfrm>
+          <a:prstGeom prst="rect">
+            <a:avLst/>
+          </a:prstGeom>
+          <a:noFill/>
+          <a:ln/>
+        </p:spPr>
+        <p:txBody>
+          <a:bodyPr wrap="square" lIns="25400" tIns="25400" rIns="25400" bIns="25400" rtlCol="0" anchor="t">
+            <a:normAutofit/>
+          </a:bodyPr>
+          <a:lstStyle/>
+          <a:p>
+            <a:pPr algn="l" indent="0" marL="0">
+              <a:buNone/>
+            </a:pPr>
+            <a:r>
+              <a:rPr lang="en-US" sz="1500" b="1" spc="135" kern="0" dirty="0">
+                <a:solidFill>
+                  <a:srgbClr val="006C9F"/>
+                </a:solidFill>
+                <a:latin typeface="Arial" pitchFamily="34" charset="0"/>
+                <a:ea typeface="Arial" pitchFamily="34" charset="-122"/>
+                <a:cs typeface="Arial" pitchFamily="34" charset="-120"/>
+              </a:rPr>
+              <a:t>AUDITED 5 AUGUST 2026</a:t>
+            </a:r>
+            <a:endParaRPr lang="en-US" sz="1500" dirty="0"/>
+          </a:p>
+        </p:txBody>
+      </p:sp>
+      <p:sp>
+        <p:nvSpPr>
+          <p:cNvPr id="35" name="Text 32"/>
+          <p:cNvSpPr/>
+          <p:nvPr/>
+        </p:nvSpPr>
+        <p:spPr>
+          <a:xfrm>
+            <a:off x="11134725" y="7694786"/>
+            <a:ext cx="3279458" cy="266700"/>
+          </a:xfrm>
+          <a:prstGeom prst="rect">
+            <a:avLst/>
+          </a:prstGeom>
+          <a:noFill/>
+          <a:ln/>
+        </p:spPr>
+        <p:txBody>
+          <a:bodyPr wrap="square" lIns="25400" tIns="25400" rIns="25400" bIns="25400" rtlCol="0" anchor="t">
+            <a:normAutofit/>
+          </a:bodyPr>
+          <a:lstStyle/>
+          <a:p>
+            <a:pPr algn="l" indent="0" marL="0">
+              <a:buNone/>
+            </a:pPr>
+            <a:r>
+              <a:rPr lang="en-US" sz="1575" b="1" spc="126" kern="0" dirty="0">
+                <a:solidFill>
+                  <a:srgbClr val="5B7386"/>
+                </a:solidFill>
+                <a:latin typeface="Arial" pitchFamily="34" charset="0"/>
+                <a:ea typeface="Arial" pitchFamily="34" charset="-122"/>
+                <a:cs typeface="Arial" pitchFamily="34" charset="-120"/>
+              </a:rPr>
+              <a:t>SPENT TO DATE</a:t>
+            </a:r>
+            <a:endParaRPr lang="en-US" sz="1575" dirty="0"/>
+          </a:p>
+        </p:txBody>
+      </p:sp>
+      <p:sp>
+        <p:nvSpPr>
+          <p:cNvPr id="36" name="Text 33"/>
+          <p:cNvSpPr/>
+          <p:nvPr/>
+        </p:nvSpPr>
+        <p:spPr>
+          <a:xfrm>
+            <a:off x="11134725" y="7942436"/>
+            <a:ext cx="3279458" cy="409575"/>
+          </a:xfrm>
+          <a:prstGeom prst="rect">
+            <a:avLst/>
+          </a:prstGeom>
+          <a:noFill/>
+          <a:ln/>
+        </p:spPr>
+        <p:txBody>
+          <a:bodyPr wrap="square" lIns="25400" tIns="25400" rIns="25400" bIns="25400" rtlCol="0" anchor="t">
+            <a:normAutofit/>
+          </a:bodyPr>
+          <a:lstStyle/>
+          <a:p>
+            <a:pPr algn="l" indent="0" marL="0">
+              <a:buNone/>
+            </a:pPr>
+            <a:r>
+              <a:rPr lang="en-US" sz="2550" b="1" spc="-76" kern="0" dirty="0">
+                <a:solidFill>
+                  <a:srgbClr val="00334F"/>
+                </a:solidFill>
+                <a:latin typeface="Arial" pitchFamily="34" charset="0"/>
+                <a:ea typeface="Arial" pitchFamily="34" charset="-122"/>
+                <a:cs typeface="Arial" pitchFamily="34" charset="-120"/>
+              </a:rPr>
+              <a:t>$458,995.17</a:t>
+            </a:r>
+            <a:endParaRPr lang="en-US" sz="2550" dirty="0"/>
+          </a:p>
+        </p:txBody>
+      </p:sp>
+      <p:sp>
+        <p:nvSpPr>
+          <p:cNvPr id="37" name="Text 34"/>
+          <p:cNvSpPr/>
+          <p:nvPr/>
+        </p:nvSpPr>
+        <p:spPr>
+          <a:xfrm>
+            <a:off x="14306550" y="7694786"/>
+            <a:ext cx="3279458" cy="266700"/>
+          </a:xfrm>
+          <a:prstGeom prst="rect">
+            <a:avLst/>
+          </a:prstGeom>
+          <a:noFill/>
+          <a:ln/>
+        </p:spPr>
+        <p:txBody>
+          <a:bodyPr wrap="square" lIns="25400" tIns="25400" rIns="25400" bIns="25400" rtlCol="0" anchor="t">
+            <a:normAutofit/>
+          </a:bodyPr>
+          <a:lstStyle/>
+          <a:p>
+            <a:pPr algn="l" indent="0" marL="0">
+              <a:buNone/>
+            </a:pPr>
+            <a:r>
+              <a:rPr lang="en-US" sz="1575" b="1" spc="126" kern="0" dirty="0">
+                <a:solidFill>
+                  <a:srgbClr val="5B7386"/>
+                </a:solidFill>
+                <a:latin typeface="Arial" pitchFamily="34" charset="0"/>
+                <a:ea typeface="Arial" pitchFamily="34" charset="-122"/>
+                <a:cs typeface="Arial" pitchFamily="34" charset="-120"/>
+              </a:rPr>
+              <a:t>OF THE $775,000 LIMIT</a:t>
+            </a:r>
+            <a:endParaRPr lang="en-US" sz="1575" dirty="0"/>
+          </a:p>
+        </p:txBody>
+      </p:sp>
+      <p:sp>
+        <p:nvSpPr>
+          <p:cNvPr id="38" name="Text 35"/>
+          <p:cNvSpPr/>
+          <p:nvPr/>
+        </p:nvSpPr>
+        <p:spPr>
+          <a:xfrm>
+            <a:off x="14306550" y="7942436"/>
+            <a:ext cx="3279458" cy="409575"/>
+          </a:xfrm>
+          <a:prstGeom prst="rect">
+            <a:avLst/>
+          </a:prstGeom>
+          <a:noFill/>
+          <a:ln/>
+        </p:spPr>
+        <p:txBody>
+          <a:bodyPr wrap="square" lIns="25400" tIns="25400" rIns="25400" bIns="25400" rtlCol="0" anchor="t">
+            <a:normAutofit/>
+          </a:bodyPr>
+          <a:lstStyle/>
+          <a:p>
+            <a:pPr algn="l" indent="0" marL="0">
+              <a:buNone/>
+            </a:pPr>
+            <a:r>
+              <a:rPr lang="en-US" sz="2550" b="1" spc="-76" kern="0" dirty="0">
+                <a:solidFill>
+                  <a:srgbClr val="C2410C"/>
+                </a:solidFill>
+                <a:latin typeface="Arial" pitchFamily="34" charset="0"/>
+                <a:ea typeface="Arial" pitchFamily="34" charset="-122"/>
+                <a:cs typeface="Arial" pitchFamily="34" charset="-120"/>
+              </a:rPr>
+              <a:t>59.23%</a:t>
+            </a:r>
+            <a:endParaRPr lang="en-US" sz="2550" dirty="0"/>
+          </a:p>
+        </p:txBody>
+      </p:sp>
+      <p:sp>
+        <p:nvSpPr>
+          <p:cNvPr id="39" name="Text 36"/>
+          <p:cNvSpPr/>
+          <p:nvPr/>
+        </p:nvSpPr>
+        <p:spPr>
+          <a:xfrm>
+            <a:off x="11134725" y="8428211"/>
+            <a:ext cx="2116455" cy="266700"/>
+          </a:xfrm>
+          <a:prstGeom prst="rect">
+            <a:avLst/>
+          </a:prstGeom>
+          <a:noFill/>
+          <a:ln/>
+        </p:spPr>
+        <p:txBody>
+          <a:bodyPr wrap="square" lIns="25400" tIns="25400" rIns="25400" bIns="25400" rtlCol="0" anchor="t">
+            <a:normAutofit/>
+          </a:bodyPr>
+          <a:lstStyle/>
+          <a:p>
+            <a:pPr algn="l" indent="0" marL="0">
+              <a:buNone/>
+            </a:pPr>
+            <a:r>
+              <a:rPr lang="en-US" sz="1575" b="1" spc="126" kern="0" dirty="0">
+                <a:solidFill>
+                  <a:srgbClr val="5B7386"/>
+                </a:solidFill>
+                <a:latin typeface="Arial" pitchFamily="34" charset="0"/>
+                <a:ea typeface="Arial" pitchFamily="34" charset="-122"/>
+                <a:cs typeface="Arial" pitchFamily="34" charset="-120"/>
+              </a:rPr>
+              <a:t>Q1</a:t>
+            </a:r>
+            <a:endParaRPr lang="en-US" sz="1575" dirty="0"/>
+          </a:p>
+        </p:txBody>
+      </p:sp>
+      <p:sp>
+        <p:nvSpPr>
+          <p:cNvPr id="40" name="Text 37"/>
+          <p:cNvSpPr/>
+          <p:nvPr/>
+        </p:nvSpPr>
+        <p:spPr>
+          <a:xfrm>
+            <a:off x="11134725" y="8675861"/>
+            <a:ext cx="2116455" cy="347663"/>
+          </a:xfrm>
+          <a:prstGeom prst="rect">
+            <a:avLst/>
+          </a:prstGeom>
+          <a:noFill/>
+          <a:ln/>
+        </p:spPr>
+        <p:txBody>
+          <a:bodyPr wrap="square" lIns="25400" tIns="25400" rIns="25400" bIns="25400" rtlCol="0" anchor="t">
+            <a:normAutofit/>
+          </a:bodyPr>
+          <a:lstStyle/>
+          <a:p>
+            <a:pPr algn="l" indent="0" marL="0">
+              <a:buNone/>
+            </a:pPr>
+            <a:r>
+              <a:rPr lang="en-US" sz="2100" b="1" spc="-63" kern="0" dirty="0">
+                <a:solidFill>
+                  <a:srgbClr val="2E7D32"/>
+                </a:solidFill>
+                <a:latin typeface="Arial" pitchFamily="34" charset="0"/>
+                <a:ea typeface="Arial" pitchFamily="34" charset="-122"/>
+                <a:cs typeface="Arial" pitchFamily="34" charset="-120"/>
+              </a:rPr>
+              <a:t>$188,579.00</a:t>
+            </a:r>
+            <a:endParaRPr lang="en-US" sz="2100" dirty="0"/>
+          </a:p>
+        </p:txBody>
+      </p:sp>
+      <p:sp>
+        <p:nvSpPr>
+          <p:cNvPr id="41" name="Text 38"/>
+          <p:cNvSpPr/>
+          <p:nvPr/>
+        </p:nvSpPr>
+        <p:spPr>
+          <a:xfrm>
+            <a:off x="13249275" y="8428211"/>
+            <a:ext cx="2116455" cy="266700"/>
+          </a:xfrm>
+          <a:prstGeom prst="rect">
+            <a:avLst/>
+          </a:prstGeom>
+          <a:noFill/>
+          <a:ln/>
+        </p:spPr>
+        <p:txBody>
+          <a:bodyPr wrap="square" lIns="25400" tIns="25400" rIns="25400" bIns="25400" rtlCol="0" anchor="t">
+            <a:normAutofit/>
+          </a:bodyPr>
+          <a:lstStyle/>
+          <a:p>
+            <a:pPr algn="l" indent="0" marL="0">
+              <a:buNone/>
+            </a:pPr>
+            <a:r>
+              <a:rPr lang="en-US" sz="1575" b="1" spc="126" kern="0" dirty="0">
+                <a:solidFill>
+                  <a:srgbClr val="5B7386"/>
+                </a:solidFill>
+                <a:latin typeface="Arial" pitchFamily="34" charset="0"/>
+                <a:ea typeface="Arial" pitchFamily="34" charset="-122"/>
+                <a:cs typeface="Arial" pitchFamily="34" charset="-120"/>
+              </a:rPr>
+              <a:t>Q2</a:t>
+            </a:r>
+            <a:endParaRPr lang="en-US" sz="1575" dirty="0"/>
+          </a:p>
+        </p:txBody>
+      </p:sp>
+      <p:sp>
+        <p:nvSpPr>
+          <p:cNvPr id="42" name="Text 39"/>
+          <p:cNvSpPr/>
+          <p:nvPr/>
+        </p:nvSpPr>
+        <p:spPr>
+          <a:xfrm>
+            <a:off x="13249275" y="8675861"/>
+            <a:ext cx="2116455" cy="347663"/>
+          </a:xfrm>
+          <a:prstGeom prst="rect">
+            <a:avLst/>
+          </a:prstGeom>
+          <a:noFill/>
+          <a:ln/>
+        </p:spPr>
+        <p:txBody>
+          <a:bodyPr wrap="square" lIns="25400" tIns="25400" rIns="25400" bIns="25400" rtlCol="0" anchor="t">
+            <a:normAutofit/>
+          </a:bodyPr>
+          <a:lstStyle/>
+          <a:p>
+            <a:pPr algn="l" indent="0" marL="0">
+              <a:buNone/>
+            </a:pPr>
+            <a:r>
+              <a:rPr lang="en-US" sz="2100" b="1" spc="-63" kern="0" dirty="0">
+                <a:solidFill>
+                  <a:srgbClr val="2E7D32"/>
+                </a:solidFill>
+                <a:latin typeface="Arial" pitchFamily="34" charset="0"/>
+                <a:ea typeface="Arial" pitchFamily="34" charset="-122"/>
+                <a:cs typeface="Arial" pitchFamily="34" charset="-120"/>
+              </a:rPr>
+              <a:t>$192,318.50</a:t>
+            </a:r>
+            <a:endParaRPr lang="en-US" sz="2100" dirty="0"/>
+          </a:p>
+        </p:txBody>
+      </p:sp>
+      <p:sp>
+        <p:nvSpPr>
+          <p:cNvPr id="43" name="Text 40"/>
+          <p:cNvSpPr/>
+          <p:nvPr/>
+        </p:nvSpPr>
+        <p:spPr>
+          <a:xfrm>
+            <a:off x="15363825" y="8428211"/>
+            <a:ext cx="2116455" cy="266700"/>
+          </a:xfrm>
+          <a:prstGeom prst="rect">
+            <a:avLst/>
+          </a:prstGeom>
+          <a:noFill/>
+          <a:ln/>
+        </p:spPr>
+        <p:txBody>
+          <a:bodyPr wrap="square" lIns="25400" tIns="25400" rIns="25400" bIns="25400" rtlCol="0" anchor="t">
+            <a:normAutofit/>
+          </a:bodyPr>
+          <a:lstStyle/>
+          <a:p>
+            <a:pPr algn="l" indent="0" marL="0">
+              <a:buNone/>
+            </a:pPr>
+            <a:r>
+              <a:rPr lang="en-US" sz="1575" b="1" spc="126" kern="0" dirty="0">
+                <a:solidFill>
+                  <a:srgbClr val="5B7386"/>
+                </a:solidFill>
+                <a:latin typeface="Arial" pitchFamily="34" charset="0"/>
+                <a:ea typeface="Arial" pitchFamily="34" charset="-122"/>
+                <a:cs typeface="Arial" pitchFamily="34" charset="-120"/>
+              </a:rPr>
+              <a:t>Q3</a:t>
+            </a:r>
+            <a:endParaRPr lang="en-US" sz="1575" dirty="0"/>
+          </a:p>
+        </p:txBody>
+      </p:sp>
+      <p:sp>
+        <p:nvSpPr>
+          <p:cNvPr id="44" name="Text 41"/>
+          <p:cNvSpPr/>
+          <p:nvPr/>
+        </p:nvSpPr>
+        <p:spPr>
+          <a:xfrm>
+            <a:off x="15363825" y="8675861"/>
+            <a:ext cx="2116455" cy="347663"/>
+          </a:xfrm>
+          <a:prstGeom prst="rect">
+            <a:avLst/>
+          </a:prstGeom>
+          <a:noFill/>
+          <a:ln/>
+        </p:spPr>
+        <p:txBody>
+          <a:bodyPr wrap="square" lIns="25400" tIns="25400" rIns="25400" bIns="25400" rtlCol="0" anchor="t">
+            <a:normAutofit/>
+          </a:bodyPr>
+          <a:lstStyle/>
+          <a:p>
+            <a:pPr algn="l" indent="0" marL="0">
+              <a:buNone/>
+            </a:pPr>
+            <a:r>
+              <a:rPr lang="en-US" sz="2100" b="1" spc="-63" kern="0" dirty="0">
+                <a:solidFill>
+                  <a:srgbClr val="2E7D32"/>
+                </a:solidFill>
+                <a:latin typeface="Arial" pitchFamily="34" charset="0"/>
+                <a:ea typeface="Arial" pitchFamily="34" charset="-122"/>
+                <a:cs typeface="Arial" pitchFamily="34" charset="-120"/>
+              </a:rPr>
+              <a:t>$78,097.67</a:t>
+            </a:r>
+            <a:endParaRPr lang="en-US" sz="2100" dirty="0"/>
+          </a:p>
+        </p:txBody>
+      </p:sp>
+    </p:spTree>
+  </p:cSld>
+  <p:clrMapOvr>
+    <a:masterClrMapping/>
+  </p:clrMapOvr>
+</p:sld>
+</file>
+
+<file path=ppt/slides/slide5.xml><?xml version="1.0" encoding="utf-8"?>
+<p:sld xmlns:a="http://schemas.openxmlformats.org/drawingml/2006/main" xmlns:r="http://schemas.openxmlformats.org/officeDocument/2006/relationships" xmlns:p="http://schemas.openxmlformats.org/presentationml/2006/main">
+  <p:cSld name="Slide 5">
     <p:bg>
       <p:bgPr>
         <a:solidFill>
@@ -4056,7 +5762,7 @@
         <p:spPr>
           <a:xfrm>
             <a:off x="762000" y="590550"/>
-            <a:ext cx="7650703" cy="323850"/>
+            <a:ext cx="7793459" cy="276225"/>
           </a:xfrm>
           <a:prstGeom prst="rect">
             <a:avLst/>
@@ -4078,11 +5784,11 @@
                 <a:solidFill>
                   <a:srgbClr val="006C9F"/>
                 </a:solidFill>
-                <a:latin typeface="Manrope" pitchFamily="34" charset="0"/>
-                <a:ea typeface="Manrope" pitchFamily="34" charset="-122"/>
-                <a:cs typeface="Manrope" pitchFamily="34" charset="-120"/>
-              </a:rPr>
-              <a:t>03 · BUILDING AND ITERATING WITH CODEX AND CLAUDE</a:t>
+                <a:latin typeface="Arial" pitchFamily="34" charset="0"/>
+                <a:ea typeface="Arial" pitchFamily="34" charset="-122"/>
+                <a:cs typeface="Arial" pitchFamily="34" charset="-120"/>
+              </a:rPr>
+              <a:t>04 · BUILDING AND ITERATING WITH CODEX AND CLAUDE</a:t>
             </a:r>
             <a:endParaRPr lang="en-US" sz="1650" dirty="0"/>
           </a:p>
@@ -4096,24 +5802,24 @@
         </p:nvSpPr>
         <p:spPr>
           <a:xfrm>
-            <a:off x="762000" y="952500"/>
-            <a:ext cx="7650703" cy="582141"/>
-          </a:xfrm>
-          <a:prstGeom prst="rect">
-            <a:avLst/>
-          </a:prstGeom>
-          <a:noFill/>
-          <a:ln/>
-        </p:spPr>
-        <p:txBody>
-          <a:bodyPr wrap="square" lIns="25400" tIns="25400" rIns="25400" bIns="25400" rtlCol="0" anchor="t">
-            <a:normAutofit/>
-          </a:bodyPr>
-          <a:lstStyle/>
-          <a:p>
-            <a:pPr algn="l" indent="0" marL="0">
-              <a:lnSpc>
-                <a:spcPct val="74667"/>
+            <a:off x="762000" y="904875"/>
+            <a:ext cx="7793459" cy="582141"/>
+          </a:xfrm>
+          <a:prstGeom prst="rect">
+            <a:avLst/>
+          </a:prstGeom>
+          <a:noFill/>
+          <a:ln/>
+        </p:spPr>
+        <p:txBody>
+          <a:bodyPr wrap="square" lIns="25400" tIns="25400" rIns="25400" bIns="25400" rtlCol="0" anchor="t">
+            <a:normAutofit/>
+          </a:bodyPr>
+          <a:lstStyle/>
+          <a:p>
+            <a:pPr algn="l" indent="0" marL="0">
+              <a:lnSpc>
+                <a:spcPct val="88558"/>
               </a:lnSpc>
               <a:buNone/>
             </a:pPr>
@@ -4122,9 +5828,9 @@
                 <a:solidFill>
                   <a:srgbClr val="00334F"/>
                 </a:solidFill>
-                <a:latin typeface="Manrope" pitchFamily="34" charset="0"/>
-                <a:ea typeface="Manrope" pitchFamily="34" charset="-122"/>
-                <a:cs typeface="Manrope" pitchFamily="34" charset="-120"/>
+                <a:latin typeface="Arial" pitchFamily="34" charset="0"/>
+                <a:ea typeface="Arial" pitchFamily="34" charset="-122"/>
+                <a:cs typeface="Arial" pitchFamily="34" charset="-120"/>
               </a:rPr>
               <a:t>Four blocks in every prompt</a:t>
             </a:r>
@@ -4140,8 +5846,8 @@
         </p:nvSpPr>
         <p:spPr>
           <a:xfrm>
-            <a:off x="12495833" y="641226"/>
-            <a:ext cx="5030167" cy="855315"/>
+            <a:off x="12716768" y="593601"/>
+            <a:ext cx="4809232" cy="855315"/>
           </a:xfrm>
           <a:prstGeom prst="roundRect">
             <a:avLst>
@@ -4167,8 +5873,8 @@
         </p:nvSpPr>
         <p:spPr>
           <a:xfrm>
-            <a:off x="12564003" y="784101"/>
-            <a:ext cx="4742922" cy="607665"/>
+            <a:off x="12791566" y="736476"/>
+            <a:ext cx="4515359" cy="607665"/>
           </a:xfrm>
           <a:prstGeom prst="rect">
             <a:avLst/>
@@ -4184,7 +5890,7 @@
           <a:p>
             <a:pPr algn="r" indent="0" marL="0">
               <a:lnSpc>
-                <a:spcPct val="94921"/>
+                <a:spcPct val="110741"/>
               </a:lnSpc>
               <a:buNone/>
             </a:pPr>
@@ -4196,9 +5902,9 @@
                 <a:highlight>
                   <a:srgbClr val="FFFFFF"/>
                 </a:highlight>
-                <a:latin typeface="Manrope" pitchFamily="34" charset="0"/>
-                <a:ea typeface="Manrope" pitchFamily="34" charset="-122"/>
-                <a:cs typeface="Manrope" pitchFamily="34" charset="-120"/>
+                <a:latin typeface="Arial" pitchFamily="34" charset="0"/>
+                <a:ea typeface="Arial" pitchFamily="34" charset="-122"/>
+                <a:cs typeface="Arial" pitchFamily="34" charset="-120"/>
               </a:rPr>
               <a:t>AGENTS.md is read automatically by Codex. Keep it current.</a:t>
             </a:r>
@@ -4214,12 +5920,12 @@
         </p:nvSpPr>
         <p:spPr>
           <a:xfrm>
-            <a:off x="762000" y="1706091"/>
-            <a:ext cx="8305800" cy="3361730"/>
+            <a:off x="762000" y="1658466"/>
+            <a:ext cx="8305800" cy="3268861"/>
           </a:xfrm>
           <a:prstGeom prst="roundRect">
             <a:avLst>
-              <a:gd name="adj" fmla="val 5100"/>
+              <a:gd name="adj" fmla="val 5245"/>
             </a:avLst>
           </a:prstGeom>
           <a:solidFill>
@@ -4241,8 +5947,8 @@
         </p:nvSpPr>
         <p:spPr>
           <a:xfrm>
-            <a:off x="1000125" y="1887066"/>
-            <a:ext cx="245418" cy="376238"/>
+            <a:off x="1000125" y="1839441"/>
+            <a:ext cx="241399" cy="323850"/>
           </a:xfrm>
           <a:prstGeom prst="rect">
             <a:avLst/>
@@ -4264,9 +5970,9 @@
                 <a:solidFill>
                   <a:srgbClr val="0098D3"/>
                 </a:solidFill>
-                <a:latin typeface="Manrope" pitchFamily="34" charset="0"/>
-                <a:ea typeface="Manrope" pitchFamily="34" charset="-122"/>
-                <a:cs typeface="Manrope" pitchFamily="34" charset="-120"/>
+                <a:latin typeface="Arial" pitchFamily="34" charset="0"/>
+                <a:ea typeface="Arial" pitchFamily="34" charset="-122"/>
+                <a:cs typeface="Arial" pitchFamily="34" charset="-120"/>
               </a:rPr>
               <a:t>A</a:t>
             </a:r>
@@ -4282,8 +5988,8 @@
         </p:nvSpPr>
         <p:spPr>
           <a:xfrm>
-            <a:off x="1283643" y="1925166"/>
-            <a:ext cx="5381833" cy="323850"/>
+            <a:off x="1279624" y="1877541"/>
+            <a:ext cx="5639187" cy="276225"/>
           </a:xfrm>
           <a:prstGeom prst="rect">
             <a:avLst/>
@@ -4305,9 +6011,9 @@
                 <a:solidFill>
                   <a:srgbClr val="006C9F"/>
                 </a:solidFill>
-                <a:latin typeface="Manrope" pitchFamily="34" charset="0"/>
-                <a:ea typeface="Manrope" pitchFamily="34" charset="-122"/>
-                <a:cs typeface="Manrope" pitchFamily="34" charset="-120"/>
+                <a:latin typeface="Arial" pitchFamily="34" charset="0"/>
+                <a:ea typeface="Arial" pitchFamily="34" charset="-122"/>
+                <a:cs typeface="Arial" pitchFamily="34" charset="-120"/>
               </a:rPr>
               <a:t>CONTEXT CALLING — FILES TO READ FIRST</a:t>
             </a:r>
@@ -4323,12 +6029,12 @@
         </p:nvSpPr>
         <p:spPr>
           <a:xfrm>
-            <a:off x="1000125" y="2301404"/>
-            <a:ext cx="7829550" cy="1028700"/>
+            <a:off x="1000125" y="2201391"/>
+            <a:ext cx="7829550" cy="1295400"/>
           </a:xfrm>
           <a:prstGeom prst="roundRect">
             <a:avLst>
-              <a:gd name="adj" fmla="val 11111"/>
+              <a:gd name="adj" fmla="val 8824"/>
             </a:avLst>
           </a:prstGeom>
           <a:solidFill>
@@ -4345,8 +6051,8 @@
         </p:nvSpPr>
         <p:spPr>
           <a:xfrm>
-            <a:off x="1133475" y="2415704"/>
-            <a:ext cx="7797737" cy="838200"/>
+            <a:off x="1133475" y="2315691"/>
+            <a:ext cx="7797737" cy="1104900"/>
           </a:xfrm>
           <a:prstGeom prst="rect">
             <a:avLst/>
@@ -4375,7 +6081,7 @@
                 <a:ea typeface="Courier New" pitchFamily="34" charset="-122"/>
                 <a:cs typeface="Courier New" pitchFamily="34" charset="-120"/>
               </a:rPr>
-              <a:t>Read AGENTS.md, HANDOVER.md,</a:t>
+              <a:t>Read AGENTS.md,</a:t>
             </a:r>
             <a:endParaRPr lang="en-US" sz="1500" dirty="0"/>
           </a:p>
@@ -4395,7 +6101,7 @@
                 <a:ea typeface="Courier New" pitchFamily="34" charset="-122"/>
                 <a:cs typeface="Courier New" pitchFamily="34" charset="-120"/>
               </a:rPr>
-              <a:t>docs/landcare-architecture.md,</a:t>
+              <a:t>handover/04-readiness-checklist.md,</a:t>
             </a:r>
             <a:endParaRPr lang="en-US" sz="1500" dirty="0"/>
           </a:p>
@@ -4415,6 +6121,26 @@
                 <a:ea typeface="Courier New" pitchFamily="34" charset="-122"/>
                 <a:cs typeface="Courier New" pitchFamily="34" charset="-120"/>
               </a:rPr>
+              <a:t>handover/01-owner-guide.md,</a:t>
+            </a:r>
+            <a:endParaRPr lang="en-US" sz="1500" dirty="0"/>
+          </a:p>
+          <a:p>
+            <a:pPr algn="l" indent="0" marL="0">
+              <a:lnSpc>
+                <a:spcPct val="124444"/>
+              </a:lnSpc>
+              <a:buNone/>
+            </a:pPr>
+            <a:r>
+              <a:rPr lang="en-US" sz="1500" dirty="0">
+                <a:solidFill>
+                  <a:srgbClr val="00334F"/>
+                </a:solidFill>
+                <a:latin typeface="Courier New" pitchFamily="34" charset="0"/>
+                <a:ea typeface="Courier New" pitchFamily="34" charset="-122"/>
+                <a:cs typeface="Courier New" pitchFamily="34" charset="-120"/>
+              </a:rPr>
               <a:t>docs/landcare-metrics-context.md first.</a:t>
             </a:r>
             <a:endParaRPr lang="en-US" sz="1500" dirty="0"/>
@@ -4429,7 +6155,7 @@
         </p:nvSpPr>
         <p:spPr>
           <a:xfrm>
-            <a:off x="1000125" y="3406304"/>
+            <a:off x="1000125" y="3572991"/>
             <a:ext cx="8612505" cy="298103"/>
           </a:xfrm>
           <a:prstGeom prst="rect">
@@ -4446,7 +6172,7 @@
           <a:p>
             <a:pPr algn="l" indent="0" marL="0">
               <a:lnSpc>
-                <a:spcPct val="94138"/>
+                <a:spcPct val="113750"/>
               </a:lnSpc>
               <a:buNone/>
             </a:pPr>
@@ -4455,15 +6181,15 @@
                 <a:solidFill>
                   <a:srgbClr val="00334F"/>
                 </a:solidFill>
-                <a:latin typeface="Manrope" pitchFamily="34" charset="0"/>
-                <a:ea typeface="Manrope" pitchFamily="34" charset="-122"/>
-                <a:cs typeface="Manrope" pitchFamily="34" charset="-120"/>
+                <a:latin typeface="Arial" pitchFamily="34" charset="0"/>
+                <a:ea typeface="Arial" pitchFamily="34" charset="-122"/>
+                <a:cs typeface="Arial" pitchFamily="34" charset="-120"/>
               </a:rPr>
               <a:t>Inherits the source-of-truth and change rules </a:t>
             </a:r>
             <a:pPr algn="l" indent="0" marL="0">
               <a:lnSpc>
-                <a:spcPct val="94138"/>
+                <a:spcPct val="113750"/>
               </a:lnSpc>
               <a:buNone/>
             </a:pPr>
@@ -4472,9 +6198,9 @@
                 <a:solidFill>
                   <a:srgbClr val="00334F"/>
                 </a:solidFill>
-                <a:latin typeface="Manrope" pitchFamily="34" charset="0"/>
-                <a:ea typeface="Manrope" pitchFamily="34" charset="-122"/>
-                <a:cs typeface="Manrope" pitchFamily="34" charset="-120"/>
+                <a:latin typeface="Arial" pitchFamily="34" charset="0"/>
+                <a:ea typeface="Arial" pitchFamily="34" charset="-122"/>
+                <a:cs typeface="Arial" pitchFamily="34" charset="-120"/>
               </a:rPr>
               <a:t>before the agent plans anything.</a:t>
             </a:r>
@@ -4490,12 +6216,12 @@
         </p:nvSpPr>
         <p:spPr>
           <a:xfrm>
-            <a:off x="9220200" y="1706091"/>
-            <a:ext cx="8305800" cy="3361730"/>
+            <a:off x="9220200" y="1658466"/>
+            <a:ext cx="8305800" cy="3268861"/>
           </a:xfrm>
           <a:prstGeom prst="roundRect">
             <a:avLst>
-              <a:gd name="adj" fmla="val 5100"/>
+              <a:gd name="adj" fmla="val 5245"/>
             </a:avLst>
           </a:prstGeom>
           <a:solidFill>
@@ -4517,8 +6243,8 @@
         </p:nvSpPr>
         <p:spPr>
           <a:xfrm>
-            <a:off x="9458325" y="1887066"/>
-            <a:ext cx="233958" cy="376238"/>
+            <a:off x="9458325" y="1839441"/>
+            <a:ext cx="241399" cy="323850"/>
           </a:xfrm>
           <a:prstGeom prst="rect">
             <a:avLst/>
@@ -4540,9 +6266,9 @@
                 <a:solidFill>
                   <a:srgbClr val="00334F"/>
                 </a:solidFill>
-                <a:latin typeface="Manrope" pitchFamily="34" charset="0"/>
-                <a:ea typeface="Manrope" pitchFamily="34" charset="-122"/>
-                <a:cs typeface="Manrope" pitchFamily="34" charset="-120"/>
+                <a:latin typeface="Arial" pitchFamily="34" charset="0"/>
+                <a:ea typeface="Arial" pitchFamily="34" charset="-122"/>
+                <a:cs typeface="Arial" pitchFamily="34" charset="-120"/>
               </a:rPr>
               <a:t>B</a:t>
             </a:r>
@@ -4558,8 +6284,8 @@
         </p:nvSpPr>
         <p:spPr>
           <a:xfrm>
-            <a:off x="9730383" y="1925166"/>
-            <a:ext cx="5515340" cy="323850"/>
+            <a:off x="9737824" y="1877541"/>
+            <a:ext cx="5744126" cy="276225"/>
           </a:xfrm>
           <a:prstGeom prst="rect">
             <a:avLst/>
@@ -4581,9 +6307,9 @@
                 <a:solidFill>
                   <a:srgbClr val="006C9F"/>
                 </a:solidFill>
-                <a:latin typeface="Manrope" pitchFamily="34" charset="0"/>
-                <a:ea typeface="Manrope" pitchFamily="34" charset="-122"/>
-                <a:cs typeface="Manrope" pitchFamily="34" charset="-120"/>
+                <a:latin typeface="Arial" pitchFamily="34" charset="0"/>
+                <a:ea typeface="Arial" pitchFamily="34" charset="-122"/>
+                <a:cs typeface="Arial" pitchFamily="34" charset="-120"/>
               </a:rPr>
               <a:t>CONTRACT — GOAL, SOURCE, METRIC RULE</a:t>
             </a:r>
@@ -4599,7 +6325,7 @@
         </p:nvSpPr>
         <p:spPr>
           <a:xfrm>
-            <a:off x="9458325" y="2301404"/>
+            <a:off x="9458325" y="2201391"/>
             <a:ext cx="7829550" cy="1562100"/>
           </a:xfrm>
           <a:prstGeom prst="roundRect">
@@ -4621,7 +6347,7 @@
         </p:nvSpPr>
         <p:spPr>
           <a:xfrm>
-            <a:off x="9591675" y="2415704"/>
+            <a:off x="9591675" y="2315691"/>
             <a:ext cx="7797737" cy="1371600"/>
           </a:xfrm>
           <a:prstGeom prst="rect">
@@ -4745,12 +6471,12 @@
         </p:nvSpPr>
         <p:spPr>
           <a:xfrm>
-            <a:off x="762000" y="5220221"/>
-            <a:ext cx="8305800" cy="3361804"/>
+            <a:off x="762000" y="5079727"/>
+            <a:ext cx="8305800" cy="3268935"/>
           </a:xfrm>
           <a:prstGeom prst="roundRect">
             <a:avLst>
-              <a:gd name="adj" fmla="val 5100"/>
+              <a:gd name="adj" fmla="val 5245"/>
             </a:avLst>
           </a:prstGeom>
           <a:solidFill>
@@ -4772,8 +6498,8 @@
         </p:nvSpPr>
         <p:spPr>
           <a:xfrm>
-            <a:off x="1000125" y="5401196"/>
-            <a:ext cx="260970" cy="376238"/>
+            <a:off x="1000125" y="5260702"/>
+            <a:ext cx="255091" cy="323850"/>
           </a:xfrm>
           <a:prstGeom prst="rect">
             <a:avLst/>
@@ -4795,9 +6521,9 @@
                 <a:solidFill>
                   <a:srgbClr val="2E7D32"/>
                 </a:solidFill>
-                <a:latin typeface="Manrope" pitchFamily="34" charset="0"/>
-                <a:ea typeface="Manrope" pitchFamily="34" charset="-122"/>
-                <a:cs typeface="Manrope" pitchFamily="34" charset="-120"/>
+                <a:latin typeface="Arial" pitchFamily="34" charset="0"/>
+                <a:ea typeface="Arial" pitchFamily="34" charset="-122"/>
+                <a:cs typeface="Arial" pitchFamily="34" charset="-120"/>
               </a:rPr>
               <a:t>C</a:t>
             </a:r>
@@ -4813,8 +6539,8 @@
         </p:nvSpPr>
         <p:spPr>
           <a:xfrm>
-            <a:off x="1299195" y="5439296"/>
-            <a:ext cx="5516977" cy="323850"/>
+            <a:off x="1293316" y="5298802"/>
+            <a:ext cx="5727427" cy="276225"/>
           </a:xfrm>
           <a:prstGeom prst="rect">
             <a:avLst/>
@@ -4836,9 +6562,9 @@
                 <a:solidFill>
                   <a:srgbClr val="006C9F"/>
                 </a:solidFill>
-                <a:latin typeface="Manrope" pitchFamily="34" charset="0"/>
-                <a:ea typeface="Manrope" pitchFamily="34" charset="-122"/>
-                <a:cs typeface="Manrope" pitchFamily="34" charset="-120"/>
+                <a:latin typeface="Arial" pitchFamily="34" charset="0"/>
+                <a:ea typeface="Arial" pitchFamily="34" charset="-122"/>
+                <a:cs typeface="Arial" pitchFamily="34" charset="-120"/>
               </a:rPr>
               <a:t>TOOL CALLS — WHAT THE AGENT MUST RUN</a:t>
             </a:r>
@@ -4854,12 +6580,12 @@
         </p:nvSpPr>
         <p:spPr>
           <a:xfrm>
-            <a:off x="1000125" y="5815533"/>
-            <a:ext cx="7829550" cy="1295400"/>
+            <a:off x="1000125" y="5622652"/>
+            <a:ext cx="7829550" cy="990600"/>
           </a:xfrm>
           <a:prstGeom prst="roundRect">
             <a:avLst>
-              <a:gd name="adj" fmla="val 8824"/>
+              <a:gd name="adj" fmla="val 11538"/>
             </a:avLst>
           </a:prstGeom>
           <a:solidFill>
@@ -4876,8 +6602,8 @@
         </p:nvSpPr>
         <p:spPr>
           <a:xfrm>
-            <a:off x="1133475" y="5929833"/>
-            <a:ext cx="7797737" cy="1104900"/>
+            <a:off x="1133475" y="5717902"/>
+            <a:ext cx="7797737" cy="838200"/>
           </a:xfrm>
           <a:prstGeom prst="rect">
             <a:avLst/>
@@ -4946,30 +6672,10 @@
                 <a:ea typeface="Courier New" pitchFamily="34" charset="-122"/>
                 <a:cs typeface="Courier New" pitchFamily="34" charset="-120"/>
               </a:rPr>
-              <a:t>Pages validation checks</a:t>
+              <a:t>Pages validation + read-only ArcGIS smoke test</a:t>
             </a:r>
             <a:endParaRPr lang="en-US" sz="1500" dirty="0"/>
           </a:p>
-          <a:p>
-            <a:pPr algn="l" indent="0" marL="0">
-              <a:lnSpc>
-                <a:spcPct val="124444"/>
-              </a:lnSpc>
-              <a:buNone/>
-            </a:pPr>
-            <a:r>
-              <a:rPr lang="en-US" sz="1500" dirty="0">
-                <a:solidFill>
-                  <a:srgbClr val="00334F"/>
-                </a:solidFill>
-                <a:latin typeface="Courier New" pitchFamily="34" charset="0"/>
-                <a:ea typeface="Courier New" pitchFamily="34" charset="-122"/>
-                <a:cs typeface="Courier New" pitchFamily="34" charset="-120"/>
-              </a:rPr>
-              <a:t>Read-only ArcGIS smoke test</a:t>
-            </a:r>
-            <a:endParaRPr lang="en-US" sz="1500" dirty="0"/>
-          </a:p>
         </p:txBody>
       </p:sp>
       <p:sp>
@@ -4980,8 +6686,8 @@
         </p:nvSpPr>
         <p:spPr>
           <a:xfrm>
-            <a:off x="1000125" y="7187133"/>
-            <a:ext cx="1202680" cy="375270"/>
+            <a:off x="1000125" y="6689452"/>
+            <a:ext cx="1136749" cy="375270"/>
           </a:xfrm>
           <a:prstGeom prst="roundRect">
             <a:avLst>
@@ -5004,24 +6710,24 @@
         </p:nvSpPr>
         <p:spPr>
           <a:xfrm>
-            <a:off x="1133475" y="7234758"/>
-            <a:ext cx="1012180" cy="318120"/>
-          </a:xfrm>
-          <a:prstGeom prst="rect">
-            <a:avLst/>
-          </a:prstGeom>
-          <a:noFill/>
-          <a:ln/>
-        </p:spPr>
-        <p:txBody>
-          <a:bodyPr wrap="square" lIns="25400" tIns="25400" rIns="25400" bIns="25400" rtlCol="0" anchor="t">
-            <a:normAutofit/>
-          </a:bodyPr>
-          <a:lstStyle/>
-          <a:p>
-            <a:pPr algn="l" indent="0" marL="0">
-              <a:lnSpc>
-                <a:spcPct val="101379"/>
+            <a:off x="1133475" y="6737077"/>
+            <a:ext cx="946249" cy="318120"/>
+          </a:xfrm>
+          <a:prstGeom prst="rect">
+            <a:avLst/>
+          </a:prstGeom>
+          <a:noFill/>
+          <a:ln/>
+        </p:spPr>
+        <p:txBody>
+          <a:bodyPr wrap="square" lIns="25400" tIns="25400" rIns="25400" bIns="25400" rtlCol="0" anchor="t">
+            <a:normAutofit/>
+          </a:bodyPr>
+          <a:lstStyle/>
+          <a:p>
+            <a:pPr algn="l" indent="0" marL="0">
+              <a:lnSpc>
+                <a:spcPct val="122500"/>
               </a:lnSpc>
               <a:buNone/>
             </a:pPr>
@@ -5030,9 +6736,9 @@
                 <a:solidFill>
                   <a:srgbClr val="2E7D32"/>
                 </a:solidFill>
-                <a:latin typeface="Manrope" pitchFamily="34" charset="0"/>
-                <a:ea typeface="Manrope" pitchFamily="34" charset="-122"/>
-                <a:cs typeface="Manrope" pitchFamily="34" charset="-120"/>
+                <a:latin typeface="Arial" pitchFamily="34" charset="0"/>
+                <a:ea typeface="Arial" pitchFamily="34" charset="-122"/>
+                <a:cs typeface="Arial" pitchFamily="34" charset="-120"/>
               </a:rPr>
               <a:t>@chrome</a:t>
             </a:r>
@@ -5048,24 +6754,24 @@
         </p:nvSpPr>
         <p:spPr>
           <a:xfrm>
-            <a:off x="2298055" y="7234758"/>
-            <a:ext cx="4078367" cy="318120"/>
-          </a:xfrm>
-          <a:prstGeom prst="rect">
-            <a:avLst/>
-          </a:prstGeom>
-          <a:noFill/>
-          <a:ln/>
-        </p:spPr>
-        <p:txBody>
-          <a:bodyPr wrap="square" lIns="25400" tIns="25400" rIns="25400" bIns="25400" rtlCol="0" anchor="t">
-            <a:normAutofit/>
-          </a:bodyPr>
-          <a:lstStyle/>
-          <a:p>
-            <a:pPr algn="l" indent="0" marL="0">
-              <a:lnSpc>
-                <a:spcPct val="101379"/>
+            <a:off x="2232124" y="6737077"/>
+            <a:ext cx="3840495" cy="318120"/>
+          </a:xfrm>
+          <a:prstGeom prst="rect">
+            <a:avLst/>
+          </a:prstGeom>
+          <a:noFill/>
+          <a:ln/>
+        </p:spPr>
+        <p:txBody>
+          <a:bodyPr wrap="square" lIns="25400" tIns="25400" rIns="25400" bIns="25400" rtlCol="0" anchor="t">
+            <a:normAutofit/>
+          </a:bodyPr>
+          <a:lstStyle/>
+          <a:p>
+            <a:pPr algn="l" indent="0" marL="0">
+              <a:lnSpc>
+                <a:spcPct val="122500"/>
               </a:lnSpc>
               <a:buNone/>
             </a:pPr>
@@ -5074,9 +6780,9 @@
                 <a:solidFill>
                   <a:srgbClr val="00334F"/>
                 </a:solidFill>
-                <a:latin typeface="Manrope" pitchFamily="34" charset="0"/>
-                <a:ea typeface="Manrope" pitchFamily="34" charset="-122"/>
-                <a:cs typeface="Manrope" pitchFamily="34" charset="-120"/>
+                <a:latin typeface="Arial" pitchFamily="34" charset="0"/>
+                <a:ea typeface="Arial" pitchFamily="34" charset="-122"/>
+                <a:cs typeface="Arial" pitchFamily="34" charset="-120"/>
               </a:rPr>
               <a:t>read the live route, its map and console</a:t>
             </a:r>
@@ -5092,8 +6798,8 @@
         </p:nvSpPr>
         <p:spPr>
           <a:xfrm>
-            <a:off x="1000125" y="7619554"/>
-            <a:ext cx="1626096" cy="375270"/>
+            <a:off x="1000125" y="7121872"/>
+            <a:ext cx="1478607" cy="375270"/>
           </a:xfrm>
           <a:prstGeom prst="roundRect">
             <a:avLst>
@@ -5116,24 +6822,24 @@
         </p:nvSpPr>
         <p:spPr>
           <a:xfrm>
-            <a:off x="1133475" y="7667179"/>
-            <a:ext cx="1435596" cy="318120"/>
-          </a:xfrm>
-          <a:prstGeom prst="rect">
-            <a:avLst/>
-          </a:prstGeom>
-          <a:noFill/>
-          <a:ln/>
-        </p:spPr>
-        <p:txBody>
-          <a:bodyPr wrap="square" lIns="25400" tIns="25400" rIns="25400" bIns="25400" rtlCol="0" anchor="t">
-            <a:normAutofit/>
-          </a:bodyPr>
-          <a:lstStyle/>
-          <a:p>
-            <a:pPr algn="l" indent="0" marL="0">
-              <a:lnSpc>
-                <a:spcPct val="101379"/>
+            <a:off x="1133475" y="7169497"/>
+            <a:ext cx="1288107" cy="318120"/>
+          </a:xfrm>
+          <a:prstGeom prst="rect">
+            <a:avLst/>
+          </a:prstGeom>
+          <a:noFill/>
+          <a:ln/>
+        </p:spPr>
+        <p:txBody>
+          <a:bodyPr wrap="square" lIns="25400" tIns="25400" rIns="25400" bIns="25400" rtlCol="0" anchor="t">
+            <a:normAutofit/>
+          </a:bodyPr>
+          <a:lstStyle/>
+          <a:p>
+            <a:pPr algn="l" indent="0" marL="0">
+              <a:lnSpc>
+                <a:spcPct val="122500"/>
               </a:lnSpc>
               <a:buNone/>
             </a:pPr>
@@ -5142,9 +6848,9 @@
                 <a:solidFill>
                   <a:srgbClr val="2E7D32"/>
                 </a:solidFill>
-                <a:latin typeface="Manrope" pitchFamily="34" charset="0"/>
-                <a:ea typeface="Manrope" pitchFamily="34" charset="-122"/>
-                <a:cs typeface="Manrope" pitchFamily="34" charset="-120"/>
+                <a:latin typeface="Arial" pitchFamily="34" charset="0"/>
+                <a:ea typeface="Arial" pitchFamily="34" charset="-122"/>
+                <a:cs typeface="Arial" pitchFamily="34" charset="-120"/>
               </a:rPr>
               <a:t>computer use</a:t>
             </a:r>
@@ -5160,24 +6866,24 @@
         </p:nvSpPr>
         <p:spPr>
           <a:xfrm>
-            <a:off x="2721471" y="7667179"/>
-            <a:ext cx="4545270" cy="318120"/>
-          </a:xfrm>
-          <a:prstGeom prst="rect">
-            <a:avLst/>
-          </a:prstGeom>
-          <a:noFill/>
-          <a:ln/>
-        </p:spPr>
-        <p:txBody>
-          <a:bodyPr wrap="square" lIns="25400" tIns="25400" rIns="25400" bIns="25400" rtlCol="0" anchor="t">
-            <a:normAutofit/>
-          </a:bodyPr>
-          <a:lstStyle/>
-          <a:p>
-            <a:pPr algn="l" indent="0" marL="0">
-              <a:lnSpc>
-                <a:spcPct val="101379"/>
+            <a:off x="2573982" y="7169497"/>
+            <a:ext cx="4121177" cy="318120"/>
+          </a:xfrm>
+          <a:prstGeom prst="rect">
+            <a:avLst/>
+          </a:prstGeom>
+          <a:noFill/>
+          <a:ln/>
+        </p:spPr>
+        <p:txBody>
+          <a:bodyPr wrap="square" lIns="25400" tIns="25400" rIns="25400" bIns="25400" rtlCol="0" anchor="t">
+            <a:normAutofit/>
+          </a:bodyPr>
+          <a:lstStyle/>
+          <a:p>
+            <a:pPr algn="l" indent="0" marL="0">
+              <a:lnSpc>
+                <a:spcPct val="122500"/>
               </a:lnSpc>
               <a:buNone/>
             </a:pPr>
@@ -5186,9 +6892,9 @@
                 <a:solidFill>
                   <a:srgbClr val="00334F"/>
                 </a:solidFill>
-                <a:latin typeface="Manrope" pitchFamily="34" charset="0"/>
-                <a:ea typeface="Manrope" pitchFamily="34" charset="-122"/>
-                <a:cs typeface="Manrope" pitchFamily="34" charset="-120"/>
+                <a:latin typeface="Arial" pitchFamily="34" charset="0"/>
+                <a:ea typeface="Arial" pitchFamily="34" charset="-122"/>
+                <a:cs typeface="Arial" pitchFamily="34" charset="-120"/>
               </a:rPr>
               <a:t>drive the contractor flow, confirm the prefill</a:t>
             </a:r>
@@ -5204,24 +6910,24 @@
         </p:nvSpPr>
         <p:spPr>
           <a:xfrm>
-            <a:off x="1000125" y="8071024"/>
-            <a:ext cx="8612505" cy="298103"/>
-          </a:xfrm>
-          <a:prstGeom prst="rect">
-            <a:avLst/>
-          </a:prstGeom>
-          <a:noFill/>
-          <a:ln/>
-        </p:spPr>
-        <p:txBody>
-          <a:bodyPr wrap="square" lIns="25400" tIns="25400" rIns="25400" bIns="25400" rtlCol="0" anchor="t">
-            <a:normAutofit/>
-          </a:bodyPr>
-          <a:lstStyle/>
-          <a:p>
-            <a:pPr algn="l" indent="0" marL="0">
-              <a:lnSpc>
-                <a:spcPct val="94138"/>
+            <a:off x="1000125" y="7573342"/>
+            <a:ext cx="8612505" cy="294084"/>
+          </a:xfrm>
+          <a:prstGeom prst="rect">
+            <a:avLst/>
+          </a:prstGeom>
+          <a:noFill/>
+          <a:ln/>
+        </p:spPr>
+        <p:txBody>
+          <a:bodyPr wrap="square" lIns="25400" tIns="25400" rIns="25400" bIns="25400" rtlCol="0" anchor="t">
+            <a:normAutofit/>
+          </a:bodyPr>
+          <a:lstStyle/>
+          <a:p>
+            <a:pPr algn="l" indent="0" marL="0">
+              <a:lnSpc>
+                <a:spcPct val="112000"/>
               </a:lnSpc>
               <a:buNone/>
             </a:pPr>
@@ -5230,11 +6936,11 @@
                 <a:solidFill>
                   <a:srgbClr val="00334F"/>
                 </a:solidFill>
-                <a:latin typeface="Manrope" pitchFamily="34" charset="0"/>
-                <a:ea typeface="Manrope" pitchFamily="34" charset="-122"/>
-                <a:cs typeface="Manrope" pitchFamily="34" charset="-120"/>
-              </a:rPr>
-              <a:t>Name the tool in the prompt. Report result, evidence, and rollback before commit.</a:t>
+                <a:latin typeface="Arial" pitchFamily="34" charset="0"/>
+                <a:ea typeface="Arial" pitchFamily="34" charset="-122"/>
+                <a:cs typeface="Arial" pitchFamily="34" charset="-120"/>
+              </a:rPr>
+              <a:t>Name the tool. Report result, evidence, and rollback before commit.</a:t>
             </a:r>
             <a:endParaRPr lang="en-US" sz="1575" dirty="0"/>
           </a:p>
@@ -5248,12 +6954,12 @@
         </p:nvSpPr>
         <p:spPr>
           <a:xfrm>
-            <a:off x="9220200" y="5220221"/>
-            <a:ext cx="8305800" cy="3361804"/>
+            <a:off x="9220200" y="5079727"/>
+            <a:ext cx="8305800" cy="3268935"/>
           </a:xfrm>
           <a:prstGeom prst="roundRect">
             <a:avLst>
-              <a:gd name="adj" fmla="val 5100"/>
+              <a:gd name="adj" fmla="val 5245"/>
             </a:avLst>
           </a:prstGeom>
           <a:solidFill>
@@ -5275,8 +6981,8 @@
         </p:nvSpPr>
         <p:spPr>
           <a:xfrm>
-            <a:off x="9458325" y="5401196"/>
-            <a:ext cx="252040" cy="376238"/>
+            <a:off x="9458325" y="5260702"/>
+            <a:ext cx="255091" cy="323850"/>
           </a:xfrm>
           <a:prstGeom prst="rect">
             <a:avLst/>
@@ -5298,9 +7004,9 @@
                 <a:solidFill>
                   <a:srgbClr val="C2410C"/>
                 </a:solidFill>
-                <a:latin typeface="Manrope" pitchFamily="34" charset="0"/>
-                <a:ea typeface="Manrope" pitchFamily="34" charset="-122"/>
-                <a:cs typeface="Manrope" pitchFamily="34" charset="-120"/>
+                <a:latin typeface="Arial" pitchFamily="34" charset="0"/>
+                <a:ea typeface="Arial" pitchFamily="34" charset="-122"/>
+                <a:cs typeface="Arial" pitchFamily="34" charset="-120"/>
               </a:rPr>
               <a:t>D</a:t>
             </a:r>
@@ -5316,8 +7022,8 @@
         </p:nvSpPr>
         <p:spPr>
           <a:xfrm>
-            <a:off x="9748465" y="5439296"/>
-            <a:ext cx="5320114" cy="323850"/>
+            <a:off x="9751516" y="5298802"/>
+            <a:ext cx="5521397" cy="276225"/>
           </a:xfrm>
           <a:prstGeom prst="rect">
             <a:avLst/>
@@ -5339,9 +7045,9 @@
                 <a:solidFill>
                   <a:srgbClr val="006C9F"/>
                 </a:solidFill>
-                <a:latin typeface="Manrope" pitchFamily="34" charset="0"/>
-                <a:ea typeface="Manrope" pitchFamily="34" charset="-122"/>
-                <a:cs typeface="Manrope" pitchFamily="34" charset="-120"/>
+                <a:latin typeface="Arial" pitchFamily="34" charset="0"/>
+                <a:ea typeface="Arial" pitchFamily="34" charset="-122"/>
+                <a:cs typeface="Arial" pitchFamily="34" charset="-120"/>
               </a:rPr>
               <a:t>CUSTOM SNIPPETS — ADD PER TASK TYPE</a:t>
             </a:r>
@@ -5357,7 +7063,7 @@
         </p:nvSpPr>
         <p:spPr>
           <a:xfrm>
-            <a:off x="9458325" y="5815533"/>
+            <a:off x="9458325" y="5622652"/>
             <a:ext cx="8064437" cy="558105"/>
           </a:xfrm>
           <a:prstGeom prst="rect">
@@ -5374,7 +7080,7 @@
           <a:p>
             <a:pPr algn="l" indent="0" marL="0">
               <a:lnSpc>
-                <a:spcPct val="94138"/>
+                <a:spcPct val="113750"/>
               </a:lnSpc>
               <a:buNone/>
             </a:pPr>
@@ -5383,15 +7089,15 @@
                 <a:solidFill>
                   <a:srgbClr val="00334F"/>
                 </a:solidFill>
-                <a:latin typeface="Manrope" pitchFamily="34" charset="0"/>
-                <a:ea typeface="Manrope" pitchFamily="34" charset="-122"/>
-                <a:cs typeface="Manrope" pitchFamily="34" charset="-120"/>
+                <a:latin typeface="Arial" pitchFamily="34" charset="0"/>
+                <a:ea typeface="Arial" pitchFamily="34" charset="-122"/>
+                <a:cs typeface="Arial" pitchFamily="34" charset="-120"/>
               </a:rPr>
               <a:t>Metric change: </a:t>
             </a:r>
             <a:pPr algn="l" indent="0" marL="0">
               <a:lnSpc>
-                <a:spcPct val="94138"/>
+                <a:spcPct val="113750"/>
               </a:lnSpc>
               <a:buNone/>
             </a:pPr>
@@ -5400,9 +7106,9 @@
                 <a:solidFill>
                   <a:srgbClr val="00334F"/>
                 </a:solidFill>
-                <a:latin typeface="Manrope" pitchFamily="34" charset="0"/>
-                <a:ea typeface="Manrope" pitchFamily="34" charset="-122"/>
-                <a:cs typeface="Manrope" pitchFamily="34" charset="-120"/>
+                <a:latin typeface="Arial" pitchFamily="34" charset="0"/>
+                <a:ea typeface="Arial" pitchFamily="34" charset="-122"/>
+                <a:cs typeface="Arial" pitchFamily="34" charset="-120"/>
               </a:rPr>
               <a:t>update the metrics doc and its test in the same change; show before and after for the latest period.</a:t>
             </a:r>
@@ -5418,7 +7124,7 @@
         </p:nvSpPr>
         <p:spPr>
           <a:xfrm>
-            <a:off x="9458325" y="6392689"/>
+            <a:off x="9458325" y="6199808"/>
             <a:ext cx="8612505" cy="298103"/>
           </a:xfrm>
           <a:prstGeom prst="rect">
@@ -5435,7 +7141,7 @@
           <a:p>
             <a:pPr algn="l" indent="0" marL="0">
               <a:lnSpc>
-                <a:spcPct val="94138"/>
+                <a:spcPct val="113750"/>
               </a:lnSpc>
               <a:buNone/>
             </a:pPr>
@@ -5444,15 +7150,15 @@
                 <a:solidFill>
                   <a:srgbClr val="00334F"/>
                 </a:solidFill>
-                <a:latin typeface="Manrope" pitchFamily="34" charset="0"/>
-                <a:ea typeface="Manrope" pitchFamily="34" charset="-122"/>
-                <a:cs typeface="Manrope" pitchFamily="34" charset="-120"/>
+                <a:latin typeface="Arial" pitchFamily="34" charset="0"/>
+                <a:ea typeface="Arial" pitchFamily="34" charset="-122"/>
+                <a:cs typeface="Arial" pitchFamily="34" charset="-120"/>
               </a:rPr>
               <a:t>New page or restyle: </a:t>
             </a:r>
             <a:pPr algn="l" indent="0" marL="0">
               <a:lnSpc>
-                <a:spcPct val="94138"/>
+                <a:spcPct val="113750"/>
               </a:lnSpc>
               <a:buNone/>
             </a:pPr>
@@ -5461,9 +7167,9 @@
                 <a:solidFill>
                   <a:srgbClr val="00334F"/>
                 </a:solidFill>
-                <a:latin typeface="Manrope" pitchFamily="34" charset="0"/>
-                <a:ea typeface="Manrope" pitchFamily="34" charset="-122"/>
-                <a:cs typeface="Manrope" pitchFamily="34" charset="-120"/>
+                <a:latin typeface="Arial" pitchFamily="34" charset="0"/>
+                <a:ea typeface="Arial" pitchFamily="34" charset="-122"/>
+                <a:cs typeface="Arial" pitchFamily="34" charset="-120"/>
               </a:rPr>
               <a:t>use the design system rules; no framework, no build step.</a:t>
             </a:r>
@@ -5479,7 +7185,7 @@
         </p:nvSpPr>
         <p:spPr>
           <a:xfrm>
-            <a:off x="9458325" y="6709842"/>
+            <a:off x="9458325" y="6516960"/>
             <a:ext cx="8064437" cy="558105"/>
           </a:xfrm>
           <a:prstGeom prst="rect">
@@ -5496,7 +7202,7 @@
           <a:p>
             <a:pPr algn="l" indent="0" marL="0">
               <a:lnSpc>
-                <a:spcPct val="94138"/>
+                <a:spcPct val="113750"/>
               </a:lnSpc>
               <a:buNone/>
             </a:pPr>
@@ -5505,15 +7211,15 @@
                 <a:solidFill>
                   <a:srgbClr val="00334F"/>
                 </a:solidFill>
-                <a:latin typeface="Manrope" pitchFamily="34" charset="0"/>
-                <a:ea typeface="Manrope" pitchFamily="34" charset="-122"/>
-                <a:cs typeface="Manrope" pitchFamily="34" charset="-120"/>
+                <a:latin typeface="Arial" pitchFamily="34" charset="0"/>
+                <a:ea typeface="Arial" pitchFamily="34" charset="-122"/>
+                <a:cs typeface="Arial" pitchFamily="34" charset="-120"/>
               </a:rPr>
               <a:t>Endpoint or field mapping: </a:t>
             </a:r>
             <a:pPr algn="l" indent="0" marL="0">
               <a:lnSpc>
-                <a:spcPct val="94138"/>
+                <a:spcPct val="113750"/>
               </a:lnSpc>
               <a:buNone/>
             </a:pPr>
@@ -5522,9 +7228,9 @@
                 <a:solidFill>
                   <a:srgbClr val="00334F"/>
                 </a:solidFill>
-                <a:latin typeface="Manrope" pitchFamily="34" charset="0"/>
-                <a:ea typeface="Manrope" pitchFamily="34" charset="-122"/>
-                <a:cs typeface="Manrope" pitchFamily="34" charset="-120"/>
+                <a:latin typeface="Arial" pitchFamily="34" charset="0"/>
+                <a:ea typeface="Arial" pitchFamily="34" charset="-122"/>
+                <a:cs typeface="Arial" pitchFamily="34" charset="-120"/>
               </a:rPr>
               <a:t>change only the adapter files; keep normalized property names stable.</a:t>
             </a:r>
@@ -5540,7 +7246,7 @@
         </p:nvSpPr>
         <p:spPr>
           <a:xfrm>
-            <a:off x="9458325" y="7286997"/>
+            <a:off x="9458325" y="7094116"/>
             <a:ext cx="8612505" cy="298103"/>
           </a:xfrm>
           <a:prstGeom prst="rect">
@@ -5557,7 +7263,7 @@
           <a:p>
             <a:pPr algn="l" indent="0" marL="0">
               <a:lnSpc>
-                <a:spcPct val="94138"/>
+                <a:spcPct val="113750"/>
               </a:lnSpc>
               <a:buNone/>
             </a:pPr>
@@ -5566,15 +7272,15 @@
                 <a:solidFill>
                   <a:srgbClr val="00334F"/>
                 </a:solidFill>
-                <a:latin typeface="Manrope" pitchFamily="34" charset="0"/>
-                <a:ea typeface="Manrope" pitchFamily="34" charset="-122"/>
-                <a:cs typeface="Manrope" pitchFamily="34" charset="-120"/>
+                <a:latin typeface="Arial" pitchFamily="34" charset="0"/>
+                <a:ea typeface="Arial" pitchFamily="34" charset="-122"/>
+                <a:cs typeface="Arial" pitchFamily="34" charset="-120"/>
               </a:rPr>
               <a:t>Shared adapter: </a:t>
             </a:r>
             <a:pPr algn="l" indent="0" marL="0">
               <a:lnSpc>
-                <a:spcPct val="94138"/>
+                <a:spcPct val="113750"/>
               </a:lnSpc>
               <a:buNone/>
             </a:pPr>
@@ -5583,15 +7289,15 @@
                 <a:solidFill>
                   <a:srgbClr val="00334F"/>
                 </a:solidFill>
-                <a:latin typeface="Manrope" pitchFamily="34" charset="0"/>
-                <a:ea typeface="Manrope" pitchFamily="34" charset="-122"/>
-                <a:cs typeface="Manrope" pitchFamily="34" charset="-120"/>
+                <a:latin typeface="Arial" pitchFamily="34" charset="0"/>
+                <a:ea typeface="Arial" pitchFamily="34" charset="-122"/>
+                <a:cs typeface="Arial" pitchFamily="34" charset="-120"/>
               </a:rPr>
               <a:t>move every importer's </a:t>
             </a:r>
             <a:pPr algn="l" indent="0" marL="0">
               <a:lnSpc>
-                <a:spcPct val="94138"/>
+                <a:spcPct val="113750"/>
               </a:lnSpc>
               <a:buNone/>
             </a:pPr>
@@ -5600,15 +7306,15 @@
                 <a:solidFill>
                   <a:srgbClr val="00334F"/>
                 </a:solidFill>
-                <a:latin typeface="Manrope" pitchFamily="34" charset="0"/>
-                <a:ea typeface="Manrope" pitchFamily="34" charset="-122"/>
-                <a:cs typeface="Manrope" pitchFamily="34" charset="-120"/>
+                <a:latin typeface="Arial" pitchFamily="34" charset="0"/>
+                <a:ea typeface="Arial" pitchFamily="34" charset="-122"/>
+                <a:cs typeface="Arial" pitchFamily="34" charset="-120"/>
               </a:rPr>
               <a:t>?v= </a:t>
             </a:r>
             <a:pPr algn="l" indent="0" marL="0">
               <a:lnSpc>
-                <a:spcPct val="94138"/>
+                <a:spcPct val="113750"/>
               </a:lnSpc>
               <a:buNone/>
             </a:pPr>
@@ -5617,9 +7323,9 @@
                 <a:solidFill>
                   <a:srgbClr val="00334F"/>
                 </a:solidFill>
-                <a:latin typeface="Manrope" pitchFamily="34" charset="0"/>
-                <a:ea typeface="Manrope" pitchFamily="34" charset="-122"/>
-                <a:cs typeface="Manrope" pitchFamily="34" charset="-120"/>
+                <a:latin typeface="Arial" pitchFamily="34" charset="0"/>
+                <a:ea typeface="Arial" pitchFamily="34" charset="-122"/>
+                <a:cs typeface="Arial" pitchFamily="34" charset="-120"/>
               </a:rPr>
               <a:t>version together.</a:t>
             </a:r>
@@ -5635,12 +7341,12 @@
         </p:nvSpPr>
         <p:spPr>
           <a:xfrm>
-            <a:off x="762000" y="8791575"/>
-            <a:ext cx="16764000" cy="904875"/>
+            <a:off x="762000" y="8558213"/>
+            <a:ext cx="16764000" cy="1138238"/>
           </a:xfrm>
           <a:prstGeom prst="roundRect">
             <a:avLst>
-              <a:gd name="adj" fmla="val 16842"/>
+              <a:gd name="adj" fmla="val 13389"/>
             </a:avLst>
           </a:prstGeom>
           <a:solidFill>
@@ -5657,8 +7363,8 @@
         </p:nvSpPr>
         <p:spPr>
           <a:xfrm>
-            <a:off x="1028700" y="9113044"/>
-            <a:ext cx="2619211" cy="300038"/>
+            <a:off x="1009650" y="8691563"/>
+            <a:ext cx="17895570" cy="252413"/>
           </a:xfrm>
           <a:prstGeom prst="rect">
             <a:avLst/>
@@ -5680,11 +7386,11 @@
                 <a:solidFill>
                   <a:srgbClr val="9FE0F6"/>
                 </a:solidFill>
-                <a:latin typeface="Manrope" pitchFamily="34" charset="0"/>
-                <a:ea typeface="Manrope" pitchFamily="34" charset="-122"/>
-                <a:cs typeface="Manrope" pitchFamily="34" charset="-120"/>
-              </a:rPr>
-              <a:t>FOUR FAILURE MODES</a:t>
+                <a:latin typeface="Arial" pitchFamily="34" charset="0"/>
+                <a:ea typeface="Arial" pitchFamily="34" charset="-122"/>
+                <a:cs typeface="Arial" pitchFamily="34" charset="-120"/>
+              </a:rPr>
+              <a:t>SIX FAILURE MODES</a:t>
             </a:r>
             <a:endParaRPr lang="en-US" sz="1500" dirty="0"/>
           </a:p>
@@ -5698,36 +7404,39 @@
         </p:nvSpPr>
         <p:spPr>
           <a:xfrm>
-            <a:off x="3733651" y="8943975"/>
-            <a:ext cx="1709365" cy="638175"/>
-          </a:xfrm>
-          <a:prstGeom prst="rect">
-            <a:avLst/>
-          </a:prstGeom>
-          <a:noFill/>
-          <a:ln/>
-        </p:spPr>
-        <p:txBody>
-          <a:bodyPr wrap="square" lIns="25400" tIns="25400" rIns="25400" bIns="25400" rtlCol="0" anchor="t">
-            <a:normAutofit/>
-          </a:bodyPr>
-          <a:lstStyle/>
-          <a:p>
-            <a:pPr algn="l" indent="0" marL="0">
-              <a:buNone/>
-            </a:pPr>
-            <a:r>
-              <a:rPr lang="en-US" sz="1725" b="1" dirty="0">
+            <a:off x="1009650" y="8982075"/>
+            <a:ext cx="5769583" cy="300038"/>
+          </a:xfrm>
+          <a:prstGeom prst="rect">
+            <a:avLst/>
+          </a:prstGeom>
+          <a:noFill/>
+          <a:ln/>
+        </p:spPr>
+        <p:txBody>
+          <a:bodyPr wrap="square" lIns="25400" tIns="25400" rIns="25400" bIns="25400" rtlCol="0" anchor="t">
+            <a:normAutofit/>
+          </a:bodyPr>
+          <a:lstStyle/>
+          <a:p>
+            <a:pPr algn="l" indent="0" marL="0">
+              <a:lnSpc>
+                <a:spcPct val="110000"/>
+              </a:lnSpc>
+              <a:buNone/>
+            </a:pPr>
+            <a:r>
+              <a:rPr lang="en-US" sz="1650" b="1" dirty="0">
                 <a:solidFill>
                   <a:srgbClr val="DFF1FA"/>
                 </a:solidFill>
-                <a:latin typeface="Manrope" pitchFamily="34" charset="0"/>
-                <a:ea typeface="Manrope" pitchFamily="34" charset="-122"/>
-                <a:cs typeface="Manrope" pitchFamily="34" charset="-120"/>
+                <a:latin typeface="Arial" pitchFamily="34" charset="0"/>
+                <a:ea typeface="Arial" pitchFamily="34" charset="-122"/>
+                <a:cs typeface="Arial" pitchFamily="34" charset="-120"/>
               </a:rPr>
               <a:t>Denominator drift</a:t>
             </a:r>
-            <a:endParaRPr lang="en-US" sz="1725" dirty="0"/>
+            <a:endParaRPr lang="en-US" sz="1650" dirty="0"/>
           </a:p>
         </p:txBody>
       </p:sp>
@@ -5739,36 +7448,39 @@
         </p:nvSpPr>
         <p:spPr>
           <a:xfrm>
-            <a:off x="5690667" y="9093994"/>
-            <a:ext cx="131713" cy="338138"/>
-          </a:xfrm>
-          <a:prstGeom prst="rect">
-            <a:avLst/>
-          </a:prstGeom>
-          <a:noFill/>
-          <a:ln/>
-        </p:spPr>
-        <p:txBody>
-          <a:bodyPr wrap="square" lIns="25400" tIns="25400" rIns="25400" bIns="25400" rtlCol="0" anchor="t">
-            <a:normAutofit/>
-          </a:bodyPr>
-          <a:lstStyle/>
-          <a:p>
-            <a:pPr algn="l" indent="0" marL="0">
-              <a:buNone/>
-            </a:pPr>
-            <a:r>
-              <a:rPr lang="en-US" sz="1725" b="1" dirty="0">
+            <a:off x="6521425" y="8982075"/>
+            <a:ext cx="5769583" cy="300038"/>
+          </a:xfrm>
+          <a:prstGeom prst="rect">
+            <a:avLst/>
+          </a:prstGeom>
+          <a:noFill/>
+          <a:ln/>
+        </p:spPr>
+        <p:txBody>
+          <a:bodyPr wrap="square" lIns="25400" tIns="25400" rIns="25400" bIns="25400" rtlCol="0" anchor="t">
+            <a:normAutofit/>
+          </a:bodyPr>
+          <a:lstStyle/>
+          <a:p>
+            <a:pPr algn="l" indent="0" marL="0">
+              <a:lnSpc>
+                <a:spcPct val="110000"/>
+              </a:lnSpc>
+              <a:buNone/>
+            </a:pPr>
+            <a:r>
+              <a:rPr lang="en-US" sz="1650" b="1" dirty="0">
                 <a:solidFill>
                   <a:srgbClr val="DFF1FA"/>
                 </a:solidFill>
-                <a:latin typeface="Manrope" pitchFamily="34" charset="0"/>
-                <a:ea typeface="Manrope" pitchFamily="34" charset="-122"/>
-                <a:cs typeface="Manrope" pitchFamily="34" charset="-120"/>
-              </a:rPr>
-              <a:t>·</a:t>
-            </a:r>
-            <a:endParaRPr lang="en-US" sz="1725" dirty="0"/>
+                <a:latin typeface="Arial" pitchFamily="34" charset="0"/>
+                <a:ea typeface="Arial" pitchFamily="34" charset="-122"/>
+                <a:cs typeface="Arial" pitchFamily="34" charset="-120"/>
+              </a:rPr>
+              <a:t>Stale cache-busting versions</a:t>
+            </a:r>
+            <a:endParaRPr lang="en-US" sz="1650" dirty="0"/>
           </a:p>
         </p:txBody>
       </p:sp>
@@ -5780,36 +7492,39 @@
         </p:nvSpPr>
         <p:spPr>
           <a:xfrm>
-            <a:off x="6070029" y="8943975"/>
-            <a:ext cx="2769314" cy="638175"/>
-          </a:xfrm>
-          <a:prstGeom prst="rect">
-            <a:avLst/>
-          </a:prstGeom>
-          <a:noFill/>
-          <a:ln/>
-        </p:spPr>
-        <p:txBody>
-          <a:bodyPr wrap="square" lIns="25400" tIns="25400" rIns="25400" bIns="25400" rtlCol="0" anchor="t">
-            <a:normAutofit/>
-          </a:bodyPr>
-          <a:lstStyle/>
-          <a:p>
-            <a:pPr algn="l" indent="0" marL="0">
-              <a:buNone/>
-            </a:pPr>
-            <a:r>
-              <a:rPr lang="en-US" sz="1725" b="1" dirty="0">
+            <a:off x="12033200" y="8982075"/>
+            <a:ext cx="5769665" cy="300038"/>
+          </a:xfrm>
+          <a:prstGeom prst="rect">
+            <a:avLst/>
+          </a:prstGeom>
+          <a:noFill/>
+          <a:ln/>
+        </p:spPr>
+        <p:txBody>
+          <a:bodyPr wrap="square" lIns="25400" tIns="25400" rIns="25400" bIns="25400" rtlCol="0" anchor="t">
+            <a:normAutofit/>
+          </a:bodyPr>
+          <a:lstStyle/>
+          <a:p>
+            <a:pPr algn="l" indent="0" marL="0">
+              <a:lnSpc>
+                <a:spcPct val="110000"/>
+              </a:lnSpc>
+              <a:buNone/>
+            </a:pPr>
+            <a:r>
+              <a:rPr lang="en-US" sz="1650" b="1" dirty="0">
                 <a:solidFill>
                   <a:srgbClr val="DFF1FA"/>
                 </a:solidFill>
-                <a:latin typeface="Manrope" pitchFamily="34" charset="0"/>
-                <a:ea typeface="Manrope" pitchFamily="34" charset="-122"/>
-                <a:cs typeface="Manrope" pitchFamily="34" charset="-120"/>
-              </a:rPr>
-              <a:t>Stale cache-busting versions</a:t>
-            </a:r>
-            <a:endParaRPr lang="en-US" sz="1725" dirty="0"/>
+                <a:latin typeface="Arial" pitchFamily="34" charset="0"/>
+                <a:ea typeface="Arial" pitchFamily="34" charset="-122"/>
+                <a:cs typeface="Arial" pitchFamily="34" charset="-120"/>
+              </a:rPr>
+              <a:t>Hardcoded endpoints outside the adapters</a:t>
+            </a:r>
+            <a:endParaRPr lang="en-US" sz="1650" dirty="0"/>
           </a:p>
         </p:txBody>
       </p:sp>
@@ -5821,36 +7536,39 @@
         </p:nvSpPr>
         <p:spPr>
           <a:xfrm>
-            <a:off x="9082534" y="9093994"/>
-            <a:ext cx="131713" cy="338138"/>
-          </a:xfrm>
-          <a:prstGeom prst="rect">
-            <a:avLst/>
-          </a:prstGeom>
-          <a:noFill/>
-          <a:ln/>
-        </p:spPr>
-        <p:txBody>
-          <a:bodyPr wrap="square" lIns="25400" tIns="25400" rIns="25400" bIns="25400" rtlCol="0" anchor="t">
-            <a:normAutofit/>
-          </a:bodyPr>
-          <a:lstStyle/>
-          <a:p>
-            <a:pPr algn="l" indent="0" marL="0">
-              <a:buNone/>
-            </a:pPr>
-            <a:r>
-              <a:rPr lang="en-US" sz="1725" b="1" dirty="0">
+            <a:off x="1009650" y="9301163"/>
+            <a:ext cx="5769583" cy="300038"/>
+          </a:xfrm>
+          <a:prstGeom prst="rect">
+            <a:avLst/>
+          </a:prstGeom>
+          <a:noFill/>
+          <a:ln/>
+        </p:spPr>
+        <p:txBody>
+          <a:bodyPr wrap="square" lIns="25400" tIns="25400" rIns="25400" bIns="25400" rtlCol="0" anchor="t">
+            <a:normAutofit/>
+          </a:bodyPr>
+          <a:lstStyle/>
+          <a:p>
+            <a:pPr algn="l" indent="0" marL="0">
+              <a:lnSpc>
+                <a:spcPct val="110000"/>
+              </a:lnSpc>
+              <a:buNone/>
+            </a:pPr>
+            <a:r>
+              <a:rPr lang="en-US" sz="1650" b="1" dirty="0">
                 <a:solidFill>
                   <a:srgbClr val="DFF1FA"/>
                 </a:solidFill>
-                <a:latin typeface="Manrope" pitchFamily="34" charset="0"/>
-                <a:ea typeface="Manrope" pitchFamily="34" charset="-122"/>
-                <a:cs typeface="Manrope" pitchFamily="34" charset="-120"/>
-              </a:rPr>
-              <a:t>·</a:t>
-            </a:r>
-            <a:endParaRPr lang="en-US" sz="1725" dirty="0"/>
+                <a:latin typeface="Arial" pitchFamily="34" charset="0"/>
+                <a:ea typeface="Arial" pitchFamily="34" charset="-122"/>
+                <a:cs typeface="Arial" pitchFamily="34" charset="-120"/>
+              </a:rPr>
+              <a:t>Hand-editing docs/landcare/data/</a:t>
+            </a:r>
+            <a:endParaRPr lang="en-US" sz="1650" dirty="0"/>
           </a:p>
         </p:txBody>
       </p:sp>
@@ -5862,36 +7580,39 @@
         </p:nvSpPr>
         <p:spPr>
           <a:xfrm>
-            <a:off x="9461897" y="8943975"/>
-            <a:ext cx="4059428" cy="638175"/>
-          </a:xfrm>
-          <a:prstGeom prst="rect">
-            <a:avLst/>
-          </a:prstGeom>
-          <a:noFill/>
-          <a:ln/>
-        </p:spPr>
-        <p:txBody>
-          <a:bodyPr wrap="square" lIns="25400" tIns="25400" rIns="25400" bIns="25400" rtlCol="0" anchor="t">
-            <a:normAutofit/>
-          </a:bodyPr>
-          <a:lstStyle/>
-          <a:p>
-            <a:pPr algn="l" indent="0" marL="0">
-              <a:buNone/>
-            </a:pPr>
-            <a:r>
-              <a:rPr lang="en-US" sz="1725" b="1" dirty="0">
+            <a:off x="6521425" y="9301163"/>
+            <a:ext cx="5769583" cy="300038"/>
+          </a:xfrm>
+          <a:prstGeom prst="rect">
+            <a:avLst/>
+          </a:prstGeom>
+          <a:noFill/>
+          <a:ln/>
+        </p:spPr>
+        <p:txBody>
+          <a:bodyPr wrap="square" lIns="25400" tIns="25400" rIns="25400" bIns="25400" rtlCol="0" anchor="t">
+            <a:normAutofit/>
+          </a:bodyPr>
+          <a:lstStyle/>
+          <a:p>
+            <a:pPr algn="l" indent="0" marL="0">
+              <a:lnSpc>
+                <a:spcPct val="110000"/>
+              </a:lnSpc>
+              <a:buNone/>
+            </a:pPr>
+            <a:r>
+              <a:rPr lang="en-US" sz="1650" b="1" dirty="0">
                 <a:solidFill>
                   <a:srgbClr val="DFF1FA"/>
                 </a:solidFill>
-                <a:latin typeface="Manrope" pitchFamily="34" charset="0"/>
-                <a:ea typeface="Manrope" pitchFamily="34" charset="-122"/>
-                <a:cs typeface="Manrope" pitchFamily="34" charset="-120"/>
-              </a:rPr>
-              <a:t>Hardcoded endpoints outside the adapters</a:t>
-            </a:r>
-            <a:endParaRPr lang="en-US" sz="1725" dirty="0"/>
+                <a:latin typeface="Arial" pitchFamily="34" charset="0"/>
+                <a:ea typeface="Arial" pitchFamily="34" charset="-122"/>
+                <a:cs typeface="Arial" pitchFamily="34" charset="-120"/>
+              </a:rPr>
+              <a:t>Guessing a NetSuite vendor alias</a:t>
+            </a:r>
+            <a:endParaRPr lang="en-US" sz="1650" dirty="0"/>
           </a:p>
         </p:txBody>
       </p:sp>
@@ -5903,77 +7624,39 @@
         </p:nvSpPr>
         <p:spPr>
           <a:xfrm>
-            <a:off x="13726939" y="9093994"/>
-            <a:ext cx="131713" cy="338138"/>
-          </a:xfrm>
-          <a:prstGeom prst="rect">
-            <a:avLst/>
-          </a:prstGeom>
-          <a:noFill/>
-          <a:ln/>
-        </p:spPr>
-        <p:txBody>
-          <a:bodyPr wrap="square" lIns="25400" tIns="25400" rIns="25400" bIns="25400" rtlCol="0" anchor="t">
-            <a:normAutofit/>
-          </a:bodyPr>
-          <a:lstStyle/>
-          <a:p>
-            <a:pPr algn="l" indent="0" marL="0">
-              <a:buNone/>
-            </a:pPr>
-            <a:r>
-              <a:rPr lang="en-US" sz="1725" b="1" dirty="0">
+            <a:off x="12033200" y="9301163"/>
+            <a:ext cx="5769665" cy="300038"/>
+          </a:xfrm>
+          <a:prstGeom prst="rect">
+            <a:avLst/>
+          </a:prstGeom>
+          <a:noFill/>
+          <a:ln/>
+        </p:spPr>
+        <p:txBody>
+          <a:bodyPr wrap="square" lIns="25400" tIns="25400" rIns="25400" bIns="25400" rtlCol="0" anchor="t">
+            <a:normAutofit/>
+          </a:bodyPr>
+          <a:lstStyle/>
+          <a:p>
+            <a:pPr algn="l" indent="0" marL="0">
+              <a:lnSpc>
+                <a:spcPct val="110000"/>
+              </a:lnSpc>
+              <a:buNone/>
+            </a:pPr>
+            <a:r>
+              <a:rPr lang="en-US" sz="1650" b="1" dirty="0">
                 <a:solidFill>
                   <a:srgbClr val="DFF1FA"/>
                 </a:solidFill>
-                <a:latin typeface="Manrope" pitchFamily="34" charset="0"/>
-                <a:ea typeface="Manrope" pitchFamily="34" charset="-122"/>
-                <a:cs typeface="Manrope" pitchFamily="34" charset="-120"/>
-              </a:rPr>
-              <a:t>·</a:t>
-            </a:r>
-            <a:endParaRPr lang="en-US" sz="1725" dirty="0"/>
-          </a:p>
-        </p:txBody>
-      </p:sp>
-      <p:sp>
-        <p:nvSpPr>
-          <p:cNvPr id="44" name="Text 42"/>
-          <p:cNvSpPr/>
-          <p:nvPr/>
-        </p:nvSpPr>
-        <p:spPr>
-          <a:xfrm>
-            <a:off x="14106302" y="8943975"/>
-            <a:ext cx="3247588" cy="638175"/>
-          </a:xfrm>
-          <a:prstGeom prst="rect">
-            <a:avLst/>
-          </a:prstGeom>
-          <a:noFill/>
-          <a:ln/>
-        </p:spPr>
-        <p:txBody>
-          <a:bodyPr wrap="square" lIns="25400" tIns="25400" rIns="25400" bIns="25400" rtlCol="0" anchor="t">
-            <a:normAutofit/>
-          </a:bodyPr>
-          <a:lstStyle/>
-          <a:p>
-            <a:pPr algn="l" indent="0" marL="0">
-              <a:buNone/>
-            </a:pPr>
-            <a:r>
-              <a:rPr lang="en-US" sz="1725" b="1" dirty="0">
-                <a:solidFill>
-                  <a:srgbClr val="DFF1FA"/>
-                </a:solidFill>
-                <a:latin typeface="Manrope" pitchFamily="34" charset="0"/>
-                <a:ea typeface="Manrope" pitchFamily="34" charset="-122"/>
-                <a:cs typeface="Manrope" pitchFamily="34" charset="-120"/>
-              </a:rPr>
-              <a:t>Hand-editing docs/landcare/data/</a:t>
-            </a:r>
-            <a:endParaRPr lang="en-US" sz="1725" dirty="0"/>
+                <a:latin typeface="Arial" pitchFamily="34" charset="0"/>
+                <a:ea typeface="Arial" pitchFamily="34" charset="-122"/>
+                <a:cs typeface="Arial" pitchFamily="34" charset="-120"/>
+              </a:rPr>
+              <a:t>Calling the native finance cards Power BI-backed</a:t>
+            </a:r>
+            <a:endParaRPr lang="en-US" sz="1650" dirty="0"/>
           </a:p>
         </p:txBody>
       </p:sp>
@@ -5985,9 +7668,9 @@
 </p:sld>
 </file>
 
-<file path=ppt/slides/slide5.xml><?xml version="1.0" encoding="utf-8"?>
+<file path=ppt/slides/slide6.xml><?xml version="1.0" encoding="utf-8"?>
 <p:sld xmlns:a="http://schemas.openxmlformats.org/drawingml/2006/main" xmlns:r="http://schemas.openxmlformats.org/officeDocument/2006/relationships" xmlns:p="http://schemas.openxmlformats.org/presentationml/2006/main">
-  <p:cSld name="Slide 5">
+  <p:cSld name="Slide 6">
     <p:bg>
       <p:bgPr>
         <a:solidFill>
@@ -6018,7 +7701,7 @@
         <p:spPr>
           <a:xfrm>
             <a:off x="762000" y="590550"/>
-            <a:ext cx="10299055" cy="323850"/>
+            <a:ext cx="9513570" cy="276225"/>
           </a:xfrm>
           <a:prstGeom prst="rect">
             <a:avLst/>
@@ -6040,11 +7723,11 @@
                 <a:solidFill>
                   <a:srgbClr val="006C9F"/>
                 </a:solidFill>
-                <a:latin typeface="Manrope" pitchFamily="34" charset="0"/>
-                <a:ea typeface="Manrope" pitchFamily="34" charset="-122"/>
-                <a:cs typeface="Manrope" pitchFamily="34" charset="-120"/>
-              </a:rPr>
-              <a:t>04 · DESIGN SYSTEM USAGE</a:t>
+                <a:latin typeface="Arial" pitchFamily="34" charset="0"/>
+                <a:ea typeface="Arial" pitchFamily="34" charset="-122"/>
+                <a:cs typeface="Arial" pitchFamily="34" charset="-120"/>
+              </a:rPr>
+              <a:t>05 · DESIGN SYSTEM USAGE</a:t>
             </a:r>
             <a:endParaRPr lang="en-US" sz="1650" dirty="0"/>
           </a:p>
@@ -6058,24 +7741,24 @@
         </p:nvSpPr>
         <p:spPr>
           <a:xfrm>
-            <a:off x="762000" y="952500"/>
-            <a:ext cx="10299055" cy="582141"/>
-          </a:xfrm>
-          <a:prstGeom prst="rect">
-            <a:avLst/>
-          </a:prstGeom>
-          <a:noFill/>
-          <a:ln/>
-        </p:spPr>
-        <p:txBody>
-          <a:bodyPr wrap="square" lIns="25400" tIns="25400" rIns="25400" bIns="25400" rtlCol="0" anchor="t">
-            <a:normAutofit/>
-          </a:bodyPr>
-          <a:lstStyle/>
-          <a:p>
-            <a:pPr algn="l" indent="0" marL="0">
-              <a:lnSpc>
-                <a:spcPct val="74667"/>
+            <a:off x="762000" y="904875"/>
+            <a:ext cx="9513570" cy="582141"/>
+          </a:xfrm>
+          <a:prstGeom prst="rect">
+            <a:avLst/>
+          </a:prstGeom>
+          <a:noFill/>
+          <a:ln/>
+        </p:spPr>
+        <p:txBody>
+          <a:bodyPr wrap="square" lIns="25400" tIns="25400" rIns="25400" bIns="25400" rtlCol="0" anchor="t">
+            <a:normAutofit/>
+          </a:bodyPr>
+          <a:lstStyle/>
+          <a:p>
+            <a:pPr algn="l" indent="0" marL="0">
+              <a:lnSpc>
+                <a:spcPct val="88558"/>
               </a:lnSpc>
               <a:buNone/>
             </a:pPr>
@@ -6084,9 +7767,9 @@
                 <a:solidFill>
                   <a:srgbClr val="00334F"/>
                 </a:solidFill>
-                <a:latin typeface="Manrope" pitchFamily="34" charset="0"/>
-                <a:ea typeface="Manrope" pitchFamily="34" charset="-122"/>
-                <a:cs typeface="Manrope" pitchFamily="34" charset="-120"/>
+                <a:latin typeface="Arial" pitchFamily="34" charset="0"/>
+                <a:ea typeface="Arial" pitchFamily="34" charset="-122"/>
+                <a:cs typeface="Arial" pitchFamily="34" charset="-120"/>
               </a:rPr>
               <a:t>Reusable Style for future GIS Web App</a:t>
             </a:r>
@@ -6102,8 +7785,8 @@
         </p:nvSpPr>
         <p:spPr>
           <a:xfrm>
-            <a:off x="13778447" y="879351"/>
-            <a:ext cx="3747553" cy="655290"/>
+            <a:off x="14083653" y="831726"/>
+            <a:ext cx="3442347" cy="655290"/>
           </a:xfrm>
           <a:prstGeom prst="rect">
             <a:avLst/>
@@ -6119,7 +7802,7 @@
           <a:p>
             <a:pPr algn="r" indent="0" marL="0">
               <a:lnSpc>
-                <a:spcPct val="99692"/>
+                <a:spcPct val="117818"/>
               </a:lnSpc>
               <a:buNone/>
             </a:pPr>
@@ -6128,9 +7811,9 @@
                 <a:solidFill>
                   <a:srgbClr val="5B7386"/>
                 </a:solidFill>
-                <a:latin typeface="Manrope" pitchFamily="34" charset="0"/>
-                <a:ea typeface="Manrope" pitchFamily="34" charset="-122"/>
-                <a:cs typeface="Manrope" pitchFamily="34" charset="-120"/>
+                <a:latin typeface="Arial" pitchFamily="34" charset="0"/>
+                <a:ea typeface="Arial" pitchFamily="34" charset="-122"/>
+                <a:cs typeface="Arial" pitchFamily="34" charset="-120"/>
               </a:rPr>
               <a:t>Manrope only · four hues plus ink, muted, and line neutrals</a:t>
             </a:r>
@@ -6146,12 +7829,12 @@
         </p:nvSpPr>
         <p:spPr>
           <a:xfrm>
-            <a:off x="762000" y="1706091"/>
-            <a:ext cx="8970913" cy="7331348"/>
+            <a:off x="762000" y="1658466"/>
+            <a:ext cx="8970913" cy="7378973"/>
           </a:xfrm>
           <a:prstGeom prst="roundRect">
             <a:avLst>
-              <a:gd name="adj" fmla="val 2339"/>
+              <a:gd name="adj" fmla="val 2323"/>
             </a:avLst>
           </a:prstGeom>
           <a:solidFill>
@@ -6175,13 +7858,13 @@
         </p:nvPicPr>
         <p:blipFill>
           <a:blip r:embed="rId1"/>
-          <a:srcRect l="0" r="0" t="0" b="-37025"/>
+          <a:srcRect l="0" r="0" t="0" b="-37917"/>
           <a:stretch/>
         </p:blipFill>
         <p:spPr>
           <a:xfrm>
-            <a:off x="771525" y="1715616"/>
-            <a:ext cx="8951863" cy="7312298"/>
+            <a:off x="771525" y="1667991"/>
+            <a:ext cx="8951863" cy="7359923"/>
           </a:xfrm>
           <a:prstGeom prst="rect">
             <a:avLst/>
@@ -6213,7 +7896,7 @@
           <a:p>
             <a:pPr algn="l" indent="0" marL="0">
               <a:lnSpc>
-                <a:spcPct val="95333"/>
+                <a:spcPct val="114400"/>
               </a:lnSpc>
               <a:buNone/>
             </a:pPr>
@@ -6222,9 +7905,9 @@
                 <a:solidFill>
                   <a:srgbClr val="5B7386"/>
                 </a:solidFill>
-                <a:latin typeface="Manrope" pitchFamily="34" charset="0"/>
-                <a:ea typeface="Manrope" pitchFamily="34" charset="-122"/>
-                <a:cs typeface="Manrope" pitchFamily="34" charset="-120"/>
+                <a:latin typeface="Arial" pitchFamily="34" charset="0"/>
+                <a:ea typeface="Arial" pitchFamily="34" charset="-122"/>
+                <a:cs typeface="Arial" pitchFamily="34" charset="-120"/>
               </a:rPr>
               <a:t>Map Monitor, live · fixed blue header, pill filters, hairline cards, and status colours always paired with a label.</a:t>
             </a:r>
@@ -6240,12 +7923,12 @@
         </p:nvSpPr>
         <p:spPr>
           <a:xfrm>
-            <a:off x="9923413" y="1706091"/>
-            <a:ext cx="3734619" cy="1548557"/>
+            <a:off x="9923413" y="1658466"/>
+            <a:ext cx="3734619" cy="1500932"/>
           </a:xfrm>
           <a:prstGeom prst="roundRect">
             <a:avLst>
-              <a:gd name="adj" fmla="val 9841"/>
+              <a:gd name="adj" fmla="val 10154"/>
             </a:avLst>
           </a:prstGeom>
           <a:solidFill>
@@ -6267,8 +7950,8 @@
         </p:nvSpPr>
         <p:spPr>
           <a:xfrm>
-            <a:off x="10142488" y="1887066"/>
-            <a:ext cx="3626115" cy="300038"/>
+            <a:off x="10142488" y="1839441"/>
+            <a:ext cx="3626115" cy="252413"/>
           </a:xfrm>
           <a:prstGeom prst="rect">
             <a:avLst/>
@@ -6290,9 +7973,9 @@
                 <a:solidFill>
                   <a:srgbClr val="006C9F"/>
                 </a:solidFill>
-                <a:latin typeface="Manrope" pitchFamily="34" charset="0"/>
-                <a:ea typeface="Manrope" pitchFamily="34" charset="-122"/>
-                <a:cs typeface="Manrope" pitchFamily="34" charset="-120"/>
+                <a:latin typeface="Arial" pitchFamily="34" charset="0"/>
+                <a:ea typeface="Arial" pitchFamily="34" charset="-122"/>
+                <a:cs typeface="Arial" pitchFamily="34" charset="-120"/>
               </a:rPr>
               <a:t>APP.CSS</a:t>
             </a:r>
@@ -6308,7 +7991,7 @@
         </p:nvSpPr>
         <p:spPr>
           <a:xfrm>
-            <a:off x="10142488" y="2206154"/>
+            <a:off x="10142488" y="2110904"/>
             <a:ext cx="3395363" cy="905619"/>
           </a:xfrm>
           <a:prstGeom prst="rect">
@@ -6325,7 +8008,7 @@
           <a:p>
             <a:pPr algn="l" indent="0" marL="0">
               <a:lnSpc>
-                <a:spcPct val="96381"/>
+                <a:spcPct val="112444"/>
               </a:lnSpc>
               <a:buNone/>
             </a:pPr>
@@ -6334,15 +8017,15 @@
                 <a:solidFill>
                   <a:srgbClr val="00334F"/>
                 </a:solidFill>
-                <a:latin typeface="Manrope" pitchFamily="34" charset="0"/>
-                <a:ea typeface="Manrope" pitchFamily="34" charset="-122"/>
-                <a:cs typeface="Manrope" pitchFamily="34" charset="-120"/>
+                <a:latin typeface="Arial" pitchFamily="34" charset="0"/>
+                <a:ea typeface="Arial" pitchFamily="34" charset="-122"/>
+                <a:cs typeface="Arial" pitchFamily="34" charset="-120"/>
               </a:rPr>
               <a:t>~2,800 lines, coupled to the ArcGIS theme. </a:t>
             </a:r>
             <a:pPr algn="l" indent="0" marL="0">
               <a:lnSpc>
-                <a:spcPct val="96381"/>
+                <a:spcPct val="112444"/>
               </a:lnSpc>
               <a:buNone/>
             </a:pPr>
@@ -6351,9 +8034,9 @@
                 <a:solidFill>
                   <a:srgbClr val="00334F"/>
                 </a:solidFill>
-                <a:latin typeface="Manrope" pitchFamily="34" charset="0"/>
-                <a:ea typeface="Manrope" pitchFamily="34" charset="-122"/>
-                <a:cs typeface="Manrope" pitchFamily="34" charset="-120"/>
+                <a:latin typeface="Arial" pitchFamily="34" charset="0"/>
+                <a:ea typeface="Arial" pitchFamily="34" charset="-122"/>
+                <a:cs typeface="Arial" pitchFamily="34" charset="-120"/>
               </a:rPr>
               <a:t>Edit to change an existing page.</a:t>
             </a:r>
@@ -6369,12 +8052,12 @@
         </p:nvSpPr>
         <p:spPr>
           <a:xfrm>
-            <a:off x="13791381" y="1706091"/>
-            <a:ext cx="3734619" cy="1548557"/>
+            <a:off x="13791381" y="1658466"/>
+            <a:ext cx="3734619" cy="1500932"/>
           </a:xfrm>
           <a:prstGeom prst="roundRect">
             <a:avLst>
-              <a:gd name="adj" fmla="val 9841"/>
+              <a:gd name="adj" fmla="val 10154"/>
             </a:avLst>
           </a:prstGeom>
           <a:solidFill>
@@ -6396,8 +8079,8 @@
         </p:nvSpPr>
         <p:spPr>
           <a:xfrm>
-            <a:off x="14010456" y="1887066"/>
-            <a:ext cx="3626115" cy="300038"/>
+            <a:off x="14010456" y="1839441"/>
+            <a:ext cx="3626115" cy="252413"/>
           </a:xfrm>
           <a:prstGeom prst="rect">
             <a:avLst/>
@@ -6419,9 +8102,9 @@
                 <a:solidFill>
                   <a:srgbClr val="006C9F"/>
                 </a:solidFill>
-                <a:latin typeface="Manrope" pitchFamily="34" charset="0"/>
-                <a:ea typeface="Manrope" pitchFamily="34" charset="-122"/>
-                <a:cs typeface="Manrope" pitchFamily="34" charset="-120"/>
+                <a:latin typeface="Arial" pitchFamily="34" charset="0"/>
+                <a:ea typeface="Arial" pitchFamily="34" charset="-122"/>
+                <a:cs typeface="Arial" pitchFamily="34" charset="-120"/>
               </a:rPr>
               <a:t>EXECUTIVE-BI.CSS</a:t>
             </a:r>
@@ -6437,7 +8120,7 @@
         </p:nvSpPr>
         <p:spPr>
           <a:xfrm>
-            <a:off x="14010456" y="2206154"/>
+            <a:off x="14010456" y="2110904"/>
             <a:ext cx="3395363" cy="905619"/>
           </a:xfrm>
           <a:prstGeom prst="rect">
@@ -6454,7 +8137,7 @@
           <a:p>
             <a:pPr algn="l" indent="0" marL="0">
               <a:lnSpc>
-                <a:spcPct val="96381"/>
+                <a:spcPct val="112444"/>
               </a:lnSpc>
               <a:buNone/>
             </a:pPr>
@@ -6463,15 +8146,15 @@
                 <a:solidFill>
                   <a:srgbClr val="00334F"/>
                 </a:solidFill>
-                <a:latin typeface="Manrope" pitchFamily="34" charset="0"/>
-                <a:ea typeface="Manrope" pitchFamily="34" charset="-122"/>
-                <a:cs typeface="Manrope" pitchFamily="34" charset="-120"/>
+                <a:latin typeface="Arial" pitchFamily="34" charset="0"/>
+                <a:ea typeface="Arial" pitchFamily="34" charset="-122"/>
+                <a:cs typeface="Arial" pitchFamily="34" charset="-120"/>
               </a:rPr>
               <a:t>156 portable lines. </a:t>
             </a:r>
             <a:pPr algn="l" indent="0" marL="0">
               <a:lnSpc>
-                <a:spcPct val="96381"/>
+                <a:spcPct val="112444"/>
               </a:lnSpc>
               <a:buNone/>
             </a:pPr>
@@ -6480,15 +8163,15 @@
                 <a:solidFill>
                   <a:srgbClr val="00334F"/>
                 </a:solidFill>
-                <a:latin typeface="Manrope" pitchFamily="34" charset="0"/>
-                <a:ea typeface="Manrope" pitchFamily="34" charset="-122"/>
-                <a:cs typeface="Manrope" pitchFamily="34" charset="-120"/>
+                <a:latin typeface="Arial" pitchFamily="34" charset="0"/>
+                <a:ea typeface="Arial" pitchFamily="34" charset="-122"/>
+                <a:cs typeface="Arial" pitchFamily="34" charset="-120"/>
               </a:rPr>
               <a:t>Copy to start a new dashboard </a:t>
             </a:r>
             <a:pPr algn="l" indent="0" marL="0">
               <a:lnSpc>
-                <a:spcPct val="96381"/>
+                <a:spcPct val="112444"/>
               </a:lnSpc>
               <a:buNone/>
             </a:pPr>
@@ -6497,9 +8180,9 @@
                 <a:solidFill>
                   <a:srgbClr val="00334F"/>
                 </a:solidFill>
-                <a:latin typeface="Manrope" pitchFamily="34" charset="0"/>
-                <a:ea typeface="Manrope" pitchFamily="34" charset="-122"/>
-                <a:cs typeface="Manrope" pitchFamily="34" charset="-120"/>
+                <a:latin typeface="Arial" pitchFamily="34" charset="0"/>
+                <a:ea typeface="Arial" pitchFamily="34" charset="-122"/>
+                <a:cs typeface="Arial" pitchFamily="34" charset="-120"/>
               </a:rPr>
               <a:t>, with design-system/example.html.</a:t>
             </a:r>
@@ -6515,12 +8198,12 @@
         </p:nvSpPr>
         <p:spPr>
           <a:xfrm>
-            <a:off x="9923413" y="3407048"/>
-            <a:ext cx="7602587" cy="3250109"/>
+            <a:off x="9923413" y="3311798"/>
+            <a:ext cx="7602587" cy="3202484"/>
           </a:xfrm>
           <a:prstGeom prst="roundRect">
             <a:avLst>
-              <a:gd name="adj" fmla="val 5275"/>
+              <a:gd name="adj" fmla="val 5354"/>
             </a:avLst>
           </a:prstGeom>
           <a:solidFill>
@@ -6542,8 +8225,8 @@
         </p:nvSpPr>
         <p:spPr>
           <a:xfrm>
-            <a:off x="10161538" y="3607073"/>
-            <a:ext cx="7838971" cy="300038"/>
+            <a:off x="10161538" y="3511823"/>
+            <a:ext cx="7838971" cy="252413"/>
           </a:xfrm>
           <a:prstGeom prst="rect">
             <a:avLst/>
@@ -6565,9 +8248,9 @@
                 <a:solidFill>
                   <a:srgbClr val="006C9F"/>
                 </a:solidFill>
-                <a:latin typeface="Manrope" pitchFamily="34" charset="0"/>
-                <a:ea typeface="Manrope" pitchFamily="34" charset="-122"/>
-                <a:cs typeface="Manrope" pitchFamily="34" charset="-120"/>
+                <a:latin typeface="Arial" pitchFamily="34" charset="0"/>
+                <a:ea typeface="Arial" pitchFamily="34" charset="-122"/>
+                <a:cs typeface="Arial" pitchFamily="34" charset="-120"/>
               </a:rPr>
               <a:t>TOKENS OVER COMPONENTS</a:t>
             </a:r>
@@ -6583,7 +8266,7 @@
         </p:nvSpPr>
         <p:spPr>
           <a:xfrm>
-            <a:off x="10161538" y="3983310"/>
+            <a:off x="10161538" y="3840435"/>
             <a:ext cx="381000" cy="381000"/>
           </a:xfrm>
           <a:prstGeom prst="roundRect">
@@ -6605,8 +8288,8 @@
         </p:nvSpPr>
         <p:spPr>
           <a:xfrm>
-            <a:off x="10675888" y="4023792"/>
-            <a:ext cx="5432338" cy="338138"/>
+            <a:off x="10675888" y="3902348"/>
+            <a:ext cx="4915175" cy="295275"/>
           </a:xfrm>
           <a:prstGeom prst="rect">
             <a:avLst/>
@@ -6628,9 +8311,9 @@
                 <a:solidFill>
                   <a:srgbClr val="00334F"/>
                 </a:solidFill>
-                <a:latin typeface="Manrope" pitchFamily="34" charset="0"/>
-                <a:ea typeface="Manrope" pitchFamily="34" charset="-122"/>
-                <a:cs typeface="Manrope" pitchFamily="34" charset="-120"/>
+                <a:latin typeface="Arial" pitchFamily="34" charset="0"/>
+                <a:ea typeface="Arial" pitchFamily="34" charset="-122"/>
+                <a:cs typeface="Arial" pitchFamily="34" charset="-120"/>
               </a:rPr>
               <a:t>--bi-primary #006c9f · analysis, active controls</a:t>
             </a:r>
@@ -6646,7 +8329,7 @@
         </p:nvSpPr>
         <p:spPr>
           <a:xfrm>
-            <a:off x="10161538" y="4450035"/>
+            <a:off x="10161538" y="4307160"/>
             <a:ext cx="381000" cy="381000"/>
           </a:xfrm>
           <a:prstGeom prst="roundRect">
@@ -6668,8 +8351,8 @@
         </p:nvSpPr>
         <p:spPr>
           <a:xfrm>
-            <a:off x="10675888" y="4490517"/>
-            <a:ext cx="5722025" cy="338138"/>
+            <a:off x="10675888" y="4369073"/>
+            <a:ext cx="5184644" cy="295275"/>
           </a:xfrm>
           <a:prstGeom prst="rect">
             <a:avLst/>
@@ -6691,9 +8374,9 @@
                 <a:solidFill>
                   <a:srgbClr val="00334F"/>
                 </a:solidFill>
-                <a:latin typeface="Manrope" pitchFamily="34" charset="0"/>
-                <a:ea typeface="Manrope" pitchFamily="34" charset="-122"/>
-                <a:cs typeface="Manrope" pitchFamily="34" charset="-120"/>
+                <a:latin typeface="Arial" pitchFamily="34" charset="0"/>
+                <a:ea typeface="Arial" pitchFamily="34" charset="-122"/>
+                <a:cs typeface="Arial" pitchFamily="34" charset="-120"/>
               </a:rPr>
               <a:t>--bi-deep #00334f · headings, authoritative detail</a:t>
             </a:r>
@@ -6709,7 +8392,7 @@
         </p:nvSpPr>
         <p:spPr>
           <a:xfrm>
-            <a:off x="10161538" y="4916760"/>
+            <a:off x="10161538" y="4773885"/>
             <a:ext cx="381000" cy="381000"/>
           </a:xfrm>
           <a:prstGeom prst="roundRect">
@@ -6731,8 +8414,8 @@
         </p:nvSpPr>
         <p:spPr>
           <a:xfrm>
-            <a:off x="10675888" y="4957242"/>
-            <a:ext cx="4632201" cy="338138"/>
+            <a:off x="10675888" y="4835798"/>
+            <a:ext cx="4245434" cy="295275"/>
           </a:xfrm>
           <a:prstGeom prst="rect">
             <a:avLst/>
@@ -6754,9 +8437,9 @@
                 <a:solidFill>
                   <a:srgbClr val="00334F"/>
                 </a:solidFill>
-                <a:latin typeface="Manrope" pitchFamily="34" charset="0"/>
-                <a:ea typeface="Manrope" pitchFamily="34" charset="-122"/>
-                <a:cs typeface="Manrope" pitchFamily="34" charset="-120"/>
+                <a:latin typeface="Arial" pitchFamily="34" charset="0"/>
+                <a:ea typeface="Arial" pitchFamily="34" charset="-122"/>
+                <a:cs typeface="Arial" pitchFamily="34" charset="-120"/>
               </a:rPr>
               <a:t>--bi-risk #c2410c · action, risk, follow-up</a:t>
             </a:r>
@@ -6772,7 +8455,7 @@
         </p:nvSpPr>
         <p:spPr>
           <a:xfrm>
-            <a:off x="10161538" y="5383485"/>
+            <a:off x="10161538" y="5240610"/>
             <a:ext cx="381000" cy="381000"/>
           </a:xfrm>
           <a:prstGeom prst="roundRect">
@@ -6794,8 +8477,8 @@
         </p:nvSpPr>
         <p:spPr>
           <a:xfrm>
-            <a:off x="10675888" y="5423967"/>
-            <a:ext cx="5474084" cy="338138"/>
+            <a:off x="10675888" y="5302523"/>
+            <a:ext cx="5023061" cy="295275"/>
           </a:xfrm>
           <a:prstGeom prst="rect">
             <a:avLst/>
@@ -6817,9 +8500,9 @@
                 <a:solidFill>
                   <a:srgbClr val="00334F"/>
                 </a:solidFill>
-                <a:latin typeface="Manrope" pitchFamily="34" charset="0"/>
-                <a:ea typeface="Manrope" pitchFamily="34" charset="-122"/>
-                <a:cs typeface="Manrope" pitchFamily="34" charset="-120"/>
+                <a:latin typeface="Arial" pitchFamily="34" charset="0"/>
+                <a:ea typeface="Arial" pitchFamily="34" charset="-122"/>
+                <a:cs typeface="Arial" pitchFamily="34" charset="-120"/>
               </a:rPr>
               <a:t>--bi-success #2e7d32 · target, complete, stable</a:t>
             </a:r>
@@ -6835,7 +8518,7 @@
         </p:nvSpPr>
         <p:spPr>
           <a:xfrm>
-            <a:off x="10161538" y="5878785"/>
+            <a:off x="10161538" y="5735910"/>
             <a:ext cx="7340127" cy="616446"/>
           </a:xfrm>
           <a:prstGeom prst="rect">
@@ -6852,7 +8535,7 @@
           <a:p>
             <a:pPr algn="l" indent="0" marL="0">
               <a:lnSpc>
-                <a:spcPct val="96381"/>
+                <a:spcPct val="112444"/>
               </a:lnSpc>
               <a:buNone/>
             </a:pPr>
@@ -6861,15 +8544,15 @@
                 <a:solidFill>
                   <a:srgbClr val="35566B"/>
                 </a:solidFill>
-                <a:latin typeface="Manrope" pitchFamily="34" charset="0"/>
-                <a:ea typeface="Manrope" pitchFamily="34" charset="-122"/>
-                <a:cs typeface="Manrope" pitchFamily="34" charset="-120"/>
+                <a:latin typeface="Arial" pitchFamily="34" charset="0"/>
+                <a:ea typeface="Arial" pitchFamily="34" charset="-122"/>
+                <a:cs typeface="Arial" pitchFamily="34" charset="-120"/>
               </a:rPr>
               <a:t>Override the variables at .bi-dashboard level </a:t>
             </a:r>
             <a:pPr algn="l" indent="0" marL="0">
               <a:lnSpc>
-                <a:spcPct val="96381"/>
+                <a:spcPct val="112444"/>
               </a:lnSpc>
               <a:buNone/>
             </a:pPr>
@@ -6878,9 +8561,9 @@
                 <a:solidFill>
                   <a:srgbClr val="35566B"/>
                 </a:solidFill>
-                <a:latin typeface="Manrope" pitchFamily="34" charset="0"/>
-                <a:ea typeface="Manrope" pitchFamily="34" charset="-122"/>
-                <a:cs typeface="Manrope" pitchFamily="34" charset="-120"/>
+                <a:latin typeface="Arial" pitchFamily="34" charset="0"/>
+                <a:ea typeface="Arial" pitchFamily="34" charset="-122"/>
+                <a:cs typeface="Arial" pitchFamily="34" charset="-120"/>
               </a:rPr>
               <a:t>rather than restyling a component.</a:t>
             </a:r>
@@ -6896,12 +8579,12 @@
         </p:nvSpPr>
         <p:spPr>
           <a:xfrm>
-            <a:off x="9923413" y="6809556"/>
-            <a:ext cx="7602587" cy="2886894"/>
+            <a:off x="9923413" y="6666681"/>
+            <a:ext cx="7602587" cy="3029769"/>
           </a:xfrm>
           <a:prstGeom prst="roundRect">
             <a:avLst>
-              <a:gd name="adj" fmla="val 5939"/>
+              <a:gd name="adj" fmla="val 5659"/>
             </a:avLst>
           </a:prstGeom>
           <a:solidFill>
@@ -6938,7 +8621,7 @@
         </p:nvSpPr>
         <p:spPr>
           <a:xfrm>
-            <a:off x="9923413" y="6809556"/>
+            <a:off x="9923413" y="6666681"/>
             <a:ext cx="7602587" cy="9525"/>
           </a:xfrm>
           <a:prstGeom prst="rect">
@@ -6958,8 +8641,8 @@
         </p:nvSpPr>
         <p:spPr>
           <a:xfrm>
-            <a:off x="9923413" y="6809556"/>
-            <a:ext cx="38100" cy="2886894"/>
+            <a:off x="9923413" y="6666681"/>
+            <a:ext cx="38100" cy="3029769"/>
           </a:xfrm>
           <a:prstGeom prst="rect">
             <a:avLst/>
@@ -6978,8 +8661,8 @@
         </p:nvSpPr>
         <p:spPr>
           <a:xfrm>
-            <a:off x="17516475" y="6809556"/>
-            <a:ext cx="9525" cy="2886894"/>
+            <a:off x="17516475" y="6666681"/>
+            <a:ext cx="9525" cy="3029769"/>
           </a:xfrm>
           <a:prstGeom prst="rect">
             <a:avLst/>
@@ -6998,8 +8681,8 @@
         </p:nvSpPr>
         <p:spPr>
           <a:xfrm>
-            <a:off x="10190113" y="6990531"/>
-            <a:ext cx="7807538" cy="300038"/>
+            <a:off x="10190113" y="6847656"/>
+            <a:ext cx="7807538" cy="252413"/>
           </a:xfrm>
           <a:prstGeom prst="rect">
             <a:avLst/>
@@ -7021,9 +8704,9 @@
                 <a:solidFill>
                   <a:srgbClr val="006C9F"/>
                 </a:solidFill>
-                <a:latin typeface="Manrope" pitchFamily="34" charset="0"/>
-                <a:ea typeface="Manrope" pitchFamily="34" charset="-122"/>
-                <a:cs typeface="Manrope" pitchFamily="34" charset="-120"/>
+                <a:latin typeface="Arial" pitchFamily="34" charset="0"/>
+                <a:ea typeface="Arial" pitchFamily="34" charset="-122"/>
+                <a:cs typeface="Arial" pitchFamily="34" charset="-120"/>
               </a:rPr>
               <a:t>FIXED PAGE ORDER</a:t>
             </a:r>
@@ -7039,8 +8722,8 @@
         </p:nvSpPr>
         <p:spPr>
           <a:xfrm>
-            <a:off x="10190113" y="7347719"/>
-            <a:ext cx="1318245" cy="428625"/>
+            <a:off x="10190113" y="7157219"/>
+            <a:ext cx="1221358" cy="381000"/>
           </a:xfrm>
           <a:prstGeom prst="roundRect">
             <a:avLst>
@@ -7063,8 +8746,8 @@
         </p:nvSpPr>
         <p:spPr>
           <a:xfrm>
-            <a:off x="10361563" y="7423919"/>
-            <a:ext cx="1051545" cy="314325"/>
+            <a:off x="10361563" y="7233419"/>
+            <a:ext cx="954658" cy="266700"/>
           </a:xfrm>
           <a:prstGeom prst="rect">
             <a:avLst/>
@@ -7086,9 +8769,9 @@
                 <a:solidFill>
                   <a:srgbClr val="006C9F"/>
                 </a:solidFill>
-                <a:latin typeface="Manrope" pitchFamily="34" charset="0"/>
-                <a:ea typeface="Manrope" pitchFamily="34" charset="-122"/>
-                <a:cs typeface="Manrope" pitchFamily="34" charset="-120"/>
+                <a:latin typeface="Arial" pitchFamily="34" charset="0"/>
+                <a:ea typeface="Arial" pitchFamily="34" charset="-122"/>
+                <a:cs typeface="Arial" pitchFamily="34" charset="-120"/>
               </a:rPr>
               <a:t>Masthead</a:t>
             </a:r>
@@ -7104,8 +8787,8 @@
         </p:nvSpPr>
         <p:spPr>
           <a:xfrm>
-            <a:off x="11584558" y="7347719"/>
-            <a:ext cx="798761" cy="428625"/>
+            <a:off x="11487671" y="7157219"/>
+            <a:ext cx="765423" cy="381000"/>
           </a:xfrm>
           <a:prstGeom prst="roundRect">
             <a:avLst>
@@ -7128,8 +8811,8 @@
         </p:nvSpPr>
         <p:spPr>
           <a:xfrm>
-            <a:off x="11756008" y="7423919"/>
-            <a:ext cx="532061" cy="314325"/>
+            <a:off x="11659121" y="7233419"/>
+            <a:ext cx="498723" cy="266700"/>
           </a:xfrm>
           <a:prstGeom prst="rect">
             <a:avLst/>
@@ -7151,9 +8834,9 @@
                 <a:solidFill>
                   <a:srgbClr val="006C9F"/>
                 </a:solidFill>
-                <a:latin typeface="Manrope" pitchFamily="34" charset="0"/>
-                <a:ea typeface="Manrope" pitchFamily="34" charset="-122"/>
-                <a:cs typeface="Manrope" pitchFamily="34" charset="-120"/>
+                <a:latin typeface="Arial" pitchFamily="34" charset="0"/>
+                <a:ea typeface="Arial" pitchFamily="34" charset="-122"/>
+                <a:cs typeface="Arial" pitchFamily="34" charset="-120"/>
               </a:rPr>
               <a:t>Tabs</a:t>
             </a:r>
@@ -7169,8 +8852,8 @@
         </p:nvSpPr>
         <p:spPr>
           <a:xfrm>
-            <a:off x="12459519" y="7347719"/>
-            <a:ext cx="1931566" cy="428625"/>
+            <a:off x="12329294" y="7157219"/>
+            <a:ext cx="1738164" cy="381000"/>
           </a:xfrm>
           <a:prstGeom prst="roundRect">
             <a:avLst>
@@ -7193,8 +8876,8 @@
         </p:nvSpPr>
         <p:spPr>
           <a:xfrm>
-            <a:off x="12630969" y="7423919"/>
-            <a:ext cx="1664866" cy="314325"/>
+            <a:off x="12500744" y="7233419"/>
+            <a:ext cx="1471464" cy="266700"/>
           </a:xfrm>
           <a:prstGeom prst="rect">
             <a:avLst/>
@@ -7216,9 +8899,9 @@
                 <a:solidFill>
                   <a:srgbClr val="006C9F"/>
                 </a:solidFill>
-                <a:latin typeface="Manrope" pitchFamily="34" charset="0"/>
-                <a:ea typeface="Manrope" pitchFamily="34" charset="-122"/>
-                <a:cs typeface="Manrope" pitchFamily="34" charset="-120"/>
+                <a:latin typeface="Arial" pitchFamily="34" charset="0"/>
+                <a:ea typeface="Arial" pitchFamily="34" charset="-122"/>
+                <a:cs typeface="Arial" pitchFamily="34" charset="-120"/>
               </a:rPr>
               <a:t>Context + filters</a:t>
             </a:r>
@@ -7234,8 +8917,8 @@
         </p:nvSpPr>
         <p:spPr>
           <a:xfrm>
-            <a:off x="14467284" y="7347719"/>
-            <a:ext cx="2124596" cy="428625"/>
+            <a:off x="14143658" y="7157219"/>
+            <a:ext cx="1921818" cy="381000"/>
           </a:xfrm>
           <a:prstGeom prst="roundRect">
             <a:avLst>
@@ -7258,8 +8941,8 @@
         </p:nvSpPr>
         <p:spPr>
           <a:xfrm>
-            <a:off x="14638734" y="7423919"/>
-            <a:ext cx="1857896" cy="314325"/>
+            <a:off x="14315108" y="7233419"/>
+            <a:ext cx="1655118" cy="266700"/>
           </a:xfrm>
           <a:prstGeom prst="rect">
             <a:avLst/>
@@ -7281,9 +8964,9 @@
                 <a:solidFill>
                   <a:srgbClr val="006C9F"/>
                 </a:solidFill>
-                <a:latin typeface="Manrope" pitchFamily="34" charset="0"/>
-                <a:ea typeface="Manrope" pitchFamily="34" charset="-122"/>
-                <a:cs typeface="Manrope" pitchFamily="34" charset="-120"/>
+                <a:latin typeface="Arial" pitchFamily="34" charset="0"/>
+                <a:ea typeface="Arial" pitchFamily="34" charset="-122"/>
+                <a:cs typeface="Arial" pitchFamily="34" charset="-120"/>
               </a:rPr>
               <a:t>Decision question</a:t>
             </a:r>
@@ -7299,8 +8982,8 @@
         </p:nvSpPr>
         <p:spPr>
           <a:xfrm>
-            <a:off x="10190113" y="7852544"/>
-            <a:ext cx="1486272" cy="428625"/>
+            <a:off x="10190113" y="7614419"/>
+            <a:ext cx="1376735" cy="381000"/>
           </a:xfrm>
           <a:prstGeom prst="roundRect">
             <a:avLst>
@@ -7323,8 +9006,8 @@
         </p:nvSpPr>
         <p:spPr>
           <a:xfrm>
-            <a:off x="10361563" y="7928744"/>
-            <a:ext cx="1219572" cy="314325"/>
+            <a:off x="10361563" y="7690619"/>
+            <a:ext cx="1110035" cy="266700"/>
           </a:xfrm>
           <a:prstGeom prst="rect">
             <a:avLst/>
@@ -7346,9 +9029,9 @@
                 <a:solidFill>
                   <a:srgbClr val="006C9F"/>
                 </a:solidFill>
-                <a:latin typeface="Manrope" pitchFamily="34" charset="0"/>
-                <a:ea typeface="Manrope" pitchFamily="34" charset="-122"/>
-                <a:cs typeface="Manrope" pitchFamily="34" charset="-120"/>
+                <a:latin typeface="Arial" pitchFamily="34" charset="0"/>
+                <a:ea typeface="Arial" pitchFamily="34" charset="-122"/>
+                <a:cs typeface="Arial" pitchFamily="34" charset="-120"/>
               </a:rPr>
               <a:t>3–5 metrics</a:t>
             </a:r>
@@ -7364,8 +9047,8 @@
         </p:nvSpPr>
         <p:spPr>
           <a:xfrm>
-            <a:off x="11752585" y="7852544"/>
-            <a:ext cx="2596828" cy="428625"/>
+            <a:off x="11643047" y="7614419"/>
+            <a:ext cx="2377380" cy="381000"/>
           </a:xfrm>
           <a:prstGeom prst="roundRect">
             <a:avLst>
@@ -7388,8 +9071,8 @@
         </p:nvSpPr>
         <p:spPr>
           <a:xfrm>
-            <a:off x="11924035" y="7928744"/>
-            <a:ext cx="2331832" cy="314325"/>
+            <a:off x="11814497" y="7690619"/>
+            <a:ext cx="2110680" cy="266700"/>
           </a:xfrm>
           <a:prstGeom prst="rect">
             <a:avLst/>
@@ -7411,9 +9094,9 @@
                 <a:solidFill>
                   <a:srgbClr val="006C9F"/>
                 </a:solidFill>
-                <a:latin typeface="Manrope" pitchFamily="34" charset="0"/>
-                <a:ea typeface="Manrope" pitchFamily="34" charset="-122"/>
-                <a:cs typeface="Manrope" pitchFamily="34" charset="-120"/>
+                <a:latin typeface="Arial" pitchFamily="34" charset="0"/>
+                <a:ea typeface="Arial" pitchFamily="34" charset="-122"/>
+                <a:cs typeface="Arial" pitchFamily="34" charset="-120"/>
               </a:rPr>
               <a:t>Dominant map or chart</a:t>
             </a:r>
@@ -7429,8 +9112,8 @@
         </p:nvSpPr>
         <p:spPr>
           <a:xfrm>
-            <a:off x="14425613" y="7852544"/>
-            <a:ext cx="2189187" cy="428625"/>
+            <a:off x="14096628" y="7614419"/>
+            <a:ext cx="1988641" cy="381000"/>
           </a:xfrm>
           <a:prstGeom prst="roundRect">
             <a:avLst>
@@ -7453,8 +9136,8 @@
         </p:nvSpPr>
         <p:spPr>
           <a:xfrm>
-            <a:off x="14597063" y="7928744"/>
-            <a:ext cx="1922487" cy="314325"/>
+            <a:off x="14268078" y="7690619"/>
+            <a:ext cx="1721941" cy="266700"/>
           </a:xfrm>
           <a:prstGeom prst="rect">
             <a:avLst/>
@@ -7476,9 +9159,9 @@
                 <a:solidFill>
                   <a:srgbClr val="006C9F"/>
                 </a:solidFill>
-                <a:latin typeface="Manrope" pitchFamily="34" charset="0"/>
-                <a:ea typeface="Manrope" pitchFamily="34" charset="-122"/>
-                <a:cs typeface="Manrope" pitchFamily="34" charset="-120"/>
+                <a:latin typeface="Arial" pitchFamily="34" charset="0"/>
+                <a:ea typeface="Arial" pitchFamily="34" charset="-122"/>
+                <a:cs typeface="Arial" pitchFamily="34" charset="-120"/>
               </a:rPr>
               <a:t>Operational ledger</a:t>
             </a:r>
@@ -7494,7 +9177,7 @@
         </p:nvSpPr>
         <p:spPr>
           <a:xfrm>
-            <a:off x="10190113" y="8376419"/>
+            <a:off x="10190113" y="8090669"/>
             <a:ext cx="7310695" cy="855166"/>
           </a:xfrm>
           <a:prstGeom prst="rect">
@@ -7511,7 +9194,7 @@
           <a:p>
             <a:pPr algn="l" indent="0" marL="0">
               <a:lnSpc>
-                <a:spcPct val="95333"/>
+                <a:spcPct val="114400"/>
               </a:lnSpc>
               <a:buNone/>
             </a:pPr>
@@ -7520,15 +9203,15 @@
                 <a:solidFill>
                   <a:srgbClr val="35566B"/>
                 </a:solidFill>
-                <a:latin typeface="Manrope" pitchFamily="34" charset="0"/>
-                <a:ea typeface="Manrope" pitchFamily="34" charset="-122"/>
-                <a:cs typeface="Manrope" pitchFamily="34" charset="-120"/>
+                <a:latin typeface="Arial" pitchFamily="34" charset="0"/>
+                <a:ea typeface="Arial" pitchFamily="34" charset="-122"/>
+                <a:cs typeface="Arial" pitchFamily="34" charset="-120"/>
               </a:rPr>
               <a:t>Checked in review: </a:t>
             </a:r>
             <a:pPr algn="l" indent="0" marL="0">
               <a:lnSpc>
-                <a:spcPct val="95333"/>
+                <a:spcPct val="114400"/>
               </a:lnSpc>
               <a:buNone/>
             </a:pPr>
@@ -7537,9 +9220,9 @@
                 <a:solidFill>
                   <a:srgbClr val="35566B"/>
                 </a:solidFill>
-                <a:latin typeface="Manrope" pitchFamily="34" charset="0"/>
-                <a:ea typeface="Manrope" pitchFamily="34" charset="-122"/>
-                <a:cs typeface="Manrope" pitchFamily="34" charset="-120"/>
+                <a:latin typeface="Arial" pitchFamily="34" charset="0"/>
+                <a:ea typeface="Arial" pitchFamily="34" charset="-122"/>
+                <a:cs typeface="Arial" pitchFamily="34" charset="-120"/>
               </a:rPr>
               <a:t>colour always paired with a label; every number shows source, period, denominator, freshness; contrast ≥ 4.5:1; explicit loading, empty, stale, error states.</a:t>
             </a:r>
@@ -7555,9 +9238,9 @@
 </p:sld>
 </file>
 
-<file path=ppt/slides/slide6.xml><?xml version="1.0" encoding="utf-8"?>
+<file path=ppt/slides/slide7.xml><?xml version="1.0" encoding="utf-8"?>
 <p:sld xmlns:a="http://schemas.openxmlformats.org/drawingml/2006/main" xmlns:r="http://schemas.openxmlformats.org/officeDocument/2006/relationships" xmlns:p="http://schemas.openxmlformats.org/presentationml/2006/main">
-  <p:cSld name="Slide 6">
+  <p:cSld name="Slide 7">
     <p:bg>
       <p:bgPr>
         <a:solidFill>
@@ -7588,7 +9271,7 @@
         <p:spPr>
           <a:xfrm>
             <a:off x="723900" y="571500"/>
-            <a:ext cx="11866833" cy="323850"/>
+            <a:ext cx="10854444" cy="276225"/>
           </a:xfrm>
           <a:prstGeom prst="rect">
             <a:avLst/>
@@ -7610,11 +9293,11 @@
                 <a:solidFill>
                   <a:srgbClr val="006C9F"/>
                 </a:solidFill>
-                <a:latin typeface="Manrope" pitchFamily="34" charset="0"/>
-                <a:ea typeface="Manrope" pitchFamily="34" charset="-122"/>
-                <a:cs typeface="Manrope" pitchFamily="34" charset="-120"/>
-              </a:rPr>
-              <a:t>05 · REPLACING REGRID, STAYING GROUNDED IN ARCGIS</a:t>
+                <a:latin typeface="Arial" pitchFamily="34" charset="0"/>
+                <a:ea typeface="Arial" pitchFamily="34" charset="-122"/>
+                <a:cs typeface="Arial" pitchFamily="34" charset="-120"/>
+              </a:rPr>
+              <a:t>06 · REPLACING REGRID, STAYING GROUNDED IN ARCGIS</a:t>
             </a:r>
             <a:endParaRPr lang="en-US" sz="1650" dirty="0"/>
           </a:p>
@@ -7628,24 +9311,24 @@
         </p:nvSpPr>
         <p:spPr>
           <a:xfrm>
-            <a:off x="723900" y="933450"/>
-            <a:ext cx="11866833" cy="582141"/>
-          </a:xfrm>
-          <a:prstGeom prst="rect">
-            <a:avLst/>
-          </a:prstGeom>
-          <a:noFill/>
-          <a:ln/>
-        </p:spPr>
-        <p:txBody>
-          <a:bodyPr wrap="square" lIns="25400" tIns="25400" rIns="25400" bIns="25400" rtlCol="0" anchor="t">
-            <a:normAutofit/>
-          </a:bodyPr>
-          <a:lstStyle/>
-          <a:p>
-            <a:pPr algn="l" indent="0" marL="0">
-              <a:lnSpc>
-                <a:spcPct val="74667"/>
+            <a:off x="723900" y="885825"/>
+            <a:ext cx="10854444" cy="582141"/>
+          </a:xfrm>
+          <a:prstGeom prst="rect">
+            <a:avLst/>
+          </a:prstGeom>
+          <a:noFill/>
+          <a:ln/>
+        </p:spPr>
+        <p:txBody>
+          <a:bodyPr wrap="square" lIns="25400" tIns="25400" rIns="25400" bIns="25400" rtlCol="0" anchor="t">
+            <a:normAutofit/>
+          </a:bodyPr>
+          <a:lstStyle/>
+          <a:p>
+            <a:pPr algn="l" indent="0" marL="0">
+              <a:lnSpc>
+                <a:spcPct val="88558"/>
               </a:lnSpc>
               <a:buNone/>
             </a:pPr>
@@ -7654,9 +9337,9 @@
                 <a:solidFill>
                   <a:srgbClr val="00334F"/>
                 </a:solidFill>
-                <a:latin typeface="Manrope" pitchFamily="34" charset="0"/>
-                <a:ea typeface="Manrope" pitchFamily="34" charset="-122"/>
-                <a:cs typeface="Manrope" pitchFamily="34" charset="-120"/>
+                <a:latin typeface="Arial" pitchFamily="34" charset="0"/>
+                <a:ea typeface="Arial" pitchFamily="34" charset="-122"/>
+                <a:cs typeface="Arial" pitchFamily="34" charset="-120"/>
               </a:rPr>
               <a:t>The scope is one intake form and one export</a:t>
             </a:r>
@@ -7672,8 +9355,8 @@
         </p:nvSpPr>
         <p:spPr>
           <a:xfrm>
-            <a:off x="12188800" y="622176"/>
-            <a:ext cx="5375300" cy="855315"/>
+            <a:off x="12522547" y="574551"/>
+            <a:ext cx="5041553" cy="855315"/>
           </a:xfrm>
           <a:prstGeom prst="roundRect">
             <a:avLst>
@@ -7699,8 +9382,8 @@
         </p:nvSpPr>
         <p:spPr>
           <a:xfrm>
-            <a:off x="12246616" y="765051"/>
-            <a:ext cx="5098409" cy="607665"/>
+            <a:off x="12590376" y="717426"/>
+            <a:ext cx="4754649" cy="607665"/>
           </a:xfrm>
           <a:prstGeom prst="rect">
             <a:avLst/>
@@ -7716,7 +9399,7 @@
           <a:p>
             <a:pPr algn="r" indent="0" marL="0">
               <a:lnSpc>
-                <a:spcPct val="94921"/>
+                <a:spcPct val="110741"/>
               </a:lnSpc>
               <a:buNone/>
             </a:pPr>
@@ -7728,9 +9411,9 @@
                 <a:highlight>
                   <a:srgbClr val="FFFFFF"/>
                 </a:highlight>
-                <a:latin typeface="Manrope" pitchFamily="34" charset="0"/>
-                <a:ea typeface="Manrope" pitchFamily="34" charset="-122"/>
-                <a:cs typeface="Manrope" pitchFamily="34" charset="-120"/>
+                <a:latin typeface="Arial" pitchFamily="34" charset="0"/>
+                <a:ea typeface="Arial" pitchFamily="34" charset="-122"/>
+                <a:cs typeface="Arial" pitchFamily="34" charset="-120"/>
               </a:rPr>
               <a:t>Assignments, parcel geometry, ownership, dashboard and portal are already URA property</a:t>
             </a:r>
@@ -7746,12 +9429,12 @@
         </p:nvSpPr>
         <p:spPr>
           <a:xfrm>
-            <a:off x="723900" y="1667991"/>
-            <a:ext cx="16840200" cy="5732934"/>
+            <a:off x="723900" y="1620366"/>
+            <a:ext cx="16840200" cy="5780559"/>
           </a:xfrm>
           <a:prstGeom prst="roundRect">
             <a:avLst>
-              <a:gd name="adj" fmla="val 2991"/>
+              <a:gd name="adj" fmla="val 2966"/>
             </a:avLst>
           </a:prstGeom>
           <a:solidFill>
@@ -7775,13 +9458,13 @@
         </p:nvPicPr>
         <p:blipFill>
           <a:blip r:embed="rId1"/>
-          <a:srcRect l="-35121" r="-35121" t="0" b="0"/>
+          <a:srcRect l="-34388" r="-34388" t="0" b="0"/>
           <a:stretch/>
         </p:blipFill>
         <p:spPr>
           <a:xfrm>
-            <a:off x="847725" y="1791816"/>
-            <a:ext cx="16592550" cy="5485284"/>
+            <a:off x="847725" y="1744191"/>
+            <a:ext cx="16592550" cy="5532909"/>
           </a:xfrm>
           <a:prstGeom prst="rect">
             <a:avLst/>
@@ -7824,7 +9507,7 @@
         <p:spPr>
           <a:xfrm>
             <a:off x="962025" y="7772400"/>
-            <a:ext cx="5479733" cy="285750"/>
+            <a:ext cx="5479733" cy="242888"/>
           </a:xfrm>
           <a:prstGeom prst="rect">
             <a:avLst/>
@@ -7846,9 +9529,9 @@
                 <a:solidFill>
                   <a:srgbClr val="00334F"/>
                 </a:solidFill>
-                <a:latin typeface="Manrope" pitchFamily="34" charset="0"/>
-                <a:ea typeface="Manrope" pitchFamily="34" charset="-122"/>
-                <a:cs typeface="Manrope" pitchFamily="34" charset="-120"/>
+                <a:latin typeface="Arial" pitchFamily="34" charset="0"/>
+                <a:ea typeface="Arial" pitchFamily="34" charset="-122"/>
+                <a:cs typeface="Arial" pitchFamily="34" charset="-120"/>
               </a:rPr>
               <a:t>STILL GROUNDED IN ARCGIS</a:t>
             </a:r>
@@ -7864,7 +9547,7 @@
         </p:nvSpPr>
         <p:spPr>
           <a:xfrm>
-            <a:off x="962025" y="8086725"/>
+            <a:off x="962025" y="8043863"/>
             <a:ext cx="5131022" cy="1194792"/>
           </a:xfrm>
           <a:prstGeom prst="rect">
@@ -7881,7 +9564,7 @@
           <a:p>
             <a:pPr algn="l" indent="0" marL="0">
               <a:lnSpc>
-                <a:spcPct val="96381"/>
+                <a:spcPct val="112444"/>
               </a:lnSpc>
               <a:buNone/>
             </a:pPr>
@@ -7890,15 +9573,15 @@
                 <a:solidFill>
                   <a:srgbClr val="00334F"/>
                 </a:solidFill>
-                <a:latin typeface="Manrope" pitchFamily="34" charset="0"/>
-                <a:ea typeface="Manrope" pitchFamily="34" charset="-122"/>
-                <a:cs typeface="Manrope" pitchFamily="34" charset="-120"/>
+                <a:latin typeface="Arial" pitchFamily="34" charset="0"/>
+                <a:ea typeface="Arial" pitchFamily="34" charset="-122"/>
+                <a:cs typeface="Arial" pitchFamily="34" charset="-120"/>
               </a:rPr>
               <a:t>Parcels, assignments, and evidence stay </a:t>
             </a:r>
             <a:pPr algn="l" indent="0" marL="0">
               <a:lnSpc>
-                <a:spcPct val="96381"/>
+                <a:spcPct val="112444"/>
               </a:lnSpc>
               <a:buNone/>
             </a:pPr>
@@ -7907,15 +9590,15 @@
                 <a:solidFill>
                   <a:srgbClr val="00334F"/>
                 </a:solidFill>
-                <a:latin typeface="Manrope" pitchFamily="34" charset="0"/>
-                <a:ea typeface="Manrope" pitchFamily="34" charset="-122"/>
-                <a:cs typeface="Manrope" pitchFamily="34" charset="-120"/>
+                <a:latin typeface="Arial" pitchFamily="34" charset="0"/>
+                <a:ea typeface="Arial" pitchFamily="34" charset="-122"/>
+                <a:cs typeface="Arial" pitchFamily="34" charset="-120"/>
               </a:rPr>
               <a:t>hosted feature layers </a:t>
             </a:r>
             <a:pPr algn="l" indent="0" marL="0">
               <a:lnSpc>
-                <a:spcPct val="96381"/>
+                <a:spcPct val="112444"/>
               </a:lnSpc>
               <a:buNone/>
             </a:pPr>
@@ -7924,15 +9607,15 @@
                 <a:solidFill>
                   <a:srgbClr val="00334F"/>
                 </a:solidFill>
-                <a:latin typeface="Manrope" pitchFamily="34" charset="0"/>
-                <a:ea typeface="Manrope" pitchFamily="34" charset="-122"/>
-                <a:cs typeface="Manrope" pitchFamily="34" charset="-120"/>
+                <a:latin typeface="Arial" pitchFamily="34" charset="0"/>
+                <a:ea typeface="Arial" pitchFamily="34" charset="-122"/>
+                <a:cs typeface="Arial" pitchFamily="34" charset="-120"/>
               </a:rPr>
               <a:t>, queried live at page load. </a:t>
             </a:r>
             <a:pPr algn="l" indent="0" marL="0">
               <a:lnSpc>
-                <a:spcPct val="96381"/>
+                <a:spcPct val="112444"/>
               </a:lnSpc>
               <a:buNone/>
             </a:pPr>
@@ -7941,9 +9624,9 @@
                 <a:solidFill>
                   <a:srgbClr val="00334F"/>
                 </a:solidFill>
-                <a:latin typeface="Manrope" pitchFamily="34" charset="0"/>
-                <a:ea typeface="Manrope" pitchFamily="34" charset="-122"/>
-                <a:cs typeface="Manrope" pitchFamily="34" charset="-120"/>
+                <a:latin typeface="Arial" pitchFamily="34" charset="0"/>
+                <a:ea typeface="Arial" pitchFamily="34" charset="-122"/>
+                <a:cs typeface="Arial" pitchFamily="34" charset="-120"/>
               </a:rPr>
               <a:t>URA owns the intake; Esri carries the geometry and sharing model.</a:t>
             </a:r>
@@ -7987,7 +9670,7 @@
         <p:spPr>
           <a:xfrm>
             <a:off x="6591300" y="7772400"/>
-            <a:ext cx="5615940" cy="285750"/>
+            <a:ext cx="5615940" cy="242888"/>
           </a:xfrm>
           <a:prstGeom prst="rect">
             <a:avLst/>
@@ -8009,9 +9692,9 @@
                 <a:solidFill>
                   <a:srgbClr val="2E7D32"/>
                 </a:solidFill>
-                <a:latin typeface="Manrope" pitchFamily="34" charset="0"/>
-                <a:ea typeface="Manrope" pitchFamily="34" charset="-122"/>
-                <a:cs typeface="Manrope" pitchFamily="34" charset="-120"/>
+                <a:latin typeface="Arial" pitchFamily="34" charset="0"/>
+                <a:ea typeface="Arial" pitchFamily="34" charset="-122"/>
+                <a:cs typeface="Arial" pitchFamily="34" charset="-120"/>
               </a:rPr>
               <a:t>STILL IN DEVELOPMENT</a:t>
             </a:r>
@@ -8027,24 +9710,24 @@
         </p:nvSpPr>
         <p:spPr>
           <a:xfrm>
-            <a:off x="6591300" y="8086725"/>
-            <a:ext cx="5258562" cy="1483965"/>
-          </a:xfrm>
-          <a:prstGeom prst="rect">
-            <a:avLst/>
-          </a:prstGeom>
-          <a:noFill/>
-          <a:ln/>
-        </p:spPr>
-        <p:txBody>
-          <a:bodyPr wrap="square" lIns="25400" tIns="25400" rIns="25400" bIns="25400" rtlCol="0" anchor="t">
-            <a:normAutofit/>
-          </a:bodyPr>
-          <a:lstStyle/>
-          <a:p>
-            <a:pPr algn="l" indent="0" marL="0">
-              <a:lnSpc>
-                <a:spcPct val="96381"/>
+            <a:off x="6591300" y="8043863"/>
+            <a:ext cx="5258562" cy="1194792"/>
+          </a:xfrm>
+          <a:prstGeom prst="rect">
+            <a:avLst/>
+          </a:prstGeom>
+          <a:noFill/>
+          <a:ln/>
+        </p:spPr>
+        <p:txBody>
+          <a:bodyPr wrap="square" lIns="25400" tIns="25400" rIns="25400" bIns="25400" rtlCol="0" anchor="t">
+            <a:normAutofit/>
+          </a:bodyPr>
+          <a:lstStyle/>
+          <a:p>
+            <a:pPr algn="l" indent="0" marL="0">
+              <a:lnSpc>
+                <a:spcPct val="112444"/>
               </a:lnSpc>
               <a:buNone/>
             </a:pPr>
@@ -8053,15 +9736,15 @@
                 <a:solidFill>
                   <a:srgbClr val="00334F"/>
                 </a:solidFill>
-                <a:latin typeface="Manrope" pitchFamily="34" charset="0"/>
-                <a:ea typeface="Manrope" pitchFamily="34" charset="-122"/>
-                <a:cs typeface="Manrope" pitchFamily="34" charset="-120"/>
+                <a:latin typeface="Arial" pitchFamily="34" charset="0"/>
+                <a:ea typeface="Arial" pitchFamily="34" charset="-122"/>
+                <a:cs typeface="Arial" pitchFamily="34" charset="-120"/>
               </a:rPr>
               <a:t>Submitted surveys pipeline need to be checked. </a:t>
             </a:r>
             <a:pPr algn="l" indent="0" marL="0">
               <a:lnSpc>
-                <a:spcPct val="96381"/>
+                <a:spcPct val="112444"/>
               </a:lnSpc>
               <a:buNone/>
             </a:pPr>
@@ -8070,15 +9753,15 @@
                 <a:solidFill>
                   <a:srgbClr val="00334F"/>
                 </a:solidFill>
-                <a:latin typeface="Manrope" pitchFamily="34" charset="0"/>
-                <a:ea typeface="Manrope" pitchFamily="34" charset="-122"/>
-                <a:cs typeface="Manrope" pitchFamily="34" charset="-120"/>
+                <a:latin typeface="Arial" pitchFamily="34" charset="0"/>
+                <a:ea typeface="Arial" pitchFamily="34" charset="-122"/>
+                <a:cs typeface="Arial" pitchFamily="34" charset="-120"/>
               </a:rPr>
               <a:t>Webhook, evidence sync, and layer publisher are written but not deployed, to fully replace regrid. </a:t>
             </a:r>
             <a:pPr algn="l" indent="0" marL="0">
               <a:lnSpc>
-                <a:spcPct val="96381"/>
+                <a:spcPct val="112444"/>
               </a:lnSpc>
               <a:buNone/>
             </a:pPr>
@@ -8087,15 +9770,15 @@
                 <a:solidFill>
                   <a:srgbClr val="00334F"/>
                 </a:solidFill>
-                <a:latin typeface="Manrope" pitchFamily="34" charset="0"/>
-                <a:ea typeface="Manrope" pitchFamily="34" charset="-122"/>
-                <a:cs typeface="Manrope" pitchFamily="34" charset="-120"/>
+                <a:latin typeface="Arial" pitchFamily="34" charset="0"/>
+                <a:ea typeface="Arial" pitchFamily="34" charset="-122"/>
+                <a:cs typeface="Arial" pitchFamily="34" charset="-120"/>
               </a:rPr>
               <a:t>Deploying that path is the last step </a:t>
             </a:r>
             <a:pPr algn="l" indent="0" marL="0">
               <a:lnSpc>
-                <a:spcPct val="96381"/>
+                <a:spcPct val="112444"/>
               </a:lnSpc>
               <a:buNone/>
             </a:pPr>
@@ -8104,9 +9787,9 @@
                 <a:solidFill>
                   <a:srgbClr val="00334F"/>
                 </a:solidFill>
-                <a:latin typeface="Manrope" pitchFamily="34" charset="0"/>
-                <a:ea typeface="Manrope" pitchFamily="34" charset="-122"/>
-                <a:cs typeface="Manrope" pitchFamily="34" charset="-120"/>
+                <a:latin typeface="Arial" pitchFamily="34" charset="0"/>
+                <a:ea typeface="Arial" pitchFamily="34" charset="-122"/>
+                <a:cs typeface="Arial" pitchFamily="34" charset="-120"/>
               </a:rPr>
               <a:t>before cutover.</a:t>
             </a:r>
@@ -8122,9 +9805,9 @@
 </p:sld>
 </file>
 
-<file path=ppt/slides/slide7.xml><?xml version="1.0" encoding="utf-8"?>
+<file path=ppt/slides/slide8.xml><?xml version="1.0" encoding="utf-8"?>
 <p:sld xmlns:a="http://schemas.openxmlformats.org/drawingml/2006/main" xmlns:r="http://schemas.openxmlformats.org/officeDocument/2006/relationships" xmlns:p="http://schemas.openxmlformats.org/presentationml/2006/main">
-  <p:cSld name="Slide 7">
+  <p:cSld name="Slide 8">
     <p:bg>
       <p:bgPr>
         <a:solidFill>
@@ -8155,7 +9838,7 @@
         <p:spPr>
           <a:xfrm>
             <a:off x="723900" y="571500"/>
-            <a:ext cx="13096711" cy="323850"/>
+            <a:ext cx="12923751" cy="276225"/>
           </a:xfrm>
           <a:prstGeom prst="rect">
             <a:avLst/>
@@ -8177,11 +9860,11 @@
                 <a:solidFill>
                   <a:srgbClr val="006C9F"/>
                 </a:solidFill>
-                <a:latin typeface="Manrope" pitchFamily="34" charset="0"/>
-                <a:ea typeface="Manrope" pitchFamily="34" charset="-122"/>
-                <a:cs typeface="Manrope" pitchFamily="34" charset="-120"/>
-              </a:rPr>
-              <a:t>06 · OWNER OPERATING PLAYBOOK</a:t>
+                <a:latin typeface="Arial" pitchFamily="34" charset="0"/>
+                <a:ea typeface="Arial" pitchFamily="34" charset="-122"/>
+                <a:cs typeface="Arial" pitchFamily="34" charset="-120"/>
+              </a:rPr>
+              <a:t>07 · OWNER OPERATING PLAYBOOK</a:t>
             </a:r>
             <a:endParaRPr lang="en-US" sz="1650" dirty="0"/>
           </a:p>
@@ -8195,24 +9878,24 @@
         </p:nvSpPr>
         <p:spPr>
           <a:xfrm>
-            <a:off x="723900" y="933450"/>
-            <a:ext cx="12263284" cy="1126182"/>
-          </a:xfrm>
-          <a:prstGeom prst="rect">
-            <a:avLst/>
-          </a:prstGeom>
-          <a:noFill/>
-          <a:ln/>
-        </p:spPr>
-        <p:txBody>
-          <a:bodyPr wrap="square" lIns="25400" tIns="25400" rIns="25400" bIns="25400" rtlCol="0" anchor="t">
-            <a:normAutofit/>
-          </a:bodyPr>
-          <a:lstStyle/>
-          <a:p>
-            <a:pPr algn="l" indent="0" marL="0">
-              <a:lnSpc>
-                <a:spcPct val="74667"/>
+            <a:off x="723900" y="885825"/>
+            <a:ext cx="12101330" cy="1126182"/>
+          </a:xfrm>
+          <a:prstGeom prst="rect">
+            <a:avLst/>
+          </a:prstGeom>
+          <a:noFill/>
+          <a:ln/>
+        </p:spPr>
+        <p:txBody>
+          <a:bodyPr wrap="square" lIns="25400" tIns="25400" rIns="25400" bIns="25400" rtlCol="0" anchor="t">
+            <a:normAutofit/>
+          </a:bodyPr>
+          <a:lstStyle/>
+          <a:p>
+            <a:pPr algn="l" indent="0" marL="0">
+              <a:lnSpc>
+                <a:spcPct val="88558"/>
               </a:lnSpc>
               <a:buNone/>
             </a:pPr>
@@ -8221,9 +9904,9 @@
                 <a:solidFill>
                   <a:srgbClr val="00334F"/>
                 </a:solidFill>
-                <a:latin typeface="Manrope" pitchFamily="34" charset="0"/>
-                <a:ea typeface="Manrope" pitchFamily="34" charset="-122"/>
-                <a:cs typeface="Manrope" pitchFamily="34" charset="-120"/>
+                <a:latin typeface="Arial" pitchFamily="34" charset="0"/>
+                <a:ea typeface="Arial" pitchFamily="34" charset="-122"/>
+                <a:cs typeface="Arial" pitchFamily="34" charset="-120"/>
               </a:rPr>
               <a:t>Keep the source, the metric, and the release path stable</a:t>
             </a:r>
@@ -8239,8 +9922,8 @@
         </p:nvSpPr>
         <p:spPr>
           <a:xfrm>
-            <a:off x="13011001" y="881435"/>
-            <a:ext cx="4553099" cy="1140098"/>
+            <a:off x="12853764" y="833810"/>
+            <a:ext cx="4710336" cy="1140098"/>
           </a:xfrm>
           <a:prstGeom prst="roundRect">
             <a:avLst>
@@ -8266,8 +9949,8 @@
         </p:nvSpPr>
         <p:spPr>
           <a:xfrm>
-            <a:off x="13093483" y="1024310"/>
-            <a:ext cx="4251542" cy="892448"/>
+            <a:off x="12931529" y="976685"/>
+            <a:ext cx="4413496" cy="892448"/>
           </a:xfrm>
           <a:prstGeom prst="rect">
             <a:avLst/>
@@ -8283,7 +9966,7 @@
           <a:p>
             <a:pPr algn="r" indent="0" marL="0">
               <a:lnSpc>
-                <a:spcPct val="94921"/>
+                <a:spcPct val="110741"/>
               </a:lnSpc>
               <a:buNone/>
             </a:pPr>
@@ -8295,11 +9978,11 @@
                 <a:highlight>
                   <a:srgbClr val="EEF8FB"/>
                 </a:highlight>
-                <a:latin typeface="Manrope" pitchFamily="34" charset="0"/>
-                <a:ea typeface="Manrope" pitchFamily="34" charset="-122"/>
-                <a:cs typeface="Manrope" pitchFamily="34" charset="-120"/>
-              </a:rPr>
-              <a:t>Cutover: HANDOVER.md Daily ops: task-scheduler-vm-operations.md</a:t>
+                <a:latin typeface="Arial" pitchFamily="34" charset="0"/>
+                <a:ea typeface="Arial" pitchFamily="34" charset="-122"/>
+                <a:cs typeface="Arial" pitchFamily="34" charset="-120"/>
+              </a:rPr>
+              <a:t>Status: handover/04-readiness-checklist.md Deep reference: handover/01-owner-guide.md</a:t>
             </a:r>
             <a:endParaRPr lang="en-US" sz="1725" dirty="0"/>
           </a:p>
@@ -8313,12 +9996,80 @@
         </p:nvSpPr>
         <p:spPr>
           <a:xfrm>
-            <a:off x="723900" y="2212032"/>
-            <a:ext cx="16840200" cy="5757714"/>
+            <a:off x="723900" y="2164407"/>
+            <a:ext cx="8334375" cy="2840757"/>
           </a:xfrm>
           <a:prstGeom prst="roundRect">
             <a:avLst>
-              <a:gd name="adj" fmla="val 2978"/>
+              <a:gd name="adj" fmla="val 6035"/>
+            </a:avLst>
+          </a:prstGeom>
+          <a:solidFill>
+            <a:srgbClr val="FFFFFF"/>
+          </a:solidFill>
+          <a:ln w="9525">
+            <a:solidFill>
+              <a:srgbClr val="E2EAEF"/>
+            </a:solidFill>
+            <a:prstDash val="solid"/>
+          </a:ln>
+        </p:spPr>
+      </p:sp>
+      <p:sp>
+        <p:nvSpPr>
+          <p:cNvPr id="7" name="Text 5"/>
+          <p:cNvSpPr/>
+          <p:nvPr/>
+        </p:nvSpPr>
+        <p:spPr>
+          <a:xfrm>
+            <a:off x="962025" y="2364432"/>
+            <a:ext cx="8643938" cy="252413"/>
+          </a:xfrm>
+          <a:prstGeom prst="rect">
+            <a:avLst/>
+          </a:prstGeom>
+          <a:noFill/>
+          <a:ln/>
+        </p:spPr>
+        <p:txBody>
+          <a:bodyPr wrap="square" lIns="25400" tIns="25400" rIns="25400" bIns="25400" rtlCol="0" anchor="t">
+            <a:normAutofit/>
+          </a:bodyPr>
+          <a:lstStyle/>
+          <a:p>
+            <a:pPr algn="l" indent="0" marL="0">
+              <a:buNone/>
+            </a:pPr>
+            <a:r>
+              <a:rPr lang="en-US" sz="1500" b="1" spc="135" kern="0" dirty="0">
+                <a:solidFill>
+                  <a:srgbClr val="006C9F"/>
+                </a:solidFill>
+                <a:latin typeface="Arial" pitchFamily="34" charset="0"/>
+                <a:ea typeface="Arial" pitchFamily="34" charset="-122"/>
+                <a:cs typeface="Arial" pitchFamily="34" charset="-120"/>
+              </a:rPr>
+              <a:t>1 · DAILY CHECK</a:t>
+            </a:r>
+            <a:endParaRPr lang="en-US" sz="1500" dirty="0"/>
+          </a:p>
+        </p:txBody>
+      </p:sp>
+      <p:sp>
+        <p:nvSpPr>
+          <p:cNvPr id="8" name="Shape 6"/>
+          <p:cNvSpPr/>
+          <p:nvPr/>
+        </p:nvSpPr>
+        <p:spPr>
+          <a:xfrm>
+            <a:off x="962025" y="2693045"/>
+            <a:ext cx="2365325" cy="2112094"/>
+          </a:xfrm>
+          <a:prstGeom prst="roundRect">
+            <a:avLst>
+              <a:gd name="adj" fmla="val 5412"/>
             </a:avLst>
           </a:prstGeom>
           <a:solidFill>
@@ -8332,43 +10083,1677 @@
           </a:ln>
         </p:spPr>
       </p:sp>
-      <p:pic>
-        <p:nvPicPr>
-          <p:cNvPr id="7" name="Image 0" descr="preencoded.png">    </p:cNvPr>
-          <p:cNvPicPr>
-            <a:picLocks noChangeAspect="1"/>
-          </p:cNvPicPr>
-          <p:nvPr/>
-        </p:nvPicPr>
-        <p:blipFill>
-          <a:blip r:embed="rId1"/>
-          <a:srcRect l="-34738" r="-34738" t="0" b="0"/>
-          <a:stretch/>
-        </p:blipFill>
-        <p:spPr>
-          <a:xfrm>
-            <a:off x="847725" y="2335857"/>
-            <a:ext cx="16592550" cy="5510064"/>
-          </a:xfrm>
-          <a:prstGeom prst="rect">
-            <a:avLst/>
-          </a:prstGeom>
-        </p:spPr>
-      </p:pic>
-      <p:sp>
-        <p:nvSpPr>
-          <p:cNvPr id="8" name="Shape 5"/>
-          <p:cNvSpPr/>
-          <p:nvPr/>
-        </p:nvSpPr>
-        <p:spPr>
-          <a:xfrm>
-            <a:off x="723900" y="8160246"/>
-            <a:ext cx="16840200" cy="1555254"/>
+      <p:sp>
+        <p:nvSpPr>
+          <p:cNvPr id="9" name="Text 7"/>
+          <p:cNvSpPr/>
+          <p:nvPr/>
+        </p:nvSpPr>
+        <p:spPr>
+          <a:xfrm>
+            <a:off x="1104900" y="2797820"/>
+            <a:ext cx="2155775" cy="1940644"/>
+          </a:xfrm>
+          <a:prstGeom prst="rect">
+            <a:avLst/>
+          </a:prstGeom>
+          <a:noFill/>
+          <a:ln/>
+        </p:spPr>
+        <p:txBody>
+          <a:bodyPr wrap="square" lIns="25400" tIns="25400" rIns="25400" bIns="25400" rtlCol="0" anchor="ctr">
+            <a:normAutofit/>
+          </a:bodyPr>
+          <a:lstStyle/>
+          <a:p>
+            <a:pPr algn="l" indent="0" marL="0">
+              <a:lnSpc>
+                <a:spcPct val="106750"/>
+              </a:lnSpc>
+              <a:buNone/>
+            </a:pPr>
+            <a:r>
+              <a:rPr lang="en-US" sz="1575" b="1" dirty="0">
+                <a:solidFill>
+                  <a:srgbClr val="00334F"/>
+                </a:solidFill>
+                <a:latin typeface="Arial" pitchFamily="34" charset="0"/>
+                <a:ea typeface="Arial" pitchFamily="34" charset="-122"/>
+                <a:cs typeface="Arial" pitchFamily="34" charset="-120"/>
+              </a:rPr>
+              <a:t>4 AM ArcGIS freshness</a:t>
+            </a:r>
+            <a:endParaRPr lang="en-US" sz="1575" dirty="0"/>
+          </a:p>
+        </p:txBody>
+      </p:sp>
+      <p:sp>
+        <p:nvSpPr>
+          <p:cNvPr id="10" name="Text 8"/>
+          <p:cNvSpPr/>
+          <p:nvPr/>
+        </p:nvSpPr>
+        <p:spPr>
+          <a:xfrm>
+            <a:off x="3422600" y="3641899"/>
+            <a:ext cx="266700" cy="252413"/>
+          </a:xfrm>
+          <a:prstGeom prst="rect">
+            <a:avLst/>
+          </a:prstGeom>
+          <a:noFill/>
+          <a:ln/>
+        </p:spPr>
+        <p:txBody>
+          <a:bodyPr wrap="square" lIns="25400" tIns="25400" rIns="25400" bIns="25400" rtlCol="0" anchor="t">
+            <a:normAutofit/>
+          </a:bodyPr>
+          <a:lstStyle/>
+          <a:p>
+            <a:pPr algn="l" indent="0" marL="0">
+              <a:buNone/>
+            </a:pPr>
+            <a:r>
+              <a:rPr lang="en-US" sz="1500" b="1" dirty="0">
+                <a:solidFill>
+                  <a:srgbClr val="9DB4C2"/>
+                </a:solidFill>
+                <a:latin typeface="Arial" pitchFamily="34" charset="0"/>
+                <a:ea typeface="Arial" pitchFamily="34" charset="-122"/>
+                <a:cs typeface="Arial" pitchFamily="34" charset="-120"/>
+              </a:rPr>
+              <a:t>→</a:t>
+            </a:r>
+            <a:endParaRPr lang="en-US" sz="1500" dirty="0"/>
+          </a:p>
+        </p:txBody>
+      </p:sp>
+      <p:sp>
+        <p:nvSpPr>
+          <p:cNvPr id="11" name="Shape 9"/>
+          <p:cNvSpPr/>
+          <p:nvPr/>
+        </p:nvSpPr>
+        <p:spPr>
+          <a:xfrm>
+            <a:off x="3708350" y="2693045"/>
+            <a:ext cx="2365400" cy="2112094"/>
           </a:xfrm>
           <a:prstGeom prst="roundRect">
             <a:avLst>
-              <a:gd name="adj" fmla="val 11024"/>
+              <a:gd name="adj" fmla="val 5412"/>
+            </a:avLst>
+          </a:prstGeom>
+          <a:solidFill>
+            <a:srgbClr val="F7FAFC"/>
+          </a:solidFill>
+          <a:ln w="9525">
+            <a:solidFill>
+              <a:srgbClr val="E2EAEF"/>
+            </a:solidFill>
+            <a:prstDash val="solid"/>
+          </a:ln>
+        </p:spPr>
+      </p:sp>
+      <p:sp>
+        <p:nvSpPr>
+          <p:cNvPr id="12" name="Text 10"/>
+          <p:cNvSpPr/>
+          <p:nvPr/>
+        </p:nvSpPr>
+        <p:spPr>
+          <a:xfrm>
+            <a:off x="3851225" y="2797820"/>
+            <a:ext cx="2155850" cy="1940644"/>
+          </a:xfrm>
+          <a:prstGeom prst="rect">
+            <a:avLst/>
+          </a:prstGeom>
+          <a:noFill/>
+          <a:ln/>
+        </p:spPr>
+        <p:txBody>
+          <a:bodyPr wrap="square" lIns="25400" tIns="25400" rIns="25400" bIns="25400" rtlCol="0" anchor="ctr">
+            <a:normAutofit/>
+          </a:bodyPr>
+          <a:lstStyle/>
+          <a:p>
+            <a:pPr algn="l" indent="0" marL="0">
+              <a:lnSpc>
+                <a:spcPct val="106750"/>
+              </a:lnSpc>
+              <a:buNone/>
+            </a:pPr>
+            <a:r>
+              <a:rPr lang="en-US" sz="1575" b="1" dirty="0">
+                <a:solidFill>
+                  <a:srgbClr val="00334F"/>
+                </a:solidFill>
+                <a:latin typeface="Arial" pitchFamily="34" charset="0"/>
+                <a:ea typeface="Arial" pitchFamily="34" charset="-122"/>
+                <a:cs typeface="Arial" pitchFamily="34" charset="-120"/>
+              </a:rPr>
+              <a:t>Map and KPI agree</a:t>
+            </a:r>
+            <a:endParaRPr lang="en-US" sz="1575" dirty="0"/>
+          </a:p>
+        </p:txBody>
+      </p:sp>
+      <p:sp>
+        <p:nvSpPr>
+          <p:cNvPr id="13" name="Text 11"/>
+          <p:cNvSpPr/>
+          <p:nvPr/>
+        </p:nvSpPr>
+        <p:spPr>
+          <a:xfrm>
+            <a:off x="6169000" y="3641899"/>
+            <a:ext cx="266700" cy="252413"/>
+          </a:xfrm>
+          <a:prstGeom prst="rect">
+            <a:avLst/>
+          </a:prstGeom>
+          <a:noFill/>
+          <a:ln/>
+        </p:spPr>
+        <p:txBody>
+          <a:bodyPr wrap="square" lIns="25400" tIns="25400" rIns="25400" bIns="25400" rtlCol="0" anchor="t">
+            <a:normAutofit/>
+          </a:bodyPr>
+          <a:lstStyle/>
+          <a:p>
+            <a:pPr algn="l" indent="0" marL="0">
+              <a:buNone/>
+            </a:pPr>
+            <a:r>
+              <a:rPr lang="en-US" sz="1500" b="1" dirty="0">
+                <a:solidFill>
+                  <a:srgbClr val="9DB4C2"/>
+                </a:solidFill>
+                <a:latin typeface="Arial" pitchFamily="34" charset="0"/>
+                <a:ea typeface="Arial" pitchFamily="34" charset="-122"/>
+                <a:cs typeface="Arial" pitchFamily="34" charset="-120"/>
+              </a:rPr>
+              <a:t>→</a:t>
+            </a:r>
+            <a:endParaRPr lang="en-US" sz="1500" dirty="0"/>
+          </a:p>
+        </p:txBody>
+      </p:sp>
+      <p:sp>
+        <p:nvSpPr>
+          <p:cNvPr id="14" name="Shape 12"/>
+          <p:cNvSpPr/>
+          <p:nvPr/>
+        </p:nvSpPr>
+        <p:spPr>
+          <a:xfrm>
+            <a:off x="6454750" y="2693045"/>
+            <a:ext cx="2365400" cy="2112094"/>
+          </a:xfrm>
+          <a:prstGeom prst="roundRect">
+            <a:avLst>
+              <a:gd name="adj" fmla="val 5412"/>
+            </a:avLst>
+          </a:prstGeom>
+          <a:solidFill>
+            <a:srgbClr val="F7FAFC"/>
+          </a:solidFill>
+          <a:ln w="9525">
+            <a:solidFill>
+              <a:srgbClr val="E2EAEF"/>
+            </a:solidFill>
+            <a:prstDash val="solid"/>
+          </a:ln>
+        </p:spPr>
+      </p:sp>
+      <p:sp>
+        <p:nvSpPr>
+          <p:cNvPr id="15" name="Text 13"/>
+          <p:cNvSpPr/>
+          <p:nvPr/>
+        </p:nvSpPr>
+        <p:spPr>
+          <a:xfrm>
+            <a:off x="6597625" y="2797820"/>
+            <a:ext cx="2155850" cy="1940644"/>
+          </a:xfrm>
+          <a:prstGeom prst="rect">
+            <a:avLst/>
+          </a:prstGeom>
+          <a:noFill/>
+          <a:ln/>
+        </p:spPr>
+        <p:txBody>
+          <a:bodyPr wrap="square" lIns="25400" tIns="25400" rIns="25400" bIns="25400" rtlCol="0" anchor="ctr">
+            <a:normAutofit/>
+          </a:bodyPr>
+          <a:lstStyle/>
+          <a:p>
+            <a:pPr algn="l" indent="0" marL="0">
+              <a:lnSpc>
+                <a:spcPct val="106750"/>
+              </a:lnSpc>
+              <a:buNone/>
+            </a:pPr>
+            <a:r>
+              <a:rPr lang="en-US" sz="1575" b="1" dirty="0">
+                <a:solidFill>
+                  <a:srgbClr val="00334F"/>
+                </a:solidFill>
+                <a:latin typeface="Arial" pitchFamily="34" charset="0"/>
+                <a:ea typeface="Arial" pitchFamily="34" charset="-122"/>
+                <a:cs typeface="Arial" pitchFamily="34" charset="-120"/>
+              </a:rPr>
+              <a:t>Power BI embed loads</a:t>
+            </a:r>
+            <a:endParaRPr lang="en-US" sz="1575" dirty="0"/>
+          </a:p>
+        </p:txBody>
+      </p:sp>
+      <p:sp>
+        <p:nvSpPr>
+          <p:cNvPr id="16" name="Shape 14"/>
+          <p:cNvSpPr/>
+          <p:nvPr/>
+        </p:nvSpPr>
+        <p:spPr>
+          <a:xfrm>
+            <a:off x="9229725" y="2164407"/>
+            <a:ext cx="8334375" cy="2840757"/>
+          </a:xfrm>
+          <a:prstGeom prst="roundRect">
+            <a:avLst>
+              <a:gd name="adj" fmla="val 6035"/>
+            </a:avLst>
+          </a:prstGeom>
+          <a:solidFill>
+            <a:srgbClr val="FFFFFF"/>
+          </a:solidFill>
+          <a:ln w="9525">
+            <a:solidFill>
+              <a:srgbClr val="E2EAEF"/>
+            </a:solidFill>
+            <a:prstDash val="solid"/>
+          </a:ln>
+        </p:spPr>
+      </p:sp>
+      <p:sp>
+        <p:nvSpPr>
+          <p:cNvPr id="17" name="Text 15"/>
+          <p:cNvSpPr/>
+          <p:nvPr/>
+        </p:nvSpPr>
+        <p:spPr>
+          <a:xfrm>
+            <a:off x="9467850" y="2364432"/>
+            <a:ext cx="8643938" cy="252413"/>
+          </a:xfrm>
+          <a:prstGeom prst="rect">
+            <a:avLst/>
+          </a:prstGeom>
+          <a:noFill/>
+          <a:ln/>
+        </p:spPr>
+        <p:txBody>
+          <a:bodyPr wrap="square" lIns="25400" tIns="25400" rIns="25400" bIns="25400" rtlCol="0" anchor="t">
+            <a:normAutofit/>
+          </a:bodyPr>
+          <a:lstStyle/>
+          <a:p>
+            <a:pPr algn="l" indent="0" marL="0">
+              <a:buNone/>
+            </a:pPr>
+            <a:r>
+              <a:rPr lang="en-US" sz="1500" b="1" spc="135" kern="0" dirty="0">
+                <a:solidFill>
+                  <a:srgbClr val="006C9F"/>
+                </a:solidFill>
+                <a:latin typeface="Arial" pitchFamily="34" charset="0"/>
+                <a:ea typeface="Arial" pitchFamily="34" charset="-122"/>
+                <a:cs typeface="Arial" pitchFamily="34" charset="-120"/>
+              </a:rPr>
+              <a:t>2 · SAFE CHANGE</a:t>
+            </a:r>
+            <a:endParaRPr lang="en-US" sz="1500" dirty="0"/>
+          </a:p>
+        </p:txBody>
+      </p:sp>
+      <p:sp>
+        <p:nvSpPr>
+          <p:cNvPr id="18" name="Shape 16"/>
+          <p:cNvSpPr/>
+          <p:nvPr/>
+        </p:nvSpPr>
+        <p:spPr>
+          <a:xfrm>
+            <a:off x="9467850" y="2693045"/>
+            <a:ext cx="1297260" cy="2112094"/>
+          </a:xfrm>
+          <a:prstGeom prst="roundRect">
+            <a:avLst>
+              <a:gd name="adj" fmla="val 8811"/>
+            </a:avLst>
+          </a:prstGeom>
+          <a:solidFill>
+            <a:srgbClr val="F7FAFC"/>
+          </a:solidFill>
+          <a:ln w="9525">
+            <a:solidFill>
+              <a:srgbClr val="E2EAEF"/>
+            </a:solidFill>
+            <a:prstDash val="solid"/>
+          </a:ln>
+        </p:spPr>
+      </p:sp>
+      <p:sp>
+        <p:nvSpPr>
+          <p:cNvPr id="19" name="Text 17"/>
+          <p:cNvSpPr/>
+          <p:nvPr/>
+        </p:nvSpPr>
+        <p:spPr>
+          <a:xfrm>
+            <a:off x="9610725" y="2797820"/>
+            <a:ext cx="1087710" cy="1940644"/>
+          </a:xfrm>
+          <a:prstGeom prst="rect">
+            <a:avLst/>
+          </a:prstGeom>
+          <a:noFill/>
+          <a:ln/>
+        </p:spPr>
+        <p:txBody>
+          <a:bodyPr wrap="square" lIns="25400" tIns="25400" rIns="25400" bIns="25400" rtlCol="0" anchor="ctr">
+            <a:normAutofit/>
+          </a:bodyPr>
+          <a:lstStyle/>
+          <a:p>
+            <a:pPr algn="l" indent="0" marL="0">
+              <a:lnSpc>
+                <a:spcPct val="106750"/>
+              </a:lnSpc>
+              <a:buNone/>
+            </a:pPr>
+            <a:r>
+              <a:rPr lang="en-US" sz="1575" b="1" dirty="0">
+                <a:solidFill>
+                  <a:srgbClr val="00334F"/>
+                </a:solidFill>
+                <a:latin typeface="Arial" pitchFamily="34" charset="0"/>
+                <a:ea typeface="Arial" pitchFamily="34" charset="-122"/>
+                <a:cs typeface="Arial" pitchFamily="34" charset="-120"/>
+              </a:rPr>
+              <a:t>Read sources</a:t>
+            </a:r>
+            <a:endParaRPr lang="en-US" sz="1575" dirty="0"/>
+          </a:p>
+        </p:txBody>
+      </p:sp>
+      <p:sp>
+        <p:nvSpPr>
+          <p:cNvPr id="20" name="Text 18"/>
+          <p:cNvSpPr/>
+          <p:nvPr/>
+        </p:nvSpPr>
+        <p:spPr>
+          <a:xfrm>
+            <a:off x="10841310" y="3641899"/>
+            <a:ext cx="266700" cy="252413"/>
+          </a:xfrm>
+          <a:prstGeom prst="rect">
+            <a:avLst/>
+          </a:prstGeom>
+          <a:noFill/>
+          <a:ln/>
+        </p:spPr>
+        <p:txBody>
+          <a:bodyPr wrap="square" lIns="25400" tIns="25400" rIns="25400" bIns="25400" rtlCol="0" anchor="t">
+            <a:normAutofit/>
+          </a:bodyPr>
+          <a:lstStyle/>
+          <a:p>
+            <a:pPr algn="l" indent="0" marL="0">
+              <a:buNone/>
+            </a:pPr>
+            <a:r>
+              <a:rPr lang="en-US" sz="1500" b="1" dirty="0">
+                <a:solidFill>
+                  <a:srgbClr val="9DB4C2"/>
+                </a:solidFill>
+                <a:latin typeface="Arial" pitchFamily="34" charset="0"/>
+                <a:ea typeface="Arial" pitchFamily="34" charset="-122"/>
+                <a:cs typeface="Arial" pitchFamily="34" charset="-120"/>
+              </a:rPr>
+              <a:t>→</a:t>
+            </a:r>
+            <a:endParaRPr lang="en-US" sz="1500" dirty="0"/>
+          </a:p>
+        </p:txBody>
+      </p:sp>
+      <p:sp>
+        <p:nvSpPr>
+          <p:cNvPr id="21" name="Shape 19"/>
+          <p:cNvSpPr/>
+          <p:nvPr/>
+        </p:nvSpPr>
+        <p:spPr>
+          <a:xfrm>
+            <a:off x="11108010" y="2693045"/>
+            <a:ext cx="1297335" cy="2112094"/>
+          </a:xfrm>
+          <a:prstGeom prst="roundRect">
+            <a:avLst>
+              <a:gd name="adj" fmla="val 8810"/>
+            </a:avLst>
+          </a:prstGeom>
+          <a:solidFill>
+            <a:srgbClr val="F7FAFC"/>
+          </a:solidFill>
+          <a:ln w="9525">
+            <a:solidFill>
+              <a:srgbClr val="E2EAEF"/>
+            </a:solidFill>
+            <a:prstDash val="solid"/>
+          </a:ln>
+        </p:spPr>
+      </p:sp>
+      <p:sp>
+        <p:nvSpPr>
+          <p:cNvPr id="22" name="Text 20"/>
+          <p:cNvSpPr/>
+          <p:nvPr/>
+        </p:nvSpPr>
+        <p:spPr>
+          <a:xfrm>
+            <a:off x="11250885" y="2797820"/>
+            <a:ext cx="1087785" cy="1940644"/>
+          </a:xfrm>
+          <a:prstGeom prst="rect">
+            <a:avLst/>
+          </a:prstGeom>
+          <a:noFill/>
+          <a:ln/>
+        </p:spPr>
+        <p:txBody>
+          <a:bodyPr wrap="square" lIns="25400" tIns="25400" rIns="25400" bIns="25400" rtlCol="0" anchor="ctr">
+            <a:normAutofit/>
+          </a:bodyPr>
+          <a:lstStyle/>
+          <a:p>
+            <a:pPr algn="l" indent="0" marL="0">
+              <a:lnSpc>
+                <a:spcPct val="106750"/>
+              </a:lnSpc>
+              <a:buNone/>
+            </a:pPr>
+            <a:r>
+              <a:rPr lang="en-US" sz="1575" b="1" dirty="0">
+                <a:solidFill>
+                  <a:srgbClr val="00334F"/>
+                </a:solidFill>
+                <a:latin typeface="Arial" pitchFamily="34" charset="0"/>
+                <a:ea typeface="Arial" pitchFamily="34" charset="-122"/>
+                <a:cs typeface="Arial" pitchFamily="34" charset="-120"/>
+              </a:rPr>
+              <a:t>Define metric</a:t>
+            </a:r>
+            <a:endParaRPr lang="en-US" sz="1575" dirty="0"/>
+          </a:p>
+        </p:txBody>
+      </p:sp>
+      <p:sp>
+        <p:nvSpPr>
+          <p:cNvPr id="23" name="Text 21"/>
+          <p:cNvSpPr/>
+          <p:nvPr/>
+        </p:nvSpPr>
+        <p:spPr>
+          <a:xfrm>
+            <a:off x="12481545" y="3641899"/>
+            <a:ext cx="266700" cy="252413"/>
+          </a:xfrm>
+          <a:prstGeom prst="rect">
+            <a:avLst/>
+          </a:prstGeom>
+          <a:noFill/>
+          <a:ln/>
+        </p:spPr>
+        <p:txBody>
+          <a:bodyPr wrap="square" lIns="25400" tIns="25400" rIns="25400" bIns="25400" rtlCol="0" anchor="t">
+            <a:normAutofit/>
+          </a:bodyPr>
+          <a:lstStyle/>
+          <a:p>
+            <a:pPr algn="l" indent="0" marL="0">
+              <a:buNone/>
+            </a:pPr>
+            <a:r>
+              <a:rPr lang="en-US" sz="1500" b="1" dirty="0">
+                <a:solidFill>
+                  <a:srgbClr val="9DB4C2"/>
+                </a:solidFill>
+                <a:latin typeface="Arial" pitchFamily="34" charset="0"/>
+                <a:ea typeface="Arial" pitchFamily="34" charset="-122"/>
+                <a:cs typeface="Arial" pitchFamily="34" charset="-120"/>
+              </a:rPr>
+              <a:t>→</a:t>
+            </a:r>
+            <a:endParaRPr lang="en-US" sz="1500" dirty="0"/>
+          </a:p>
+        </p:txBody>
+      </p:sp>
+      <p:sp>
+        <p:nvSpPr>
+          <p:cNvPr id="24" name="Shape 22"/>
+          <p:cNvSpPr/>
+          <p:nvPr/>
+        </p:nvSpPr>
+        <p:spPr>
+          <a:xfrm>
+            <a:off x="12748245" y="2693045"/>
+            <a:ext cx="1297260" cy="2112094"/>
+          </a:xfrm>
+          <a:prstGeom prst="roundRect">
+            <a:avLst>
+              <a:gd name="adj" fmla="val 8811"/>
+            </a:avLst>
+          </a:prstGeom>
+          <a:solidFill>
+            <a:srgbClr val="F7FAFC"/>
+          </a:solidFill>
+          <a:ln w="9525">
+            <a:solidFill>
+              <a:srgbClr val="E2EAEF"/>
+            </a:solidFill>
+            <a:prstDash val="solid"/>
+          </a:ln>
+        </p:spPr>
+      </p:sp>
+      <p:sp>
+        <p:nvSpPr>
+          <p:cNvPr id="25" name="Text 23"/>
+          <p:cNvSpPr/>
+          <p:nvPr/>
+        </p:nvSpPr>
+        <p:spPr>
+          <a:xfrm>
+            <a:off x="12891120" y="2797820"/>
+            <a:ext cx="1087710" cy="1940644"/>
+          </a:xfrm>
+          <a:prstGeom prst="rect">
+            <a:avLst/>
+          </a:prstGeom>
+          <a:noFill/>
+          <a:ln/>
+        </p:spPr>
+        <p:txBody>
+          <a:bodyPr wrap="square" lIns="25400" tIns="25400" rIns="25400" bIns="25400" rtlCol="0" anchor="ctr">
+            <a:normAutofit/>
+          </a:bodyPr>
+          <a:lstStyle/>
+          <a:p>
+            <a:pPr algn="l" indent="0" marL="0">
+              <a:lnSpc>
+                <a:spcPct val="106750"/>
+              </a:lnSpc>
+              <a:buNone/>
+            </a:pPr>
+            <a:r>
+              <a:rPr lang="en-US" sz="1575" b="1" dirty="0">
+                <a:solidFill>
+                  <a:srgbClr val="00334F"/>
+                </a:solidFill>
+                <a:latin typeface="Arial" pitchFamily="34" charset="0"/>
+                <a:ea typeface="Arial" pitchFamily="34" charset="-122"/>
+                <a:cs typeface="Arial" pitchFamily="34" charset="-120"/>
+              </a:rPr>
+              <a:t>Edit adapter</a:t>
+            </a:r>
+            <a:endParaRPr lang="en-US" sz="1575" dirty="0"/>
+          </a:p>
+        </p:txBody>
+      </p:sp>
+      <p:sp>
+        <p:nvSpPr>
+          <p:cNvPr id="26" name="Text 24"/>
+          <p:cNvSpPr/>
+          <p:nvPr/>
+        </p:nvSpPr>
+        <p:spPr>
+          <a:xfrm>
+            <a:off x="14121705" y="3641899"/>
+            <a:ext cx="266700" cy="252413"/>
+          </a:xfrm>
+          <a:prstGeom prst="rect">
+            <a:avLst/>
+          </a:prstGeom>
+          <a:noFill/>
+          <a:ln/>
+        </p:spPr>
+        <p:txBody>
+          <a:bodyPr wrap="square" lIns="25400" tIns="25400" rIns="25400" bIns="25400" rtlCol="0" anchor="t">
+            <a:normAutofit/>
+          </a:bodyPr>
+          <a:lstStyle/>
+          <a:p>
+            <a:pPr algn="l" indent="0" marL="0">
+              <a:buNone/>
+            </a:pPr>
+            <a:r>
+              <a:rPr lang="en-US" sz="1500" b="1" dirty="0">
+                <a:solidFill>
+                  <a:srgbClr val="9DB4C2"/>
+                </a:solidFill>
+                <a:latin typeface="Arial" pitchFamily="34" charset="0"/>
+                <a:ea typeface="Arial" pitchFamily="34" charset="-122"/>
+                <a:cs typeface="Arial" pitchFamily="34" charset="-120"/>
+              </a:rPr>
+              <a:t>→</a:t>
+            </a:r>
+            <a:endParaRPr lang="en-US" sz="1500" dirty="0"/>
+          </a:p>
+        </p:txBody>
+      </p:sp>
+      <p:sp>
+        <p:nvSpPr>
+          <p:cNvPr id="27" name="Shape 25"/>
+          <p:cNvSpPr/>
+          <p:nvPr/>
+        </p:nvSpPr>
+        <p:spPr>
+          <a:xfrm>
+            <a:off x="14388405" y="2693045"/>
+            <a:ext cx="1297335" cy="2112094"/>
+          </a:xfrm>
+          <a:prstGeom prst="roundRect">
+            <a:avLst>
+              <a:gd name="adj" fmla="val 8810"/>
+            </a:avLst>
+          </a:prstGeom>
+          <a:solidFill>
+            <a:srgbClr val="F7FAFC"/>
+          </a:solidFill>
+          <a:ln w="9525">
+            <a:solidFill>
+              <a:srgbClr val="E2EAEF"/>
+            </a:solidFill>
+            <a:prstDash val="solid"/>
+          </a:ln>
+        </p:spPr>
+      </p:sp>
+      <p:sp>
+        <p:nvSpPr>
+          <p:cNvPr id="28" name="Text 26"/>
+          <p:cNvSpPr/>
+          <p:nvPr/>
+        </p:nvSpPr>
+        <p:spPr>
+          <a:xfrm>
+            <a:off x="14531280" y="2797820"/>
+            <a:ext cx="1087785" cy="1940644"/>
+          </a:xfrm>
+          <a:prstGeom prst="rect">
+            <a:avLst/>
+          </a:prstGeom>
+          <a:noFill/>
+          <a:ln/>
+        </p:spPr>
+        <p:txBody>
+          <a:bodyPr wrap="square" lIns="25400" tIns="25400" rIns="25400" bIns="25400" rtlCol="0" anchor="ctr">
+            <a:normAutofit/>
+          </a:bodyPr>
+          <a:lstStyle/>
+          <a:p>
+            <a:pPr algn="l" indent="0" marL="0">
+              <a:lnSpc>
+                <a:spcPct val="106750"/>
+              </a:lnSpc>
+              <a:buNone/>
+            </a:pPr>
+            <a:r>
+              <a:rPr lang="en-US" sz="1575" b="1" dirty="0">
+                <a:solidFill>
+                  <a:srgbClr val="00334F"/>
+                </a:solidFill>
+                <a:latin typeface="Arial" pitchFamily="34" charset="0"/>
+                <a:ea typeface="Arial" pitchFamily="34" charset="-122"/>
+                <a:cs typeface="Arial" pitchFamily="34" charset="-120"/>
+              </a:rPr>
+              <a:t>Run tests</a:t>
+            </a:r>
+            <a:endParaRPr lang="en-US" sz="1575" dirty="0"/>
+          </a:p>
+        </p:txBody>
+      </p:sp>
+      <p:sp>
+        <p:nvSpPr>
+          <p:cNvPr id="29" name="Text 27"/>
+          <p:cNvSpPr/>
+          <p:nvPr/>
+        </p:nvSpPr>
+        <p:spPr>
+          <a:xfrm>
+            <a:off x="15761940" y="3641899"/>
+            <a:ext cx="266700" cy="252413"/>
+          </a:xfrm>
+          <a:prstGeom prst="rect">
+            <a:avLst/>
+          </a:prstGeom>
+          <a:noFill/>
+          <a:ln/>
+        </p:spPr>
+        <p:txBody>
+          <a:bodyPr wrap="square" lIns="25400" tIns="25400" rIns="25400" bIns="25400" rtlCol="0" anchor="t">
+            <a:normAutofit/>
+          </a:bodyPr>
+          <a:lstStyle/>
+          <a:p>
+            <a:pPr algn="l" indent="0" marL="0">
+              <a:buNone/>
+            </a:pPr>
+            <a:r>
+              <a:rPr lang="en-US" sz="1500" b="1" dirty="0">
+                <a:solidFill>
+                  <a:srgbClr val="9DB4C2"/>
+                </a:solidFill>
+                <a:latin typeface="Arial" pitchFamily="34" charset="0"/>
+                <a:ea typeface="Arial" pitchFamily="34" charset="-122"/>
+                <a:cs typeface="Arial" pitchFamily="34" charset="-120"/>
+              </a:rPr>
+              <a:t>→</a:t>
+            </a:r>
+            <a:endParaRPr lang="en-US" sz="1500" dirty="0"/>
+          </a:p>
+        </p:txBody>
+      </p:sp>
+      <p:sp>
+        <p:nvSpPr>
+          <p:cNvPr id="30" name="Shape 28"/>
+          <p:cNvSpPr/>
+          <p:nvPr/>
+        </p:nvSpPr>
+        <p:spPr>
+          <a:xfrm>
+            <a:off x="16028640" y="2693045"/>
+            <a:ext cx="1297335" cy="2112094"/>
+          </a:xfrm>
+          <a:prstGeom prst="roundRect">
+            <a:avLst>
+              <a:gd name="adj" fmla="val 8810"/>
+            </a:avLst>
+          </a:prstGeom>
+          <a:solidFill>
+            <a:srgbClr val="F7FAFC"/>
+          </a:solidFill>
+          <a:ln w="9525">
+            <a:solidFill>
+              <a:srgbClr val="E2EAEF"/>
+            </a:solidFill>
+            <a:prstDash val="solid"/>
+          </a:ln>
+        </p:spPr>
+      </p:sp>
+      <p:sp>
+        <p:nvSpPr>
+          <p:cNvPr id="31" name="Text 29"/>
+          <p:cNvSpPr/>
+          <p:nvPr/>
+        </p:nvSpPr>
+        <p:spPr>
+          <a:xfrm>
+            <a:off x="16171515" y="2797820"/>
+            <a:ext cx="1087785" cy="1940644"/>
+          </a:xfrm>
+          <a:prstGeom prst="rect">
+            <a:avLst/>
+          </a:prstGeom>
+          <a:noFill/>
+          <a:ln/>
+        </p:spPr>
+        <p:txBody>
+          <a:bodyPr wrap="square" lIns="25400" tIns="25400" rIns="25400" bIns="25400" rtlCol="0" anchor="ctr">
+            <a:normAutofit/>
+          </a:bodyPr>
+          <a:lstStyle/>
+          <a:p>
+            <a:pPr algn="l" indent="0" marL="0">
+              <a:lnSpc>
+                <a:spcPct val="106750"/>
+              </a:lnSpc>
+              <a:buNone/>
+            </a:pPr>
+            <a:r>
+              <a:rPr lang="en-US" sz="1575" b="1" dirty="0">
+                <a:solidFill>
+                  <a:srgbClr val="00334F"/>
+                </a:solidFill>
+                <a:latin typeface="Arial" pitchFamily="34" charset="0"/>
+                <a:ea typeface="Arial" pitchFamily="34" charset="-122"/>
+                <a:cs typeface="Arial" pitchFamily="34" charset="-120"/>
+              </a:rPr>
+              <a:t>PR + deploy</a:t>
+            </a:r>
+            <a:endParaRPr lang="en-US" sz="1575" dirty="0"/>
+          </a:p>
+        </p:txBody>
+      </p:sp>
+      <p:sp>
+        <p:nvSpPr>
+          <p:cNvPr id="32" name="Shape 30"/>
+          <p:cNvSpPr/>
+          <p:nvPr/>
+        </p:nvSpPr>
+        <p:spPr>
+          <a:xfrm>
+            <a:off x="723900" y="5176614"/>
+            <a:ext cx="8334375" cy="2840757"/>
+          </a:xfrm>
+          <a:prstGeom prst="roundRect">
+            <a:avLst>
+              <a:gd name="adj" fmla="val 6035"/>
+            </a:avLst>
+          </a:prstGeom>
+          <a:solidFill>
+            <a:srgbClr val="FFFFFF"/>
+          </a:solidFill>
+          <a:ln w="9525">
+            <a:solidFill>
+              <a:srgbClr val="E2EAEF"/>
+            </a:solidFill>
+            <a:prstDash val="solid"/>
+          </a:ln>
+        </p:spPr>
+      </p:sp>
+      <p:sp>
+        <p:nvSpPr>
+          <p:cNvPr id="33" name="Text 31"/>
+          <p:cNvSpPr/>
+          <p:nvPr/>
+        </p:nvSpPr>
+        <p:spPr>
+          <a:xfrm>
+            <a:off x="962025" y="5376639"/>
+            <a:ext cx="8643938" cy="252413"/>
+          </a:xfrm>
+          <a:prstGeom prst="rect">
+            <a:avLst/>
+          </a:prstGeom>
+          <a:noFill/>
+          <a:ln/>
+        </p:spPr>
+        <p:txBody>
+          <a:bodyPr wrap="square" lIns="25400" tIns="25400" rIns="25400" bIns="25400" rtlCol="0" anchor="t">
+            <a:normAutofit/>
+          </a:bodyPr>
+          <a:lstStyle/>
+          <a:p>
+            <a:pPr algn="l" indent="0" marL="0">
+              <a:buNone/>
+            </a:pPr>
+            <a:r>
+              <a:rPr lang="en-US" sz="1500" b="1" spc="135" kern="0" dirty="0">
+                <a:solidFill>
+                  <a:srgbClr val="006C9F"/>
+                </a:solidFill>
+                <a:latin typeface="Arial" pitchFamily="34" charset="0"/>
+                <a:ea typeface="Arial" pitchFamily="34" charset="-122"/>
+                <a:cs typeface="Arial" pitchFamily="34" charset="-120"/>
+              </a:rPr>
+              <a:t>3 · DO NOT DRIFT</a:t>
+            </a:r>
+            <a:endParaRPr lang="en-US" sz="1500" dirty="0"/>
+          </a:p>
+        </p:txBody>
+      </p:sp>
+      <p:sp>
+        <p:nvSpPr>
+          <p:cNvPr id="34" name="Text 32"/>
+          <p:cNvSpPr/>
+          <p:nvPr/>
+        </p:nvSpPr>
+        <p:spPr>
+          <a:xfrm>
+            <a:off x="962025" y="5705252"/>
+            <a:ext cx="134466" cy="300038"/>
+          </a:xfrm>
+          <a:prstGeom prst="rect">
+            <a:avLst/>
+          </a:prstGeom>
+          <a:noFill/>
+          <a:ln/>
+        </p:spPr>
+        <p:txBody>
+          <a:bodyPr wrap="square" lIns="25400" tIns="25400" rIns="25400" bIns="25400" rtlCol="0" anchor="t">
+            <a:normAutofit/>
+          </a:bodyPr>
+          <a:lstStyle/>
+          <a:p>
+            <a:pPr algn="l" indent="0" marL="0">
+              <a:lnSpc>
+                <a:spcPct val="110000"/>
+              </a:lnSpc>
+              <a:buNone/>
+            </a:pPr>
+            <a:r>
+              <a:rPr lang="en-US" sz="1650" b="1" dirty="0">
+                <a:solidFill>
+                  <a:srgbClr val="C2410C"/>
+                </a:solidFill>
+                <a:latin typeface="Arial" pitchFamily="34" charset="0"/>
+                <a:ea typeface="Arial" pitchFamily="34" charset="-122"/>
+                <a:cs typeface="Arial" pitchFamily="34" charset="-120"/>
+              </a:rPr>
+              <a:t>!</a:t>
+            </a:r>
+            <a:endParaRPr lang="en-US" sz="1650" dirty="0"/>
+          </a:p>
+        </p:txBody>
+      </p:sp>
+      <p:sp>
+        <p:nvSpPr>
+          <p:cNvPr id="35" name="Text 33"/>
+          <p:cNvSpPr/>
+          <p:nvPr/>
+        </p:nvSpPr>
+        <p:spPr>
+          <a:xfrm>
+            <a:off x="1115541" y="5705252"/>
+            <a:ext cx="4253783" cy="300038"/>
+          </a:xfrm>
+          <a:prstGeom prst="rect">
+            <a:avLst/>
+          </a:prstGeom>
+          <a:noFill/>
+          <a:ln/>
+        </p:spPr>
+        <p:txBody>
+          <a:bodyPr wrap="square" lIns="25400" tIns="25400" rIns="25400" bIns="25400" rtlCol="0" anchor="t">
+            <a:normAutofit/>
+          </a:bodyPr>
+          <a:lstStyle/>
+          <a:p>
+            <a:pPr algn="l" indent="0" marL="0">
+              <a:lnSpc>
+                <a:spcPct val="110000"/>
+              </a:lnSpc>
+              <a:buNone/>
+            </a:pPr>
+            <a:r>
+              <a:rPr lang="en-US" sz="1650" b="1" dirty="0">
+                <a:solidFill>
+                  <a:srgbClr val="00334F"/>
+                </a:solidFill>
+                <a:latin typeface="Arial" pitchFamily="34" charset="0"/>
+                <a:ea typeface="Arial" pitchFamily="34" charset="-122"/>
+                <a:cs typeface="Arial" pitchFamily="34" charset="-120"/>
+              </a:rPr>
+              <a:t>Raw matched records, not unique parcels</a:t>
+            </a:r>
+            <a:endParaRPr lang="en-US" sz="1650" dirty="0"/>
+          </a:p>
+        </p:txBody>
+      </p:sp>
+      <p:sp>
+        <p:nvSpPr>
+          <p:cNvPr id="36" name="Text 34"/>
+          <p:cNvSpPr/>
+          <p:nvPr/>
+        </p:nvSpPr>
+        <p:spPr>
+          <a:xfrm>
+            <a:off x="962025" y="6043389"/>
+            <a:ext cx="134466" cy="300038"/>
+          </a:xfrm>
+          <a:prstGeom prst="rect">
+            <a:avLst/>
+          </a:prstGeom>
+          <a:noFill/>
+          <a:ln/>
+        </p:spPr>
+        <p:txBody>
+          <a:bodyPr wrap="square" lIns="25400" tIns="25400" rIns="25400" bIns="25400" rtlCol="0" anchor="t">
+            <a:normAutofit/>
+          </a:bodyPr>
+          <a:lstStyle/>
+          <a:p>
+            <a:pPr algn="l" indent="0" marL="0">
+              <a:lnSpc>
+                <a:spcPct val="110000"/>
+              </a:lnSpc>
+              <a:buNone/>
+            </a:pPr>
+            <a:r>
+              <a:rPr lang="en-US" sz="1650" b="1" dirty="0">
+                <a:solidFill>
+                  <a:srgbClr val="C2410C"/>
+                </a:solidFill>
+                <a:latin typeface="Arial" pitchFamily="34" charset="0"/>
+                <a:ea typeface="Arial" pitchFamily="34" charset="-122"/>
+                <a:cs typeface="Arial" pitchFamily="34" charset="-120"/>
+              </a:rPr>
+              <a:t>!</a:t>
+            </a:r>
+            <a:endParaRPr lang="en-US" sz="1650" dirty="0"/>
+          </a:p>
+        </p:txBody>
+      </p:sp>
+      <p:sp>
+        <p:nvSpPr>
+          <p:cNvPr id="37" name="Text 35"/>
+          <p:cNvSpPr/>
+          <p:nvPr/>
+        </p:nvSpPr>
+        <p:spPr>
+          <a:xfrm>
+            <a:off x="1115541" y="6043389"/>
+            <a:ext cx="3606879" cy="300038"/>
+          </a:xfrm>
+          <a:prstGeom prst="rect">
+            <a:avLst/>
+          </a:prstGeom>
+          <a:noFill/>
+          <a:ln/>
+        </p:spPr>
+        <p:txBody>
+          <a:bodyPr wrap="square" lIns="25400" tIns="25400" rIns="25400" bIns="25400" rtlCol="0" anchor="t">
+            <a:normAutofit/>
+          </a:bodyPr>
+          <a:lstStyle/>
+          <a:p>
+            <a:pPr algn="l" indent="0" marL="0">
+              <a:lnSpc>
+                <a:spcPct val="110000"/>
+              </a:lnSpc>
+              <a:buNone/>
+            </a:pPr>
+            <a:r>
+              <a:rPr lang="en-US" sz="1650" b="1" dirty="0">
+                <a:solidFill>
+                  <a:srgbClr val="00334F"/>
+                </a:solidFill>
+                <a:latin typeface="Arial" pitchFamily="34" charset="0"/>
+                <a:ea typeface="Arial" pitchFamily="34" charset="-122"/>
+                <a:cs typeface="Arial" pitchFamily="34" charset="-120"/>
+              </a:rPr>
+              <a:t>Move shared ?v= versions together</a:t>
+            </a:r>
+            <a:endParaRPr lang="en-US" sz="1650" dirty="0"/>
+          </a:p>
+        </p:txBody>
+      </p:sp>
+      <p:sp>
+        <p:nvSpPr>
+          <p:cNvPr id="38" name="Text 36"/>
+          <p:cNvSpPr/>
+          <p:nvPr/>
+        </p:nvSpPr>
+        <p:spPr>
+          <a:xfrm>
+            <a:off x="962025" y="6381527"/>
+            <a:ext cx="134466" cy="300038"/>
+          </a:xfrm>
+          <a:prstGeom prst="rect">
+            <a:avLst/>
+          </a:prstGeom>
+          <a:noFill/>
+          <a:ln/>
+        </p:spPr>
+        <p:txBody>
+          <a:bodyPr wrap="square" lIns="25400" tIns="25400" rIns="25400" bIns="25400" rtlCol="0" anchor="t">
+            <a:normAutofit/>
+          </a:bodyPr>
+          <a:lstStyle/>
+          <a:p>
+            <a:pPr algn="l" indent="0" marL="0">
+              <a:lnSpc>
+                <a:spcPct val="110000"/>
+              </a:lnSpc>
+              <a:buNone/>
+            </a:pPr>
+            <a:r>
+              <a:rPr lang="en-US" sz="1650" b="1" dirty="0">
+                <a:solidFill>
+                  <a:srgbClr val="C2410C"/>
+                </a:solidFill>
+                <a:latin typeface="Arial" pitchFamily="34" charset="0"/>
+                <a:ea typeface="Arial" pitchFamily="34" charset="-122"/>
+                <a:cs typeface="Arial" pitchFamily="34" charset="-120"/>
+              </a:rPr>
+              <a:t>!</a:t>
+            </a:r>
+            <a:endParaRPr lang="en-US" sz="1650" dirty="0"/>
+          </a:p>
+        </p:txBody>
+      </p:sp>
+      <p:sp>
+        <p:nvSpPr>
+          <p:cNvPr id="39" name="Text 37"/>
+          <p:cNvSpPr/>
+          <p:nvPr/>
+        </p:nvSpPr>
+        <p:spPr>
+          <a:xfrm>
+            <a:off x="1115541" y="6381527"/>
+            <a:ext cx="3382841" cy="300038"/>
+          </a:xfrm>
+          <a:prstGeom prst="rect">
+            <a:avLst/>
+          </a:prstGeom>
+          <a:noFill/>
+          <a:ln/>
+        </p:spPr>
+        <p:txBody>
+          <a:bodyPr wrap="square" lIns="25400" tIns="25400" rIns="25400" bIns="25400" rtlCol="0" anchor="t">
+            <a:normAutofit/>
+          </a:bodyPr>
+          <a:lstStyle/>
+          <a:p>
+            <a:pPr algn="l" indent="0" marL="0">
+              <a:lnSpc>
+                <a:spcPct val="110000"/>
+              </a:lnSpc>
+              <a:buNone/>
+            </a:pPr>
+            <a:r>
+              <a:rPr lang="en-US" sz="1650" b="1" dirty="0">
+                <a:solidFill>
+                  <a:srgbClr val="00334F"/>
+                </a:solidFill>
+                <a:latin typeface="Arial" pitchFamily="34" charset="0"/>
+                <a:ea typeface="Arial" pitchFamily="34" charset="-122"/>
+                <a:cs typeface="Arial" pitchFamily="34" charset="-120"/>
+              </a:rPr>
+              <a:t>Endpoints live in the adapter files</a:t>
+            </a:r>
+            <a:endParaRPr lang="en-US" sz="1650" dirty="0"/>
+          </a:p>
+        </p:txBody>
+      </p:sp>
+      <p:sp>
+        <p:nvSpPr>
+          <p:cNvPr id="40" name="Text 38"/>
+          <p:cNvSpPr/>
+          <p:nvPr/>
+        </p:nvSpPr>
+        <p:spPr>
+          <a:xfrm>
+            <a:off x="962025" y="6719664"/>
+            <a:ext cx="134466" cy="300038"/>
+          </a:xfrm>
+          <a:prstGeom prst="rect">
+            <a:avLst/>
+          </a:prstGeom>
+          <a:noFill/>
+          <a:ln/>
+        </p:spPr>
+        <p:txBody>
+          <a:bodyPr wrap="square" lIns="25400" tIns="25400" rIns="25400" bIns="25400" rtlCol="0" anchor="t">
+            <a:normAutofit/>
+          </a:bodyPr>
+          <a:lstStyle/>
+          <a:p>
+            <a:pPr algn="l" indent="0" marL="0">
+              <a:lnSpc>
+                <a:spcPct val="110000"/>
+              </a:lnSpc>
+              <a:buNone/>
+            </a:pPr>
+            <a:r>
+              <a:rPr lang="en-US" sz="1650" b="1" dirty="0">
+                <a:solidFill>
+                  <a:srgbClr val="C2410C"/>
+                </a:solidFill>
+                <a:latin typeface="Arial" pitchFamily="34" charset="0"/>
+                <a:ea typeface="Arial" pitchFamily="34" charset="-122"/>
+                <a:cs typeface="Arial" pitchFamily="34" charset="-120"/>
+              </a:rPr>
+              <a:t>!</a:t>
+            </a:r>
+            <a:endParaRPr lang="en-US" sz="1650" dirty="0"/>
+          </a:p>
+        </p:txBody>
+      </p:sp>
+      <p:sp>
+        <p:nvSpPr>
+          <p:cNvPr id="41" name="Text 39"/>
+          <p:cNvSpPr/>
+          <p:nvPr/>
+        </p:nvSpPr>
+        <p:spPr>
+          <a:xfrm>
+            <a:off x="1115541" y="6719664"/>
+            <a:ext cx="3715993" cy="300038"/>
+          </a:xfrm>
+          <a:prstGeom prst="rect">
+            <a:avLst/>
+          </a:prstGeom>
+          <a:noFill/>
+          <a:ln/>
+        </p:spPr>
+        <p:txBody>
+          <a:bodyPr wrap="square" lIns="25400" tIns="25400" rIns="25400" bIns="25400" rtlCol="0" anchor="t">
+            <a:normAutofit/>
+          </a:bodyPr>
+          <a:lstStyle/>
+          <a:p>
+            <a:pPr algn="l" indent="0" marL="0">
+              <a:lnSpc>
+                <a:spcPct val="110000"/>
+              </a:lnSpc>
+              <a:buNone/>
+            </a:pPr>
+            <a:r>
+              <a:rPr lang="en-US" sz="1650" b="1" dirty="0">
+                <a:solidFill>
+                  <a:srgbClr val="00334F"/>
+                </a:solidFill>
+                <a:latin typeface="Arial" pitchFamily="34" charset="0"/>
+                <a:ea typeface="Arial" pitchFamily="34" charset="-122"/>
+                <a:cs typeface="Arial" pitchFamily="34" charset="-120"/>
+              </a:rPr>
+              <a:t>Never hand-edit docs/landcare/data/</a:t>
+            </a:r>
+            <a:endParaRPr lang="en-US" sz="1650" dirty="0"/>
+          </a:p>
+        </p:txBody>
+      </p:sp>
+      <p:sp>
+        <p:nvSpPr>
+          <p:cNvPr id="42" name="Text 40"/>
+          <p:cNvSpPr/>
+          <p:nvPr/>
+        </p:nvSpPr>
+        <p:spPr>
+          <a:xfrm>
+            <a:off x="962025" y="7057802"/>
+            <a:ext cx="134466" cy="300038"/>
+          </a:xfrm>
+          <a:prstGeom prst="rect">
+            <a:avLst/>
+          </a:prstGeom>
+          <a:noFill/>
+          <a:ln/>
+        </p:spPr>
+        <p:txBody>
+          <a:bodyPr wrap="square" lIns="25400" tIns="25400" rIns="25400" bIns="25400" rtlCol="0" anchor="t">
+            <a:normAutofit/>
+          </a:bodyPr>
+          <a:lstStyle/>
+          <a:p>
+            <a:pPr algn="l" indent="0" marL="0">
+              <a:lnSpc>
+                <a:spcPct val="110000"/>
+              </a:lnSpc>
+              <a:buNone/>
+            </a:pPr>
+            <a:r>
+              <a:rPr lang="en-US" sz="1650" b="1" dirty="0">
+                <a:solidFill>
+                  <a:srgbClr val="C2410C"/>
+                </a:solidFill>
+                <a:latin typeface="Arial" pitchFamily="34" charset="0"/>
+                <a:ea typeface="Arial" pitchFamily="34" charset="-122"/>
+                <a:cs typeface="Arial" pitchFamily="34" charset="-120"/>
+              </a:rPr>
+              <a:t>!</a:t>
+            </a:r>
+            <a:endParaRPr lang="en-US" sz="1650" dirty="0"/>
+          </a:p>
+        </p:txBody>
+      </p:sp>
+      <p:sp>
+        <p:nvSpPr>
+          <p:cNvPr id="43" name="Text 41"/>
+          <p:cNvSpPr/>
+          <p:nvPr/>
+        </p:nvSpPr>
+        <p:spPr>
+          <a:xfrm>
+            <a:off x="1115541" y="7057802"/>
+            <a:ext cx="7227429" cy="300038"/>
+          </a:xfrm>
+          <a:prstGeom prst="rect">
+            <a:avLst/>
+          </a:prstGeom>
+          <a:noFill/>
+          <a:ln/>
+        </p:spPr>
+        <p:txBody>
+          <a:bodyPr wrap="square" lIns="25400" tIns="25400" rIns="25400" bIns="25400" rtlCol="0" anchor="t">
+            <a:normAutofit/>
+          </a:bodyPr>
+          <a:lstStyle/>
+          <a:p>
+            <a:pPr algn="l" indent="0" marL="0">
+              <a:lnSpc>
+                <a:spcPct val="110000"/>
+              </a:lnSpc>
+              <a:buNone/>
+            </a:pPr>
+            <a:r>
+              <a:rPr lang="en-US" sz="1650" b="1" dirty="0">
+                <a:solidFill>
+                  <a:srgbClr val="00334F"/>
+                </a:solidFill>
+                <a:latin typeface="Arial" pitchFamily="34" charset="0"/>
+                <a:ea typeface="Arial" pitchFamily="34" charset="-122"/>
+                <a:cs typeface="Arial" pitchFamily="34" charset="-120"/>
+              </a:rPr>
+              <a:t>Never embed Power BI page 8c93bab49c96aa8e3bd2 — wrong scope</a:t>
+            </a:r>
+            <a:endParaRPr lang="en-US" sz="1650" dirty="0"/>
+          </a:p>
+        </p:txBody>
+      </p:sp>
+      <p:sp>
+        <p:nvSpPr>
+          <p:cNvPr id="44" name="Shape 42"/>
+          <p:cNvSpPr/>
+          <p:nvPr/>
+        </p:nvSpPr>
+        <p:spPr>
+          <a:xfrm>
+            <a:off x="9229725" y="5176614"/>
+            <a:ext cx="8334375" cy="2840757"/>
+          </a:xfrm>
+          <a:prstGeom prst="roundRect">
+            <a:avLst>
+              <a:gd name="adj" fmla="val 6035"/>
+            </a:avLst>
+          </a:prstGeom>
+          <a:solidFill>
+            <a:srgbClr val="FFFFFF"/>
+          </a:solidFill>
+          <a:ln w="9525">
+            <a:solidFill>
+              <a:srgbClr val="E2EAEF"/>
+            </a:solidFill>
+            <a:prstDash val="solid"/>
+          </a:ln>
+        </p:spPr>
+      </p:sp>
+      <p:sp>
+        <p:nvSpPr>
+          <p:cNvPr id="45" name="Text 43"/>
+          <p:cNvSpPr/>
+          <p:nvPr/>
+        </p:nvSpPr>
+        <p:spPr>
+          <a:xfrm>
+            <a:off x="9467850" y="5376639"/>
+            <a:ext cx="8643938" cy="252413"/>
+          </a:xfrm>
+          <a:prstGeom prst="rect">
+            <a:avLst/>
+          </a:prstGeom>
+          <a:noFill/>
+          <a:ln/>
+        </p:spPr>
+        <p:txBody>
+          <a:bodyPr wrap="square" lIns="25400" tIns="25400" rIns="25400" bIns="25400" rtlCol="0" anchor="t">
+            <a:normAutofit/>
+          </a:bodyPr>
+          <a:lstStyle/>
+          <a:p>
+            <a:pPr algn="l" indent="0" marL="0">
+              <a:buNone/>
+            </a:pPr>
+            <a:r>
+              <a:rPr lang="en-US" sz="1500" b="1" spc="135" kern="0" dirty="0">
+                <a:solidFill>
+                  <a:srgbClr val="006C9F"/>
+                </a:solidFill>
+                <a:latin typeface="Arial" pitchFamily="34" charset="0"/>
+                <a:ea typeface="Arial" pitchFamily="34" charset="-122"/>
+                <a:cs typeface="Arial" pitchFamily="34" charset="-120"/>
+              </a:rPr>
+              <a:t>4 · DESIGN SYSTEM</a:t>
+            </a:r>
+            <a:endParaRPr lang="en-US" sz="1500" dirty="0"/>
+          </a:p>
+        </p:txBody>
+      </p:sp>
+      <p:sp>
+        <p:nvSpPr>
+          <p:cNvPr id="46" name="Shape 44"/>
+          <p:cNvSpPr/>
+          <p:nvPr/>
+        </p:nvSpPr>
+        <p:spPr>
+          <a:xfrm>
+            <a:off x="9467850" y="5705252"/>
+            <a:ext cx="3881438" cy="709613"/>
+          </a:xfrm>
+          <a:prstGeom prst="roundRect">
+            <a:avLst>
+              <a:gd name="adj" fmla="val 16107"/>
+            </a:avLst>
+          </a:prstGeom>
+          <a:solidFill>
+            <a:srgbClr val="F7FAFC"/>
+          </a:solidFill>
+          <a:ln w="9525">
+            <a:solidFill>
+              <a:srgbClr val="E2EAEF"/>
+            </a:solidFill>
+            <a:prstDash val="solid"/>
+          </a:ln>
+        </p:spPr>
+      </p:sp>
+      <p:sp>
+        <p:nvSpPr>
+          <p:cNvPr id="47" name="Text 45"/>
+          <p:cNvSpPr/>
+          <p:nvPr/>
+        </p:nvSpPr>
+        <p:spPr>
+          <a:xfrm>
+            <a:off x="9610725" y="5810027"/>
+            <a:ext cx="3712131" cy="538163"/>
+          </a:xfrm>
+          <a:prstGeom prst="rect">
+            <a:avLst/>
+          </a:prstGeom>
+          <a:noFill/>
+          <a:ln/>
+        </p:spPr>
+        <p:txBody>
+          <a:bodyPr wrap="square" lIns="25400" tIns="25400" rIns="25400" bIns="25400" rtlCol="0" anchor="t">
+            <a:normAutofit/>
+          </a:bodyPr>
+          <a:lstStyle/>
+          <a:p>
+            <a:pPr algn="l" indent="0" marL="0">
+              <a:lnSpc>
+                <a:spcPct val="109375"/>
+              </a:lnSpc>
+              <a:buNone/>
+            </a:pPr>
+            <a:r>
+              <a:rPr lang="en-US" sz="1575" b="1" dirty="0">
+                <a:solidFill>
+                  <a:srgbClr val="00334F"/>
+                </a:solidFill>
+                <a:highlight>
+                  <a:srgbClr val="F7FAFC"/>
+                </a:highlight>
+                <a:latin typeface="Arial" pitchFamily="34" charset="0"/>
+                <a:ea typeface="Arial" pitchFamily="34" charset="-122"/>
+                <a:cs typeface="Arial" pitchFamily="34" charset="-120"/>
+              </a:rPr>
+              <a:t>Existing product </a:t>
+            </a:r>
+            <a:pPr algn="l" indent="0" marL="0">
+              <a:lnSpc>
+                <a:spcPct val="109375"/>
+              </a:lnSpc>
+              <a:buNone/>
+            </a:pPr>
+            <a:r>
+              <a:rPr lang="en-US" sz="1575" dirty="0">
+                <a:solidFill>
+                  <a:srgbClr val="35566B"/>
+                </a:solidFill>
+                <a:latin typeface="Arial" pitchFamily="34" charset="0"/>
+                <a:ea typeface="Arial" pitchFamily="34" charset="-122"/>
+                <a:cs typeface="Arial" pitchFamily="34" charset="-120"/>
+              </a:rPr>
+              <a:t>docs/landcare/app.css</a:t>
+            </a:r>
+            <a:endParaRPr lang="en-US" sz="1575" dirty="0"/>
+          </a:p>
+        </p:txBody>
+      </p:sp>
+      <p:sp>
+        <p:nvSpPr>
+          <p:cNvPr id="48" name="Shape 46"/>
+          <p:cNvSpPr/>
+          <p:nvPr/>
+        </p:nvSpPr>
+        <p:spPr>
+          <a:xfrm>
+            <a:off x="13444538" y="5705252"/>
+            <a:ext cx="3881438" cy="709613"/>
+          </a:xfrm>
+          <a:prstGeom prst="roundRect">
+            <a:avLst>
+              <a:gd name="adj" fmla="val 16107"/>
+            </a:avLst>
+          </a:prstGeom>
+          <a:solidFill>
+            <a:srgbClr val="EEF8FB"/>
+          </a:solidFill>
+          <a:ln w="9525">
+            <a:solidFill>
+              <a:srgbClr val="BFE0EF"/>
+            </a:solidFill>
+            <a:prstDash val="solid"/>
+          </a:ln>
+        </p:spPr>
+      </p:sp>
+      <p:sp>
+        <p:nvSpPr>
+          <p:cNvPr id="49" name="Text 47"/>
+          <p:cNvSpPr/>
+          <p:nvPr/>
+        </p:nvSpPr>
+        <p:spPr>
+          <a:xfrm>
+            <a:off x="13587413" y="5810027"/>
+            <a:ext cx="3712131" cy="538163"/>
+          </a:xfrm>
+          <a:prstGeom prst="rect">
+            <a:avLst/>
+          </a:prstGeom>
+          <a:noFill/>
+          <a:ln/>
+        </p:spPr>
+        <p:txBody>
+          <a:bodyPr wrap="square" lIns="25400" tIns="25400" rIns="25400" bIns="25400" rtlCol="0" anchor="t">
+            <a:normAutofit/>
+          </a:bodyPr>
+          <a:lstStyle/>
+          <a:p>
+            <a:pPr algn="l" indent="0" marL="0">
+              <a:lnSpc>
+                <a:spcPct val="109375"/>
+              </a:lnSpc>
+              <a:buNone/>
+            </a:pPr>
+            <a:r>
+              <a:rPr lang="en-US" sz="1575" b="1" dirty="0">
+                <a:solidFill>
+                  <a:srgbClr val="00334F"/>
+                </a:solidFill>
+                <a:highlight>
+                  <a:srgbClr val="EEF8FB"/>
+                </a:highlight>
+                <a:latin typeface="Arial" pitchFamily="34" charset="0"/>
+                <a:ea typeface="Arial" pitchFamily="34" charset="-122"/>
+                <a:cs typeface="Arial" pitchFamily="34" charset="-120"/>
+              </a:rPr>
+              <a:t>New dashboard </a:t>
+            </a:r>
+            <a:pPr algn="l" indent="0" marL="0">
+              <a:lnSpc>
+                <a:spcPct val="109375"/>
+              </a:lnSpc>
+              <a:buNone/>
+            </a:pPr>
+            <a:r>
+              <a:rPr lang="en-US" sz="1575" dirty="0">
+                <a:solidFill>
+                  <a:srgbClr val="35566B"/>
+                </a:solidFill>
+                <a:latin typeface="Arial" pitchFamily="34" charset="0"/>
+                <a:ea typeface="Arial" pitchFamily="34" charset="-122"/>
+                <a:cs typeface="Arial" pitchFamily="34" charset="-120"/>
+              </a:rPr>
+              <a:t>docs/design-system/executive-bi.css</a:t>
+            </a:r>
+            <a:endParaRPr lang="en-US" sz="1575" dirty="0"/>
+          </a:p>
+        </p:txBody>
+      </p:sp>
+      <p:sp>
+        <p:nvSpPr>
+          <p:cNvPr id="50" name="Text 48"/>
+          <p:cNvSpPr/>
+          <p:nvPr/>
+        </p:nvSpPr>
+        <p:spPr>
+          <a:xfrm>
+            <a:off x="9467850" y="6510114"/>
+            <a:ext cx="8643938" cy="288131"/>
+          </a:xfrm>
+          <a:prstGeom prst="rect">
+            <a:avLst/>
+          </a:prstGeom>
+          <a:noFill/>
+          <a:ln/>
+        </p:spPr>
+        <p:txBody>
+          <a:bodyPr wrap="square" lIns="25400" tIns="25400" rIns="25400" bIns="25400" rtlCol="0" anchor="t">
+            <a:normAutofit/>
+          </a:bodyPr>
+          <a:lstStyle/>
+          <a:p>
+            <a:pPr algn="l" indent="0" marL="0">
+              <a:lnSpc>
+                <a:spcPct val="109375"/>
+              </a:lnSpc>
+              <a:buNone/>
+            </a:pPr>
+            <a:r>
+              <a:rPr lang="en-US" sz="1575" b="1" dirty="0">
+                <a:solidFill>
+                  <a:srgbClr val="35566B"/>
+                </a:solidFill>
+                <a:latin typeface="Arial" pitchFamily="34" charset="0"/>
+                <a:ea typeface="Arial" pitchFamily="34" charset="-122"/>
+                <a:cs typeface="Arial" pitchFamily="34" charset="-120"/>
+              </a:rPr>
+              <a:t>Decision first · 3 to 5 KPIs · one dominant map or chart · operational ledger</a:t>
+            </a:r>
+            <a:endParaRPr lang="en-US" sz="1575" dirty="0"/>
+          </a:p>
+        </p:txBody>
+      </p:sp>
+      <p:sp>
+        <p:nvSpPr>
+          <p:cNvPr id="51" name="Shape 49"/>
+          <p:cNvSpPr/>
+          <p:nvPr/>
+        </p:nvSpPr>
+        <p:spPr>
+          <a:xfrm>
+            <a:off x="723900" y="8207871"/>
+            <a:ext cx="16840200" cy="1507629"/>
+          </a:xfrm>
+          <a:prstGeom prst="roundRect">
+            <a:avLst>
+              <a:gd name="adj" fmla="val 11372"/>
             </a:avLst>
           </a:prstGeom>
           <a:solidFill>
@@ -8379,14 +11764,14 @@
       </p:sp>
       <p:sp>
         <p:nvSpPr>
-          <p:cNvPr id="9" name="Text 6"/>
-          <p:cNvSpPr/>
-          <p:nvPr/>
-        </p:nvSpPr>
-        <p:spPr>
-          <a:xfrm>
-            <a:off x="1009650" y="8350746"/>
-            <a:ext cx="17895570" cy="300038"/>
+          <p:cNvPr id="52" name="Text 50"/>
+          <p:cNvSpPr/>
+          <p:nvPr/>
+        </p:nvSpPr>
+        <p:spPr>
+          <a:xfrm>
+            <a:off x="1009650" y="8398371"/>
+            <a:ext cx="17895570" cy="252413"/>
           </a:xfrm>
           <a:prstGeom prst="rect">
             <a:avLst/>
@@ -8408,9 +11793,9 @@
                 <a:solidFill>
                   <a:srgbClr val="9FE0F6"/>
                 </a:solidFill>
-                <a:latin typeface="Manrope" pitchFamily="34" charset="0"/>
-                <a:ea typeface="Manrope" pitchFamily="34" charset="-122"/>
-                <a:cs typeface="Manrope" pitchFamily="34" charset="-120"/>
+                <a:latin typeface="Arial" pitchFamily="34" charset="0"/>
+                <a:ea typeface="Arial" pitchFamily="34" charset="-122"/>
+                <a:cs typeface="Arial" pitchFamily="34" charset="-120"/>
               </a:rPr>
               <a:t>OPEN ITEMS FOR THE NEXT OWNER TO DECIDE</a:t>
             </a:r>
@@ -8420,7 +11805,7 @@
       </p:sp>
       <p:sp>
         <p:nvSpPr>
-          <p:cNvPr id="10" name="Text 7"/>
+          <p:cNvPr id="53" name="Text 51"/>
           <p:cNvSpPr/>
           <p:nvPr/>
         </p:nvSpPr>
@@ -8443,7 +11828,7 @@
           <a:p>
             <a:pPr algn="l" indent="0" marL="0">
               <a:lnSpc>
-                <a:spcPct val="95333"/>
+                <a:spcPct val="114400"/>
               </a:lnSpc>
               <a:buNone/>
             </a:pPr>
@@ -8452,15 +11837,15 @@
                 <a:solidFill>
                   <a:srgbClr val="FFFFFF"/>
                 </a:solidFill>
-                <a:latin typeface="Manrope" pitchFamily="34" charset="0"/>
-                <a:ea typeface="Manrope" pitchFamily="34" charset="-122"/>
-                <a:cs typeface="Manrope" pitchFamily="34" charset="-120"/>
+                <a:latin typeface="Arial" pitchFamily="34" charset="0"/>
+                <a:ea typeface="Arial" pitchFamily="34" charset="-122"/>
+                <a:cs typeface="Arial" pitchFamily="34" charset="-120"/>
               </a:rPr>
               <a:t>Survey123 evidence path is code-complete but not deployed. </a:t>
             </a:r>
             <a:pPr algn="l" indent="0" marL="0">
               <a:lnSpc>
-                <a:spcPct val="95333"/>
+                <a:spcPct val="114400"/>
               </a:lnSpc>
               <a:buNone/>
             </a:pPr>
@@ -8469,11 +11854,11 @@
                 <a:solidFill>
                   <a:srgbClr val="DFF1FA"/>
                 </a:solidFill>
-                <a:latin typeface="Manrope" pitchFamily="34" charset="0"/>
-                <a:ea typeface="Manrope" pitchFamily="34" charset="-122"/>
-                <a:cs typeface="Manrope" pitchFamily="34" charset="-120"/>
-              </a:rPr>
-              <a:t>The single blocker on the replacement.</a:t>
+                <a:latin typeface="Arial" pitchFamily="34" charset="0"/>
+                <a:ea typeface="Arial" pitchFamily="34" charset="-122"/>
+                <a:cs typeface="Arial" pitchFamily="34" charset="-120"/>
+              </a:rPr>
+              <a:t>The single blocker on replacing Regrid.</a:t>
             </a:r>
             <a:endParaRPr lang="en-US" sz="1650" dirty="0"/>
           </a:p>
@@ -8481,7 +11866,7 @@
       </p:sp>
       <p:sp>
         <p:nvSpPr>
-          <p:cNvPr id="11" name="Text 8"/>
+          <p:cNvPr id="54" name="Text 52"/>
           <p:cNvSpPr/>
           <p:nvPr/>
         </p:nvSpPr>
@@ -8504,7 +11889,7 @@
           <a:p>
             <a:pPr algn="l" indent="0" marL="0">
               <a:lnSpc>
-                <a:spcPct val="95333"/>
+                <a:spcPct val="114400"/>
               </a:lnSpc>
               <a:buNone/>
             </a:pPr>
@@ -8513,15 +11898,15 @@
                 <a:solidFill>
                   <a:srgbClr val="FFFFFF"/>
                 </a:solidFill>
-                <a:latin typeface="Manrope" pitchFamily="34" charset="0"/>
-                <a:ea typeface="Manrope" pitchFamily="34" charset="-122"/>
-                <a:cs typeface="Manrope" pitchFamily="34" charset="-120"/>
-              </a:rPr>
-              <a:t>Survey123 submissions do not change official completion in v1. </a:t>
-            </a:r>
-            <a:pPr algn="l" indent="0" marL="0">
-              <a:lnSpc>
-                <a:spcPct val="95333"/>
+                <a:latin typeface="Arial" pitchFamily="34" charset="0"/>
+                <a:ea typeface="Arial" pitchFamily="34" charset="-122"/>
+                <a:cs typeface="Arial" pitchFamily="34" charset="-120"/>
+              </a:rPr>
+              <a:t>Power BI workspace administration is not yet granted. </a:t>
+            </a:r>
+            <a:pPr algn="l" indent="0" marL="0">
+              <a:lnSpc>
+                <a:spcPct val="114400"/>
               </a:lnSpc>
               <a:buNone/>
             </a:pPr>
@@ -8530,11 +11915,11 @@
                 <a:solidFill>
                   <a:srgbClr val="DFF1FA"/>
                 </a:solidFill>
-                <a:latin typeface="Manrope" pitchFamily="34" charset="0"/>
-                <a:ea typeface="Manrope" pitchFamily="34" charset="-122"/>
-                <a:cs typeface="Manrope" pitchFamily="34" charset="-120"/>
-              </a:rPr>
-              <a:t>Whether they should is a governance call.</a:t>
+                <a:latin typeface="Arial" pitchFamily="34" charset="0"/>
+                <a:ea typeface="Arial" pitchFamily="34" charset="-122"/>
+                <a:cs typeface="Arial" pitchFamily="34" charset="-120"/>
+              </a:rPr>
+              <a:t>Refresh history and service-principal access stay blocked until it is.</a:t>
             </a:r>
             <a:endParaRPr lang="en-US" sz="1650" dirty="0"/>
           </a:p>
@@ -8542,7 +11927,7 @@
       </p:sp>
       <p:sp>
         <p:nvSpPr>
-          <p:cNvPr id="12" name="Text 9"/>
+          <p:cNvPr id="55" name="Text 53"/>
           <p:cNvSpPr/>
           <p:nvPr/>
         </p:nvSpPr>
@@ -8565,7 +11950,7 @@
           <a:p>
             <a:pPr algn="l" indent="0" marL="0">
               <a:lnSpc>
-                <a:spcPct val="95333"/>
+                <a:spcPct val="114400"/>
               </a:lnSpc>
               <a:buNone/>
             </a:pPr>
@@ -8574,15 +11959,15 @@
                 <a:solidFill>
                   <a:srgbClr val="FFFFFF"/>
                 </a:solidFill>
-                <a:latin typeface="Manrope" pitchFamily="34" charset="0"/>
-                <a:ea typeface="Manrope" pitchFamily="34" charset="-122"/>
-                <a:cs typeface="Manrope" pitchFamily="34" charset="-120"/>
-              </a:rPr>
-              <a:t>Pages URLs did not follow the repository rename. </a:t>
-            </a:r>
-            <a:pPr algn="l" indent="0" marL="0">
-              <a:lnSpc>
-                <a:spcPct val="95333"/>
+                <a:latin typeface="Arial" pitchFamily="34" charset="0"/>
+                <a:ea typeface="Arial" pitchFamily="34" charset="-122"/>
+                <a:cs typeface="Arial" pitchFamily="34" charset="-120"/>
+              </a:rPr>
+              <a:t>The deprecated 7 AM task still needs archiving and disabling on the VM </a:t>
+            </a:r>
+            <a:pPr algn="l" indent="0" marL="0">
+              <a:lnSpc>
+                <a:spcPct val="114400"/>
               </a:lnSpc>
               <a:buNone/>
             </a:pPr>
@@ -8591,11 +11976,11 @@
                 <a:solidFill>
                   <a:srgbClr val="DFF1FA"/>
                 </a:solidFill>
-                <a:latin typeface="Manrope" pitchFamily="34" charset="0"/>
-                <a:ea typeface="Manrope" pitchFamily="34" charset="-122"/>
-                <a:cs typeface="Manrope" pitchFamily="34" charset="-120"/>
-              </a:rPr>
-              <a:t>Move every ArcGIS embed and bookmark by hand.</a:t>
+                <a:latin typeface="Arial" pitchFamily="34" charset="0"/>
+                <a:ea typeface="Arial" pitchFamily="34" charset="-122"/>
+                <a:cs typeface="Arial" pitchFamily="34" charset="-120"/>
+              </a:rPr>
+              <a:t>— not deleting on day one.</a:t>
             </a:r>
             <a:endParaRPr lang="en-US" sz="1650" dirty="0"/>
           </a:p>
